--- a/docs/negocio.pptx
+++ b/docs/negocio.pptx
@@ -3141,14 +3141,58 @@
       </p:sp>
       <p:sp>
         <p:nvSpPr>
-          <p:cNvPr id="3" name="TextBox 2"/>
-          <p:cNvSpPr txBox="1"/>
-          <p:nvPr/>
-        </p:nvSpPr>
-        <p:spPr>
-          <a:xfrm>
-            <a:off x="731520" y="914400"/>
-            <a:ext cx="10972800" cy="274320"/>
+          <p:cNvPr id="3" name="Rectangle 2"/>
+          <p:cNvSpPr/>
+          <p:nvPr/>
+        </p:nvSpPr>
+        <p:spPr>
+          <a:xfrm>
+            <a:off x="0" y="0"/>
+            <a:ext cx="365760" cy="6858000"/>
+          </a:xfrm>
+          <a:prstGeom prst="rect">
+            <a:avLst/>
+          </a:prstGeom>
+          <a:solidFill>
+            <a:srgbClr val="10B981"/>
+          </a:solidFill>
+          <a:ln>
+            <a:noFill/>
+          </a:ln>
+          <a:effectLst/>
+        </p:spPr>
+        <p:style>
+          <a:lnRef idx="1">
+            <a:schemeClr val="accent1"/>
+          </a:lnRef>
+          <a:fillRef idx="3">
+            <a:schemeClr val="accent1"/>
+          </a:fillRef>
+          <a:effectRef idx="2">
+            <a:schemeClr val="accent1"/>
+          </a:effectRef>
+          <a:fontRef idx="minor">
+            <a:schemeClr val="lt1"/>
+          </a:fontRef>
+        </p:style>
+        <p:txBody>
+          <a:bodyPr rtlCol="0" anchor="ctr"/>
+          <a:lstStyle/>
+          <a:p>
+            <a:pPr algn="ctr"/>
+          </a:p>
+        </p:txBody>
+      </p:sp>
+      <p:sp>
+        <p:nvSpPr>
+          <p:cNvPr id="4" name="TextBox 3"/>
+          <p:cNvSpPr txBox="1"/>
+          <p:nvPr/>
+        </p:nvSpPr>
+        <p:spPr>
+          <a:xfrm>
+            <a:off x="1097280" y="1097280"/>
+            <a:ext cx="10058400" cy="274320"/>
           </a:xfrm>
           <a:prstGeom prst="rect">
             <a:avLst/>
@@ -3169,20 +3213,20 @@
                 </a:solidFill>
                 <a:latin typeface="Calibri"/>
               </a:rPr>
-              <a:t>PORTFOLIO · FASHION AI ENGINE</a:t>
-            </a:r>
-          </a:p>
-        </p:txBody>
-      </p:sp>
-      <p:sp>
-        <p:nvSpPr>
-          <p:cNvPr id="4" name="TextBox 3"/>
-          <p:cNvSpPr txBox="1"/>
-          <p:nvPr/>
-        </p:nvSpPr>
-        <p:spPr>
-          <a:xfrm>
-            <a:off x="731520" y="1463040"/>
+              <a:t>BLOQUE 1 · NEGOCIO</a:t>
+            </a:r>
+          </a:p>
+        </p:txBody>
+      </p:sp>
+      <p:sp>
+        <p:nvSpPr>
+          <p:cNvPr id="5" name="TextBox 4"/>
+          <p:cNvSpPr txBox="1"/>
+          <p:nvPr/>
+        </p:nvSpPr>
+        <p:spPr>
+          <a:xfrm>
+            <a:off x="1097280" y="1554480"/>
             <a:ext cx="10972800" cy="1371600"/>
           </a:xfrm>
           <a:prstGeom prst="rect">
@@ -3198,64 +3242,97 @@
           <a:p>
             <a:pPr algn="l"/>
             <a:r>
-              <a:rPr sz="5400" b="1" i="0">
+              <a:rPr sz="6400" b="1" i="0">
                 <a:solidFill>
                   <a:srgbClr val="FFFFFF"/>
                 </a:solidFill>
                 <a:latin typeface="Calibri"/>
               </a:rPr>
-              <a:t>From overproduction
-to optimization.</a:t>
-            </a:r>
-          </a:p>
-        </p:txBody>
-      </p:sp>
-      <p:sp>
-        <p:nvSpPr>
-          <p:cNvPr id="5" name="TextBox 4"/>
-          <p:cNvSpPr txBox="1"/>
-          <p:nvPr/>
-        </p:nvSpPr>
-        <p:spPr>
-          <a:xfrm>
-            <a:off x="731520" y="3657600"/>
-            <a:ext cx="10058400" cy="1371600"/>
-          </a:xfrm>
-          <a:prstGeom prst="rect">
-            <a:avLst/>
-          </a:prstGeom>
-          <a:noFill/>
-        </p:spPr>
-        <p:txBody>
-          <a:bodyPr wrap="square" lIns="0" rIns="0" tIns="0" bIns="0">
-            <a:spAutoFit/>
-          </a:bodyPr>
-          <a:lstStyle/>
-          <a:p>
-            <a:pPr algn="l"/>
-            <a:r>
-              <a:rPr sz="2000" b="0" i="0">
+              <a:t>Fashion AI Engine</a:t>
+            </a:r>
+          </a:p>
+        </p:txBody>
+      </p:sp>
+      <p:sp>
+        <p:nvSpPr>
+          <p:cNvPr id="6" name="TextBox 5"/>
+          <p:cNvSpPr txBox="1"/>
+          <p:nvPr/>
+        </p:nvSpPr>
+        <p:spPr>
+          <a:xfrm>
+            <a:off x="1097280" y="3291840"/>
+            <a:ext cx="10972800" cy="640080"/>
+          </a:xfrm>
+          <a:prstGeom prst="rect">
+            <a:avLst/>
+          </a:prstGeom>
+          <a:noFill/>
+        </p:spPr>
+        <p:txBody>
+          <a:bodyPr wrap="square" lIns="0" rIns="0" tIns="0" bIns="0">
+            <a:spAutoFit/>
+          </a:bodyPr>
+          <a:lstStyle/>
+          <a:p>
+            <a:pPr algn="l"/>
+            <a:r>
+              <a:rPr sz="2400" b="0" i="1">
                 <a:solidFill>
                   <a:srgbClr val="CBD5E1"/>
                 </a:solidFill>
                 <a:latin typeface="Calibri"/>
               </a:rPr>
-              <a:t>A Machine Learning decision engine for fashion brands
-that turns predictions into quantified business impact.</a:t>
+              <a:t>El motor no produce menos.</a:t>
+            </a:r>
+          </a:p>
+        </p:txBody>
+      </p:sp>
+      <p:sp>
+        <p:nvSpPr>
+          <p:cNvPr id="7" name="TextBox 6"/>
+          <p:cNvSpPr txBox="1"/>
+          <p:nvPr/>
+        </p:nvSpPr>
+        <p:spPr>
+          <a:xfrm>
+            <a:off x="1097280" y="3840480"/>
+            <a:ext cx="10972800" cy="640080"/>
+          </a:xfrm>
+          <a:prstGeom prst="rect">
+            <a:avLst/>
+          </a:prstGeom>
+          <a:noFill/>
+        </p:spPr>
+        <p:txBody>
+          <a:bodyPr wrap="square" lIns="0" rIns="0" tIns="0" bIns="0">
+            <a:spAutoFit/>
+          </a:bodyPr>
+          <a:lstStyle/>
+          <a:p>
+            <a:pPr algn="l"/>
+            <a:r>
+              <a:rPr sz="2400" b="1" i="1">
+                <a:solidFill>
+                  <a:srgbClr val="10B981"/>
+                </a:solidFill>
+                <a:latin typeface="Calibri"/>
+              </a:rPr>
+              <a:t>Produce mejor.</a:t>
             </a:r>
           </a:p>
         </p:txBody>
       </p:sp>
       <p:cxnSp>
         <p:nvCxnSpPr>
-          <p:cNvPr id="6" name="Connector 5"/>
+          <p:cNvPr id="8" name="Connector 7"/>
           <p:cNvCxnSpPr/>
           <p:nvPr/>
         </p:nvCxnSpPr>
         <p:spPr>
           <a:xfrm>
-            <a:off x="731520" y="6126480"/>
-            <a:ext cx="3840480" cy="0"/>
+            <a:off x="1097280" y="5029200"/>
+            <a:ext cx="3474720" cy="0"/>
           </a:xfrm>
           <a:prstGeom prst="line">
             <a:avLst/>
@@ -3283,35 +3360,71 @@
       </p:cxnSp>
       <p:sp>
         <p:nvSpPr>
-          <p:cNvPr id="7" name="TextBox 6"/>
-          <p:cNvSpPr txBox="1"/>
-          <p:nvPr/>
-        </p:nvSpPr>
-        <p:spPr>
-          <a:xfrm>
-            <a:off x="731520" y="6263640"/>
-            <a:ext cx="10972800" cy="365760"/>
-          </a:xfrm>
-          <a:prstGeom prst="rect">
-            <a:avLst/>
-          </a:prstGeom>
-          <a:noFill/>
-        </p:spPr>
-        <p:txBody>
-          <a:bodyPr wrap="square" lIns="0" rIns="0" tIns="0" bIns="0">
-            <a:spAutoFit/>
-          </a:bodyPr>
-          <a:lstStyle/>
-          <a:p>
-            <a:pPr algn="l"/>
-            <a:r>
-              <a:rPr sz="1200" b="0" i="0">
+          <p:cNvPr id="9" name="TextBox 8"/>
+          <p:cNvSpPr txBox="1"/>
+          <p:nvPr/>
+        </p:nvSpPr>
+        <p:spPr>
+          <a:xfrm>
+            <a:off x="1097280" y="5166360"/>
+            <a:ext cx="10058400" cy="365760"/>
+          </a:xfrm>
+          <a:prstGeom prst="rect">
+            <a:avLst/>
+          </a:prstGeom>
+          <a:noFill/>
+        </p:spPr>
+        <p:txBody>
+          <a:bodyPr wrap="square" lIns="0" rIns="0" tIns="0" bIns="0">
+            <a:spAutoFit/>
+          </a:bodyPr>
+          <a:lstStyle/>
+          <a:p>
+            <a:pPr algn="l"/>
+            <a:r>
+              <a:rPr sz="1400" b="0" i="0">
                 <a:solidFill>
                   <a:srgbClr val="CBD5E1"/>
                 </a:solidFill>
                 <a:latin typeface="Calibri"/>
               </a:rPr>
               <a:t>Esther Barranco Motos · Mayo 2026</a:t>
+            </a:r>
+          </a:p>
+        </p:txBody>
+      </p:sp>
+      <p:sp>
+        <p:nvSpPr>
+          <p:cNvPr id="10" name="TextBox 9"/>
+          <p:cNvSpPr txBox="1"/>
+          <p:nvPr/>
+        </p:nvSpPr>
+        <p:spPr>
+          <a:xfrm>
+            <a:off x="1097280" y="5577840"/>
+            <a:ext cx="10058400" cy="365760"/>
+          </a:xfrm>
+          <a:prstGeom prst="rect">
+            <a:avLst/>
+          </a:prstGeom>
+          <a:noFill/>
+        </p:spPr>
+        <p:txBody>
+          <a:bodyPr wrap="square" lIns="0" rIns="0" tIns="0" bIns="0">
+            <a:spAutoFit/>
+          </a:bodyPr>
+          <a:lstStyle/>
+          <a:p>
+            <a:pPr algn="l"/>
+            <a:r>
+              <a:rPr sz="1400" b="1" i="0">
+                <a:solidFill>
+                  <a:srgbClr val="10B981"/>
+                </a:solidFill>
+                <a:latin typeface="Consolas"/>
+                <a:hlinkClick r:id="rId2"/>
+              </a:rPr>
+              <a:t>fashion-ai-engine-app.streamlit.app</a:t>
             </a:r>
           </a:p>
         </p:txBody>
@@ -3342,7 +3455,7 @@
         </p:nvSpPr>
         <p:spPr>
           <a:xfrm>
-            <a:off x="731520" y="457200"/>
+            <a:off x="457200" y="457200"/>
             <a:ext cx="10972800" cy="274320"/>
           </a:xfrm>
           <a:prstGeom prst="rect">
@@ -3364,7 +3477,7 @@
                 </a:solidFill>
                 <a:latin typeface="Calibri"/>
               </a:rPr>
-              <a:t>SECCIÓN 1 · EL PROBLEMA</a:t>
+              <a:t>EL PROBLEMA</a:t>
             </a:r>
           </a:p>
         </p:txBody>
@@ -3377,29 +3490,29 @@
         </p:nvSpPr>
         <p:spPr>
           <a:xfrm>
-            <a:off x="731520" y="777240"/>
-            <a:ext cx="10972800" cy="731520"/>
-          </a:xfrm>
-          <a:prstGeom prst="rect">
-            <a:avLst/>
-          </a:prstGeom>
-          <a:noFill/>
-        </p:spPr>
-        <p:txBody>
-          <a:bodyPr wrap="square" lIns="0" rIns="0" tIns="0" bIns="0">
-            <a:spAutoFit/>
-          </a:bodyPr>
-          <a:lstStyle/>
-          <a:p>
-            <a:pPr algn="l"/>
-            <a:r>
-              <a:rPr sz="2800" b="1" i="0">
+            <a:off x="457200" y="777240"/>
+            <a:ext cx="10972800" cy="777240"/>
+          </a:xfrm>
+          <a:prstGeom prst="rect">
+            <a:avLst/>
+          </a:prstGeom>
+          <a:noFill/>
+        </p:spPr>
+        <p:txBody>
+          <a:bodyPr wrap="square" lIns="0" rIns="0" tIns="0" bIns="0">
+            <a:spAutoFit/>
+          </a:bodyPr>
+          <a:lstStyle/>
+          <a:p>
+            <a:pPr algn="l"/>
+            <a:r>
+              <a:rPr sz="3000" b="1" i="0">
                 <a:solidFill>
                   <a:srgbClr val="0F172A"/>
                 </a:solidFill>
                 <a:latin typeface="Calibri"/>
               </a:rPr>
-              <a:t>30% de la producción se destruye o rebaja</a:t>
+              <a:t>La moda destruye el 30% de su producción cada año</a:t>
             </a:r>
           </a:p>
         </p:txBody>
@@ -3412,8 +3525,8 @@
         </p:nvCxnSpPr>
         <p:spPr>
           <a:xfrm>
-            <a:off x="731520" y="1554480"/>
-            <a:ext cx="10698480" cy="0"/>
+            <a:off x="457200" y="1691640"/>
+            <a:ext cx="11274552" cy="0"/>
           </a:xfrm>
           <a:prstGeom prst="line">
             <a:avLst/>
@@ -3447,25 +3560,25 @@
         </p:nvSpPr>
         <p:spPr>
           <a:xfrm>
-            <a:off x="731520" y="2011680"/>
-            <a:ext cx="3657600" cy="1371600"/>
-          </a:xfrm>
-          <a:prstGeom prst="rect">
-            <a:avLst/>
-          </a:prstGeom>
-          <a:noFill/>
-        </p:spPr>
-        <p:txBody>
-          <a:bodyPr wrap="square" lIns="0" rIns="0" tIns="0" bIns="0">
-            <a:spAutoFit/>
-          </a:bodyPr>
-          <a:lstStyle/>
-          <a:p>
-            <a:pPr algn="l"/>
-            <a:r>
-              <a:rPr sz="8400" b="1" i="0">
-                <a:solidFill>
-                  <a:srgbClr val="EF4444"/>
+            <a:off x="457200" y="1828800"/>
+            <a:ext cx="3749039" cy="1280160"/>
+          </a:xfrm>
+          <a:prstGeom prst="rect">
+            <a:avLst/>
+          </a:prstGeom>
+          <a:noFill/>
+        </p:spPr>
+        <p:txBody>
+          <a:bodyPr wrap="square" lIns="0" rIns="0" tIns="0" bIns="0">
+            <a:spAutoFit/>
+          </a:bodyPr>
+          <a:lstStyle/>
+          <a:p>
+            <a:pPr algn="ctr"/>
+            <a:r>
+              <a:rPr sz="6400" b="1" i="0">
+                <a:solidFill>
+                  <a:srgbClr val="10B981"/>
                 </a:solidFill>
                 <a:latin typeface="Calibri"/>
               </a:rPr>
@@ -3482,29 +3595,29 @@
         </p:nvSpPr>
         <p:spPr>
           <a:xfrm>
-            <a:off x="731520" y="3383280"/>
-            <a:ext cx="3657600" cy="1371600"/>
-          </a:xfrm>
-          <a:prstGeom prst="rect">
-            <a:avLst/>
-          </a:prstGeom>
-          <a:noFill/>
-        </p:spPr>
-        <p:txBody>
-          <a:bodyPr wrap="square" lIns="0" rIns="0" tIns="0" bIns="0">
-            <a:spAutoFit/>
-          </a:bodyPr>
-          <a:lstStyle/>
-          <a:p>
-            <a:pPr algn="l"/>
-            <a:r>
-              <a:rPr sz="1400" b="0" i="0">
-                <a:solidFill>
-                  <a:srgbClr val="1E293B"/>
-                </a:solidFill>
-                <a:latin typeface="Calibri"/>
-              </a:rPr>
-              <a:t>de la producción anual de moda termina destruida o con rebaja masiva</a:t>
+            <a:off x="457200" y="3200400"/>
+            <a:ext cx="3749039" cy="365760"/>
+          </a:xfrm>
+          <a:prstGeom prst="rect">
+            <a:avLst/>
+          </a:prstGeom>
+          <a:noFill/>
+        </p:spPr>
+        <p:txBody>
+          <a:bodyPr wrap="square" lIns="0" rIns="0" tIns="0" bIns="0">
+            <a:spAutoFit/>
+          </a:bodyPr>
+          <a:lstStyle/>
+          <a:p>
+            <a:pPr algn="ctr"/>
+            <a:r>
+              <a:rPr sz="1400" b="1" i="0">
+                <a:solidFill>
+                  <a:srgbClr val="0F172A"/>
+                </a:solidFill>
+                <a:latin typeface="Calibri"/>
+              </a:rPr>
+              <a:t>de la producción anual</a:t>
             </a:r>
           </a:p>
         </p:txBody>
@@ -3517,25 +3630,60 @@
         </p:nvSpPr>
         <p:spPr>
           <a:xfrm>
-            <a:off x="4389120" y="2011680"/>
-            <a:ext cx="3657600" cy="1371600"/>
-          </a:xfrm>
-          <a:prstGeom prst="rect">
-            <a:avLst/>
-          </a:prstGeom>
-          <a:noFill/>
-        </p:spPr>
-        <p:txBody>
-          <a:bodyPr wrap="square" lIns="0" rIns="0" tIns="0" bIns="0">
-            <a:spAutoFit/>
-          </a:bodyPr>
-          <a:lstStyle/>
-          <a:p>
-            <a:pPr algn="l"/>
+            <a:off x="457200" y="3566160"/>
+            <a:ext cx="3749039" cy="365760"/>
+          </a:xfrm>
+          <a:prstGeom prst="rect">
+            <a:avLst/>
+          </a:prstGeom>
+          <a:noFill/>
+        </p:spPr>
+        <p:txBody>
+          <a:bodyPr wrap="square" lIns="0" rIns="0" tIns="0" bIns="0">
+            <a:spAutoFit/>
+          </a:bodyPr>
+          <a:lstStyle/>
+          <a:p>
+            <a:pPr algn="ctr"/>
+            <a:r>
+              <a:rPr sz="1100" b="0" i="0">
+                <a:solidFill>
+                  <a:srgbClr val="64748B"/>
+                </a:solidFill>
+                <a:latin typeface="Calibri"/>
+              </a:rPr>
+              <a:t>se destruye o rebaja masivamente</a:t>
+            </a:r>
+          </a:p>
+        </p:txBody>
+      </p:sp>
+      <p:sp>
+        <p:nvSpPr>
+          <p:cNvPr id="8" name="TextBox 7"/>
+          <p:cNvSpPr txBox="1"/>
+          <p:nvPr/>
+        </p:nvSpPr>
+        <p:spPr>
+          <a:xfrm>
+            <a:off x="4389120" y="1828800"/>
+            <a:ext cx="3749039" cy="1280160"/>
+          </a:xfrm>
+          <a:prstGeom prst="rect">
+            <a:avLst/>
+          </a:prstGeom>
+          <a:noFill/>
+        </p:spPr>
+        <p:txBody>
+          <a:bodyPr wrap="square" lIns="0" rIns="0" tIns="0" bIns="0">
+            <a:spAutoFit/>
+          </a:bodyPr>
+          <a:lstStyle/>
+          <a:p>
+            <a:pPr algn="ctr"/>
             <a:r>
               <a:rPr sz="6400" b="1" i="0">
                 <a:solidFill>
-                  <a:srgbClr val="F59E0B"/>
+                  <a:srgbClr val="10B981"/>
                 </a:solidFill>
                 <a:latin typeface="Calibri"/>
               </a:rPr>
@@ -3546,71 +3694,35 @@
       </p:sp>
       <p:sp>
         <p:nvSpPr>
-          <p:cNvPr id="8" name="TextBox 7"/>
-          <p:cNvSpPr txBox="1"/>
-          <p:nvPr/>
-        </p:nvSpPr>
-        <p:spPr>
-          <a:xfrm>
-            <a:off x="4389120" y="3383280"/>
-            <a:ext cx="3657600" cy="1371600"/>
-          </a:xfrm>
-          <a:prstGeom prst="rect">
-            <a:avLst/>
-          </a:prstGeom>
-          <a:noFill/>
-        </p:spPr>
-        <p:txBody>
-          <a:bodyPr wrap="square" lIns="0" rIns="0" tIns="0" bIns="0">
-            <a:spAutoFit/>
-          </a:bodyPr>
-          <a:lstStyle/>
-          <a:p>
-            <a:pPr algn="l"/>
-            <a:r>
-              <a:rPr sz="1400" b="0" i="0">
-                <a:solidFill>
-                  <a:srgbClr val="1E293B"/>
-                </a:solidFill>
-                <a:latin typeface="Calibri"/>
-              </a:rPr>
-              <a:t>tasas de devolución online por categoría según Narvar y Optoro</a:t>
-            </a:r>
-          </a:p>
-        </p:txBody>
-      </p:sp>
-      <p:sp>
-        <p:nvSpPr>
           <p:cNvPr id="9" name="TextBox 8"/>
           <p:cNvSpPr txBox="1"/>
           <p:nvPr/>
         </p:nvSpPr>
         <p:spPr>
           <a:xfrm>
-            <a:off x="8046720" y="2011680"/>
-            <a:ext cx="3657600" cy="1371600"/>
-          </a:xfrm>
-          <a:prstGeom prst="rect">
-            <a:avLst/>
-          </a:prstGeom>
-          <a:noFill/>
-        </p:spPr>
-        <p:txBody>
-          <a:bodyPr wrap="square" lIns="0" rIns="0" tIns="0" bIns="0">
-            <a:spAutoFit/>
-          </a:bodyPr>
-          <a:lstStyle/>
-          <a:p>
-            <a:pPr algn="l"/>
-            <a:r>
-              <a:rPr sz="4400" b="1" i="0">
+            <a:off x="4389120" y="3200400"/>
+            <a:ext cx="3749039" cy="365760"/>
+          </a:xfrm>
+          <a:prstGeom prst="rect">
+            <a:avLst/>
+          </a:prstGeom>
+          <a:noFill/>
+        </p:spPr>
+        <p:txBody>
+          <a:bodyPr wrap="square" lIns="0" rIns="0" tIns="0" bIns="0">
+            <a:spAutoFit/>
+          </a:bodyPr>
+          <a:lstStyle/>
+          <a:p>
+            <a:pPr algn="ctr"/>
+            <a:r>
+              <a:rPr sz="1400" b="1" i="0">
                 <a:solidFill>
                   <a:srgbClr val="0F172A"/>
                 </a:solidFill>
                 <a:latin typeface="Calibri"/>
               </a:rPr>
-              <a:t>Miles
-de M€</a:t>
+              <a:t>tasas de devolución online</a:t>
             </a:r>
           </a:p>
         </p:txBody>
@@ -3623,49 +3735,154 @@
         </p:nvSpPr>
         <p:spPr>
           <a:xfrm>
-            <a:off x="8046720" y="3383280"/>
-            <a:ext cx="3657600" cy="1371600"/>
-          </a:xfrm>
-          <a:prstGeom prst="rect">
-            <a:avLst/>
-          </a:prstGeom>
-          <a:noFill/>
-        </p:spPr>
-        <p:txBody>
-          <a:bodyPr wrap="square" lIns="0" rIns="0" tIns="0" bIns="0">
-            <a:spAutoFit/>
-          </a:bodyPr>
-          <a:lstStyle/>
-          <a:p>
-            <a:pPr algn="l"/>
-            <a:r>
-              <a:rPr sz="1400" b="0" i="0">
-                <a:solidFill>
-                  <a:srgbClr val="1E293B"/>
-                </a:solidFill>
-                <a:latin typeface="Calibri"/>
-              </a:rPr>
-              <a:t>de coste agregado anual + impacto medioambiental significativo</a:t>
-            </a:r>
-          </a:p>
-        </p:txBody>
-      </p:sp>
-      <p:sp>
-        <p:nvSpPr>
-          <p:cNvPr id="11" name="Rectangle 10"/>
+            <a:off x="4389120" y="3566160"/>
+            <a:ext cx="3749039" cy="365760"/>
+          </a:xfrm>
+          <a:prstGeom prst="rect">
+            <a:avLst/>
+          </a:prstGeom>
+          <a:noFill/>
+        </p:spPr>
+        <p:txBody>
+          <a:bodyPr wrap="square" lIns="0" rIns="0" tIns="0" bIns="0">
+            <a:spAutoFit/>
+          </a:bodyPr>
+          <a:lstStyle/>
+          <a:p>
+            <a:pPr algn="ctr"/>
+            <a:r>
+              <a:rPr sz="1100" b="0" i="0">
+                <a:solidFill>
+                  <a:srgbClr val="64748B"/>
+                </a:solidFill>
+                <a:latin typeface="Calibri"/>
+              </a:rPr>
+              <a:t>según categoría · Narvar, Optoro</a:t>
+            </a:r>
+          </a:p>
+        </p:txBody>
+      </p:sp>
+      <p:sp>
+        <p:nvSpPr>
+          <p:cNvPr id="11" name="TextBox 10"/>
+          <p:cNvSpPr txBox="1"/>
+          <p:nvPr/>
+        </p:nvSpPr>
+        <p:spPr>
+          <a:xfrm>
+            <a:off x="8321040" y="1828800"/>
+            <a:ext cx="3749039" cy="1280160"/>
+          </a:xfrm>
+          <a:prstGeom prst="rect">
+            <a:avLst/>
+          </a:prstGeom>
+          <a:noFill/>
+        </p:spPr>
+        <p:txBody>
+          <a:bodyPr wrap="square" lIns="0" rIns="0" tIns="0" bIns="0">
+            <a:spAutoFit/>
+          </a:bodyPr>
+          <a:lstStyle/>
+          <a:p>
+            <a:pPr algn="ctr"/>
+            <a:r>
+              <a:rPr sz="6400" b="1" i="0">
+                <a:solidFill>
+                  <a:srgbClr val="10B981"/>
+                </a:solidFill>
+                <a:latin typeface="Calibri"/>
+              </a:rPr>
+              <a:t>Miles M€</a:t>
+            </a:r>
+          </a:p>
+        </p:txBody>
+      </p:sp>
+      <p:sp>
+        <p:nvSpPr>
+          <p:cNvPr id="12" name="TextBox 11"/>
+          <p:cNvSpPr txBox="1"/>
+          <p:nvPr/>
+        </p:nvSpPr>
+        <p:spPr>
+          <a:xfrm>
+            <a:off x="8321040" y="3200400"/>
+            <a:ext cx="3749039" cy="365760"/>
+          </a:xfrm>
+          <a:prstGeom prst="rect">
+            <a:avLst/>
+          </a:prstGeom>
+          <a:noFill/>
+        </p:spPr>
+        <p:txBody>
+          <a:bodyPr wrap="square" lIns="0" rIns="0" tIns="0" bIns="0">
+            <a:spAutoFit/>
+          </a:bodyPr>
+          <a:lstStyle/>
+          <a:p>
+            <a:pPr algn="ctr"/>
+            <a:r>
+              <a:rPr sz="1400" b="1" i="0">
+                <a:solidFill>
+                  <a:srgbClr val="0F172A"/>
+                </a:solidFill>
+                <a:latin typeface="Calibri"/>
+              </a:rPr>
+              <a:t>perdidos cada año</a:t>
+            </a:r>
+          </a:p>
+        </p:txBody>
+      </p:sp>
+      <p:sp>
+        <p:nvSpPr>
+          <p:cNvPr id="13" name="TextBox 12"/>
+          <p:cNvSpPr txBox="1"/>
+          <p:nvPr/>
+        </p:nvSpPr>
+        <p:spPr>
+          <a:xfrm>
+            <a:off x="8321040" y="3566160"/>
+            <a:ext cx="3749039" cy="365760"/>
+          </a:xfrm>
+          <a:prstGeom prst="rect">
+            <a:avLst/>
+          </a:prstGeom>
+          <a:noFill/>
+        </p:spPr>
+        <p:txBody>
+          <a:bodyPr wrap="square" lIns="0" rIns="0" tIns="0" bIns="0">
+            <a:spAutoFit/>
+          </a:bodyPr>
+          <a:lstStyle/>
+          <a:p>
+            <a:pPr algn="ctr"/>
+            <a:r>
+              <a:rPr sz="1100" b="0" i="0">
+                <a:solidFill>
+                  <a:srgbClr val="64748B"/>
+                </a:solidFill>
+                <a:latin typeface="Calibri"/>
+              </a:rPr>
+              <a:t>+ huella ambiental enorme</a:t>
+            </a:r>
+          </a:p>
+        </p:txBody>
+      </p:sp>
+      <p:sp>
+        <p:nvSpPr>
+          <p:cNvPr id="14" name="Rectangle 13"/>
           <p:cNvSpPr/>
           <p:nvPr/>
         </p:nvSpPr>
         <p:spPr>
           <a:xfrm>
-            <a:off x="731520" y="5029200"/>
-            <a:ext cx="10698480" cy="1188720"/>
+            <a:off x="457200" y="4297680"/>
+            <a:ext cx="11247120" cy="1965960"/>
           </a:xfrm>
           <a:prstGeom prst="rect">
             <a:avLst/>
           </a:prstGeom>
           <a:solidFill>
-            <a:srgbClr val="F8FAFC"/>
+            <a:srgbClr val="ECFDF5"/>
           </a:solidFill>
           <a:ln>
             <a:noFill/>
@@ -3696,70 +3913,290 @@
       </p:sp>
       <p:sp>
         <p:nvSpPr>
-          <p:cNvPr id="12" name="TextBox 11"/>
-          <p:cNvSpPr txBox="1"/>
-          <p:nvPr/>
-        </p:nvSpPr>
-        <p:spPr>
-          <a:xfrm>
-            <a:off x="1005840" y="5257800"/>
-            <a:ext cx="10058400" cy="365760"/>
-          </a:xfrm>
-          <a:prstGeom prst="rect">
-            <a:avLst/>
-          </a:prstGeom>
-          <a:noFill/>
-        </p:spPr>
-        <p:txBody>
-          <a:bodyPr wrap="square" lIns="0" rIns="0" tIns="0" bIns="0">
-            <a:spAutoFit/>
-          </a:bodyPr>
-          <a:lstStyle/>
-          <a:p>
-            <a:pPr algn="l"/>
-            <a:r>
-              <a:rPr sz="1600" b="0" i="1">
+          <p:cNvPr id="15" name="Rectangle 14"/>
+          <p:cNvSpPr/>
+          <p:nvPr/>
+        </p:nvSpPr>
+        <p:spPr>
+          <a:xfrm>
+            <a:off x="457200" y="4297680"/>
+            <a:ext cx="54864" cy="1965960"/>
+          </a:xfrm>
+          <a:prstGeom prst="rect">
+            <a:avLst/>
+          </a:prstGeom>
+          <a:solidFill>
+            <a:srgbClr val="10B981"/>
+          </a:solidFill>
+          <a:ln>
+            <a:noFill/>
+          </a:ln>
+          <a:effectLst/>
+        </p:spPr>
+        <p:style>
+          <a:lnRef idx="1">
+            <a:schemeClr val="accent1"/>
+          </a:lnRef>
+          <a:fillRef idx="3">
+            <a:schemeClr val="accent1"/>
+          </a:fillRef>
+          <a:effectRef idx="2">
+            <a:schemeClr val="accent1"/>
+          </a:effectRef>
+          <a:fontRef idx="minor">
+            <a:schemeClr val="lt1"/>
+          </a:fontRef>
+        </p:style>
+        <p:txBody>
+          <a:bodyPr rtlCol="0" anchor="ctr"/>
+          <a:lstStyle/>
+          <a:p>
+            <a:pPr algn="ctr"/>
+          </a:p>
+        </p:txBody>
+      </p:sp>
+      <p:sp>
+        <p:nvSpPr>
+          <p:cNvPr id="16" name="TextBox 15"/>
+          <p:cNvSpPr txBox="1"/>
+          <p:nvPr/>
+        </p:nvSpPr>
+        <p:spPr>
+          <a:xfrm>
+            <a:off x="685800" y="4434840"/>
+            <a:ext cx="10972800" cy="274320"/>
+          </a:xfrm>
+          <a:prstGeom prst="rect">
+            <a:avLst/>
+          </a:prstGeom>
+          <a:noFill/>
+        </p:spPr>
+        <p:txBody>
+          <a:bodyPr wrap="square" lIns="0" rIns="0" tIns="0" bIns="0">
+            <a:spAutoFit/>
+          </a:bodyPr>
+          <a:lstStyle/>
+          <a:p>
+            <a:pPr algn="l"/>
+            <a:r>
+              <a:rPr sz="1100" b="1" i="0">
+                <a:solidFill>
+                  <a:srgbClr val="059669"/>
+                </a:solidFill>
+                <a:latin typeface="Calibri"/>
+              </a:rPr>
+              <a:t>🚨 CONTEXTO LEGAL · LEY EN VIGOR DESDE EL 19 DE JULIO DE 2026</a:t>
+            </a:r>
+          </a:p>
+        </p:txBody>
+      </p:sp>
+      <p:sp>
+        <p:nvSpPr>
+          <p:cNvPr id="17" name="TextBox 16"/>
+          <p:cNvSpPr txBox="1"/>
+          <p:nvPr/>
+        </p:nvSpPr>
+        <p:spPr>
+          <a:xfrm>
+            <a:off x="685800" y="4754880"/>
+            <a:ext cx="10972800" cy="411480"/>
+          </a:xfrm>
+          <a:prstGeom prst="rect">
+            <a:avLst/>
+          </a:prstGeom>
+          <a:noFill/>
+        </p:spPr>
+        <p:txBody>
+          <a:bodyPr wrap="square" lIns="0" rIns="0" tIns="0" bIns="0">
+            <a:spAutoFit/>
+          </a:bodyPr>
+          <a:lstStyle/>
+          <a:p>
+            <a:pPr algn="l"/>
+            <a:r>
+              <a:rPr sz="1600" b="1" i="0">
                 <a:solidFill>
                   <a:srgbClr val="0F172A"/>
                 </a:solidFill>
                 <a:latin typeface="Calibri"/>
               </a:rPr>
-              <a:t>Las decisiones de producción se toman sin cuantificar el riesgo por producto.</a:t>
-            </a:r>
-          </a:p>
-        </p:txBody>
-      </p:sp>
-      <p:sp>
-        <p:nvSpPr>
-          <p:cNvPr id="13" name="TextBox 12"/>
-          <p:cNvSpPr txBox="1"/>
-          <p:nvPr/>
-        </p:nvSpPr>
-        <p:spPr>
-          <a:xfrm>
-            <a:off x="1005840" y="5669280"/>
-            <a:ext cx="10058400" cy="365760"/>
-          </a:xfrm>
-          <a:prstGeom prst="rect">
-            <a:avLst/>
-          </a:prstGeom>
-          <a:noFill/>
-        </p:spPr>
-        <p:txBody>
-          <a:bodyPr wrap="square" lIns="0" rIns="0" tIns="0" bIns="0">
-            <a:spAutoFit/>
-          </a:bodyPr>
-          <a:lstStyle/>
-          <a:p>
-            <a:pPr algn="l"/>
-            <a:r>
-              <a:rPr sz="1300" b="0" i="0">
+              <a:t>Las marcas ya no pueden quemar, destruir ni tirar stock nuevo.</a:t>
+            </a:r>
+          </a:p>
+        </p:txBody>
+      </p:sp>
+      <p:sp>
+        <p:nvSpPr>
+          <p:cNvPr id="18" name="TextBox 17"/>
+          <p:cNvSpPr txBox="1"/>
+          <p:nvPr/>
+        </p:nvSpPr>
+        <p:spPr>
+          <a:xfrm>
+            <a:off x="685800" y="5212080"/>
+            <a:ext cx="10972800" cy="365760"/>
+          </a:xfrm>
+          <a:prstGeom prst="rect">
+            <a:avLst/>
+          </a:prstGeom>
+          <a:noFill/>
+        </p:spPr>
+        <p:txBody>
+          <a:bodyPr wrap="square" lIns="0" rIns="0" tIns="0" bIns="0">
+            <a:spAutoFit/>
+          </a:bodyPr>
+          <a:lstStyle/>
+          <a:p>
+            <a:pPr algn="l"/>
+            <a:r>
+              <a:rPr sz="1200" b="0" i="0">
+                <a:solidFill>
+                  <a:srgbClr val="1E293B"/>
+                </a:solidFill>
+                <a:latin typeface="Calibri"/>
+              </a:rPr>
+              <a:t>Obligación de reutilizar (reventa, outlets) · donar · reparar · reciclar.</a:t>
+            </a:r>
+          </a:p>
+        </p:txBody>
+      </p:sp>
+      <p:sp>
+        <p:nvSpPr>
+          <p:cNvPr id="19" name="TextBox 18"/>
+          <p:cNvSpPr txBox="1"/>
+          <p:nvPr/>
+        </p:nvSpPr>
+        <p:spPr>
+          <a:xfrm>
+            <a:off x="685800" y="5577840"/>
+            <a:ext cx="10972800" cy="365760"/>
+          </a:xfrm>
+          <a:prstGeom prst="rect">
+            <a:avLst/>
+          </a:prstGeom>
+          <a:noFill/>
+        </p:spPr>
+        <p:txBody>
+          <a:bodyPr wrap="square" lIns="0" rIns="0" tIns="0" bIns="0">
+            <a:spAutoFit/>
+          </a:bodyPr>
+          <a:lstStyle/>
+          <a:p>
+            <a:pPr algn="l"/>
+            <a:r>
+              <a:rPr sz="1200" b="0" i="0">
+                <a:solidFill>
+                  <a:srgbClr val="1E293B"/>
+                </a:solidFill>
+                <a:latin typeface="Calibri"/>
+              </a:rPr>
+              <a:t>Y reportar anualmente cuánto stock no vendido tienen y qué hacen con ello.</a:t>
+            </a:r>
+          </a:p>
+        </p:txBody>
+      </p:sp>
+      <p:sp>
+        <p:nvSpPr>
+          <p:cNvPr id="20" name="TextBox 19"/>
+          <p:cNvSpPr txBox="1"/>
+          <p:nvPr/>
+        </p:nvSpPr>
+        <p:spPr>
+          <a:xfrm>
+            <a:off x="685800" y="5897880"/>
+            <a:ext cx="10972800" cy="365760"/>
+          </a:xfrm>
+          <a:prstGeom prst="rect">
+            <a:avLst/>
+          </a:prstGeom>
+          <a:noFill/>
+        </p:spPr>
+        <p:txBody>
+          <a:bodyPr wrap="square" lIns="0" rIns="0" tIns="0" bIns="0">
+            <a:spAutoFit/>
+          </a:bodyPr>
+          <a:lstStyle/>
+          <a:p>
+            <a:pPr algn="l"/>
+            <a:r>
+              <a:rPr sz="1100" b="1" i="1">
+                <a:solidFill>
+                  <a:srgbClr val="059669"/>
+                </a:solidFill>
+                <a:latin typeface="Calibri"/>
+              </a:rPr>
+              <a:t>→ Producir mejor desde el origen ya no es una optimización: es una obligación legal y reputacional.</a:t>
+            </a:r>
+          </a:p>
+        </p:txBody>
+      </p:sp>
+      <p:sp>
+        <p:nvSpPr>
+          <p:cNvPr id="21" name="TextBox 20"/>
+          <p:cNvSpPr txBox="1"/>
+          <p:nvPr/>
+        </p:nvSpPr>
+        <p:spPr>
+          <a:xfrm>
+            <a:off x="10972800" y="6446520"/>
+            <a:ext cx="914400" cy="274320"/>
+          </a:xfrm>
+          <a:prstGeom prst="rect">
+            <a:avLst/>
+          </a:prstGeom>
+          <a:noFill/>
+        </p:spPr>
+        <p:txBody>
+          <a:bodyPr wrap="square" lIns="0" rIns="0" tIns="0" bIns="0">
+            <a:spAutoFit/>
+          </a:bodyPr>
+          <a:lstStyle/>
+          <a:p>
+            <a:pPr algn="r"/>
+            <a:r>
+              <a:rPr sz="900" b="0" i="1">
                 <a:solidFill>
                   <a:srgbClr val="64748B"/>
                 </a:solidFill>
                 <a:latin typeface="Calibri"/>
               </a:rPr>
-              <a:t>Los buyers actúan con intuición y datos agregados, no con ML aplicado a cada SKU.</a:t>
+              <a:t>02 / 08</a:t>
+            </a:r>
+          </a:p>
+        </p:txBody>
+      </p:sp>
+      <p:sp>
+        <p:nvSpPr>
+          <p:cNvPr id="22" name="TextBox 21"/>
+          <p:cNvSpPr txBox="1"/>
+          <p:nvPr/>
+        </p:nvSpPr>
+        <p:spPr>
+          <a:xfrm>
+            <a:off x="457200" y="6446520"/>
+            <a:ext cx="5486400" cy="274320"/>
+          </a:xfrm>
+          <a:prstGeom prst="rect">
+            <a:avLst/>
+          </a:prstGeom>
+          <a:noFill/>
+        </p:spPr>
+        <p:txBody>
+          <a:bodyPr wrap="square" lIns="0" rIns="0" tIns="0" bIns="0">
+            <a:spAutoFit/>
+          </a:bodyPr>
+          <a:lstStyle/>
+          <a:p>
+            <a:pPr algn="l"/>
+            <a:r>
+              <a:rPr sz="900" b="0" i="1">
+                <a:solidFill>
+                  <a:srgbClr val="10B981"/>
+                </a:solidFill>
+                <a:latin typeface="Consolas"/>
+                <a:hlinkClick r:id="rId2"/>
+              </a:rPr>
+              <a:t>fashion-ai-engine-app.streamlit.app</a:t>
             </a:r>
           </a:p>
         </p:txBody>
@@ -3790,7 +4227,7 @@
         </p:nvSpPr>
         <p:spPr>
           <a:xfrm>
-            <a:off x="731520" y="457200"/>
+            <a:off x="457200" y="457200"/>
             <a:ext cx="10972800" cy="274320"/>
           </a:xfrm>
           <a:prstGeom prst="rect">
@@ -3812,7 +4249,7 @@
                 </a:solidFill>
                 <a:latin typeface="Calibri"/>
               </a:rPr>
-              <a:t>SECCIÓN 2 · LA SOLUCIÓN</a:t>
+              <a:t>LA SOLUCIÓN</a:t>
             </a:r>
           </a:p>
         </p:txBody>
@@ -3825,23 +4262,23 @@
         </p:nvSpPr>
         <p:spPr>
           <a:xfrm>
-            <a:off x="731520" y="777240"/>
-            <a:ext cx="10972800" cy="731520"/>
-          </a:xfrm>
-          <a:prstGeom prst="rect">
-            <a:avLst/>
-          </a:prstGeom>
-          <a:noFill/>
-        </p:spPr>
-        <p:txBody>
-          <a:bodyPr wrap="square" lIns="0" rIns="0" tIns="0" bIns="0">
-            <a:spAutoFit/>
-          </a:bodyPr>
-          <a:lstStyle/>
-          <a:p>
-            <a:pPr algn="l"/>
-            <a:r>
-              <a:rPr sz="2800" b="1" i="0">
+            <a:off x="457200" y="777240"/>
+            <a:ext cx="10972800" cy="777240"/>
+          </a:xfrm>
+          <a:prstGeom prst="rect">
+            <a:avLst/>
+          </a:prstGeom>
+          <a:noFill/>
+        </p:spPr>
+        <p:txBody>
+          <a:bodyPr wrap="square" lIns="0" rIns="0" tIns="0" bIns="0">
+            <a:spAutoFit/>
+          </a:bodyPr>
+          <a:lstStyle/>
+          <a:p>
+            <a:pPr algn="l"/>
+            <a:r>
+              <a:rPr sz="3000" b="1" i="0">
                 <a:solidFill>
                   <a:srgbClr val="0F172A"/>
                 </a:solidFill>
@@ -3860,8 +4297,8 @@
         </p:nvCxnSpPr>
         <p:spPr>
           <a:xfrm>
-            <a:off x="731520" y="1554480"/>
-            <a:ext cx="10698480" cy="0"/>
+            <a:off x="457200" y="1691640"/>
+            <a:ext cx="11274552" cy="0"/>
           </a:xfrm>
           <a:prstGeom prst="line">
             <a:avLst/>
@@ -3889,14 +4326,49 @@
       </p:cxnSp>
       <p:sp>
         <p:nvSpPr>
-          <p:cNvPr id="5" name="Rectangle 4"/>
+          <p:cNvPr id="5" name="TextBox 4"/>
+          <p:cNvSpPr txBox="1"/>
+          <p:nvPr/>
+        </p:nvSpPr>
+        <p:spPr>
+          <a:xfrm>
+            <a:off x="457200" y="1828800"/>
+            <a:ext cx="11430000" cy="365760"/>
+          </a:xfrm>
+          <a:prstGeom prst="rect">
+            <a:avLst/>
+          </a:prstGeom>
+          <a:noFill/>
+        </p:spPr>
+        <p:txBody>
+          <a:bodyPr wrap="square" lIns="0" rIns="0" tIns="0" bIns="0">
+            <a:spAutoFit/>
+          </a:bodyPr>
+          <a:lstStyle/>
+          <a:p>
+            <a:pPr algn="l"/>
+            <a:r>
+              <a:rPr sz="1300" b="0" i="1">
+                <a:solidFill>
+                  <a:srgbClr val="64748B"/>
+                </a:solidFill>
+                <a:latin typeface="Calibri"/>
+              </a:rPr>
+              <a:t>Las predicciones de tres modelos se combinan en un simulador económico que las traduce a euros.</a:t>
+            </a:r>
+          </a:p>
+        </p:txBody>
+      </p:sp>
+      <p:sp>
+        <p:nvSpPr>
+          <p:cNvPr id="6" name="Rectangle 5"/>
           <p:cNvSpPr/>
           <p:nvPr/>
         </p:nvSpPr>
         <p:spPr>
           <a:xfrm>
-            <a:off x="731520" y="1828800"/>
-            <a:ext cx="3566160" cy="4389120"/>
+            <a:off x="457200" y="2286000"/>
+            <a:ext cx="3749039" cy="3840480"/>
           </a:xfrm>
           <a:prstGeom prst="rect">
             <a:avLst/>
@@ -3904,7 +4376,7 @@
           <a:solidFill>
             <a:srgbClr val="FFFFFF"/>
           </a:solidFill>
-          <a:ln w="6350">
+          <a:ln w="9525">
             <a:solidFill>
               <a:srgbClr val="E2E8F0"/>
             </a:solidFill>
@@ -3935,14 +4407,14 @@
       </p:sp>
       <p:sp>
         <p:nvSpPr>
-          <p:cNvPr id="6" name="Rectangle 5"/>
+          <p:cNvPr id="7" name="Rectangle 6"/>
           <p:cNvSpPr/>
           <p:nvPr/>
         </p:nvSpPr>
         <p:spPr>
           <a:xfrm>
-            <a:off x="731520" y="1828800"/>
-            <a:ext cx="3566160" cy="54864"/>
+            <a:off x="457200" y="2286000"/>
+            <a:ext cx="3749039" cy="45720"/>
           </a:xfrm>
           <a:prstGeom prst="rect">
             <a:avLst/>
@@ -3979,29 +4451,29 @@
       </p:sp>
       <p:sp>
         <p:nvSpPr>
-          <p:cNvPr id="7" name="TextBox 6"/>
-          <p:cNvSpPr txBox="1"/>
-          <p:nvPr/>
-        </p:nvSpPr>
-        <p:spPr>
-          <a:xfrm>
-            <a:off x="1005840" y="2011680"/>
-            <a:ext cx="914400" cy="365760"/>
-          </a:xfrm>
-          <a:prstGeom prst="rect">
-            <a:avLst/>
-          </a:prstGeom>
-          <a:noFill/>
-        </p:spPr>
-        <p:txBody>
-          <a:bodyPr wrap="square" lIns="0" rIns="0" tIns="0" bIns="0">
-            <a:spAutoFit/>
-          </a:bodyPr>
-          <a:lstStyle/>
-          <a:p>
-            <a:pPr algn="l"/>
-            <a:r>
-              <a:rPr sz="1200" b="1" i="0">
+          <p:cNvPr id="8" name="TextBox 7"/>
+          <p:cNvSpPr txBox="1"/>
+          <p:nvPr/>
+        </p:nvSpPr>
+        <p:spPr>
+          <a:xfrm>
+            <a:off x="731520" y="2423160"/>
+            <a:ext cx="914400" cy="320040"/>
+          </a:xfrm>
+          <a:prstGeom prst="rect">
+            <a:avLst/>
+          </a:prstGeom>
+          <a:noFill/>
+        </p:spPr>
+        <p:txBody>
+          <a:bodyPr wrap="square" lIns="0" rIns="0" tIns="0" bIns="0">
+            <a:spAutoFit/>
+          </a:bodyPr>
+          <a:lstStyle/>
+          <a:p>
+            <a:pPr algn="l"/>
+            <a:r>
+              <a:rPr sz="1100" b="1" i="0">
                 <a:solidFill>
                   <a:srgbClr val="10B981"/>
                 </a:solidFill>
@@ -4014,84 +4486,119 @@
       </p:sp>
       <p:sp>
         <p:nvSpPr>
-          <p:cNvPr id="8" name="TextBox 7"/>
-          <p:cNvSpPr txBox="1"/>
-          <p:nvPr/>
-        </p:nvSpPr>
-        <p:spPr>
-          <a:xfrm>
-            <a:off x="1005840" y="2377440"/>
-            <a:ext cx="3200400" cy="548640"/>
-          </a:xfrm>
-          <a:prstGeom prst="rect">
-            <a:avLst/>
-          </a:prstGeom>
-          <a:noFill/>
-        </p:spPr>
-        <p:txBody>
-          <a:bodyPr wrap="square" lIns="0" rIns="0" tIns="0" bIns="0">
-            <a:spAutoFit/>
-          </a:bodyPr>
-          <a:lstStyle/>
-          <a:p>
-            <a:pPr algn="l"/>
-            <a:r>
-              <a:rPr sz="1800" b="1" i="0">
+          <p:cNvPr id="9" name="TextBox 8"/>
+          <p:cNvSpPr txBox="1"/>
+          <p:nvPr/>
+        </p:nvSpPr>
+        <p:spPr>
+          <a:xfrm>
+            <a:off x="731520" y="2743200"/>
+            <a:ext cx="3383280" cy="457200"/>
+          </a:xfrm>
+          <a:prstGeom prst="rect">
+            <a:avLst/>
+          </a:prstGeom>
+          <a:noFill/>
+        </p:spPr>
+        <p:txBody>
+          <a:bodyPr wrap="square" lIns="0" rIns="0" tIns="0" bIns="0">
+            <a:spAutoFit/>
+          </a:bodyPr>
+          <a:lstStyle/>
+          <a:p>
+            <a:pPr algn="l"/>
+            <a:r>
+              <a:rPr sz="1700" b="1" i="0">
                 <a:solidFill>
                   <a:srgbClr val="0F172A"/>
                 </a:solidFill>
                 <a:latin typeface="Calibri"/>
               </a:rPr>
-              <a:t>Forecast de demanda</a:t>
-            </a:r>
-          </a:p>
-        </p:txBody>
-      </p:sp>
-      <p:sp>
-        <p:nvSpPr>
-          <p:cNvPr id="9" name="TextBox 8"/>
-          <p:cNvSpPr txBox="1"/>
-          <p:nvPr/>
-        </p:nvSpPr>
-        <p:spPr>
-          <a:xfrm>
-            <a:off x="1005840" y="3108960"/>
-            <a:ext cx="3200400" cy="1645920"/>
-          </a:xfrm>
-          <a:prstGeom prst="rect">
-            <a:avLst/>
-          </a:prstGeom>
-          <a:noFill/>
-        </p:spPr>
-        <p:txBody>
-          <a:bodyPr wrap="square" lIns="0" rIns="0" tIns="0" bIns="0">
-            <a:spAutoFit/>
-          </a:bodyPr>
-          <a:lstStyle/>
-          <a:p>
-            <a:pPr algn="l"/>
-            <a:r>
-              <a:rPr sz="1100" b="0" i="0">
+              <a:t>Modelo de demanda</a:t>
+            </a:r>
+          </a:p>
+        </p:txBody>
+      </p:sp>
+      <p:sp>
+        <p:nvSpPr>
+          <p:cNvPr id="10" name="TextBox 9"/>
+          <p:cNvSpPr txBox="1"/>
+          <p:nvPr/>
+        </p:nvSpPr>
+        <p:spPr>
+          <a:xfrm>
+            <a:off x="731520" y="3246120"/>
+            <a:ext cx="3383280" cy="365760"/>
+          </a:xfrm>
+          <a:prstGeom prst="rect">
+            <a:avLst/>
+          </a:prstGeom>
+          <a:noFill/>
+        </p:spPr>
+        <p:txBody>
+          <a:bodyPr wrap="square" lIns="0" rIns="0" tIns="0" bIns="0">
+            <a:spAutoFit/>
+          </a:bodyPr>
+          <a:lstStyle/>
+          <a:p>
+            <a:pPr algn="l"/>
+            <a:r>
+              <a:rPr sz="1200" b="0" i="1">
+                <a:solidFill>
+                  <a:srgbClr val="64748B"/>
+                </a:solidFill>
+                <a:latin typeface="Calibri"/>
+              </a:rPr>
+              <a:t>¿Cuántas unidades se van a vender?</a:t>
+            </a:r>
+          </a:p>
+        </p:txBody>
+      </p:sp>
+      <p:sp>
+        <p:nvSpPr>
+          <p:cNvPr id="11" name="TextBox 10"/>
+          <p:cNvSpPr txBox="1"/>
+          <p:nvPr/>
+        </p:nvSpPr>
+        <p:spPr>
+          <a:xfrm>
+            <a:off x="731520" y="3749039"/>
+            <a:ext cx="3383280" cy="1371600"/>
+          </a:xfrm>
+          <a:prstGeom prst="rect">
+            <a:avLst/>
+          </a:prstGeom>
+          <a:noFill/>
+        </p:spPr>
+        <p:txBody>
+          <a:bodyPr wrap="square" lIns="0" rIns="0" tIns="0" bIns="0">
+            <a:spAutoFit/>
+          </a:bodyPr>
+          <a:lstStyle/>
+          <a:p>
+            <a:pPr algn="l"/>
+            <a:r>
+              <a:rPr sz="1050" b="0" i="0">
                 <a:solidFill>
                   <a:srgbClr val="1E293B"/>
                 </a:solidFill>
                 <a:latin typeface="Calibri"/>
               </a:rPr>
-              <a:t>LightGBM con log-target y validación temporal estricta sobre 1,76M observaciones article × week.</a:t>
+              <a:t>LightGBM con validación temporal estricta sobre 1,76M registros article × week.</a:t>
             </a:r>
           </a:p>
         </p:txBody>
       </p:sp>
       <p:cxnSp>
         <p:nvCxnSpPr>
-          <p:cNvPr id="10" name="Connector 9"/>
+          <p:cNvPr id="12" name="Connector 11"/>
           <p:cNvCxnSpPr/>
           <p:nvPr/>
         </p:nvCxnSpPr>
         <p:spPr>
           <a:xfrm>
-            <a:off x="1005840" y="4937760"/>
-            <a:ext cx="3017520" cy="0"/>
+            <a:off x="731520" y="5074920"/>
+            <a:ext cx="3200400" cy="0"/>
           </a:xfrm>
           <a:prstGeom prst="line">
             <a:avLst/>
@@ -4119,29 +4626,29 @@
       </p:cxnSp>
       <p:sp>
         <p:nvSpPr>
-          <p:cNvPr id="11" name="TextBox 10"/>
-          <p:cNvSpPr txBox="1"/>
-          <p:nvPr/>
-        </p:nvSpPr>
-        <p:spPr>
-          <a:xfrm>
-            <a:off x="1005840" y="5074920"/>
-            <a:ext cx="3200400" cy="457200"/>
-          </a:xfrm>
-          <a:prstGeom prst="rect">
-            <a:avLst/>
-          </a:prstGeom>
-          <a:noFill/>
-        </p:spPr>
-        <p:txBody>
-          <a:bodyPr wrap="square" lIns="0" rIns="0" tIns="0" bIns="0">
-            <a:spAutoFit/>
-          </a:bodyPr>
-          <a:lstStyle/>
-          <a:p>
-            <a:pPr algn="l"/>
-            <a:r>
-              <a:rPr sz="2000" b="1" i="0">
+          <p:cNvPr id="13" name="TextBox 12"/>
+          <p:cNvSpPr txBox="1"/>
+          <p:nvPr/>
+        </p:nvSpPr>
+        <p:spPr>
+          <a:xfrm>
+            <a:off x="731520" y="5212080"/>
+            <a:ext cx="3383280" cy="457200"/>
+          </a:xfrm>
+          <a:prstGeom prst="rect">
+            <a:avLst/>
+          </a:prstGeom>
+          <a:noFill/>
+        </p:spPr>
+        <p:txBody>
+          <a:bodyPr wrap="square" lIns="0" rIns="0" tIns="0" bIns="0">
+            <a:spAutoFit/>
+          </a:bodyPr>
+          <a:lstStyle/>
+          <a:p>
+            <a:pPr algn="l"/>
+            <a:r>
+              <a:rPr sz="2200" b="1" i="0">
                 <a:solidFill>
                   <a:srgbClr val="059669"/>
                 </a:solidFill>
@@ -4154,14 +4661,14 @@
       </p:sp>
       <p:sp>
         <p:nvSpPr>
-          <p:cNvPr id="12" name="TextBox 11"/>
-          <p:cNvSpPr txBox="1"/>
-          <p:nvPr/>
-        </p:nvSpPr>
-        <p:spPr>
-          <a:xfrm>
-            <a:off x="1005840" y="5623560"/>
-            <a:ext cx="3200400" cy="365760"/>
+          <p:cNvPr id="14" name="TextBox 13"/>
+          <p:cNvSpPr txBox="1"/>
+          <p:nvPr/>
+        </p:nvSpPr>
+        <p:spPr>
+          <a:xfrm>
+            <a:off x="731520" y="5760720"/>
+            <a:ext cx="3383280" cy="320040"/>
           </a:xfrm>
           <a:prstGeom prst="rect">
             <a:avLst/>
@@ -4189,14 +4696,14 @@
       </p:sp>
       <p:sp>
         <p:nvSpPr>
-          <p:cNvPr id="13" name="Rectangle 12"/>
+          <p:cNvPr id="15" name="Rectangle 14"/>
           <p:cNvSpPr/>
           <p:nvPr/>
         </p:nvSpPr>
         <p:spPr>
           <a:xfrm>
-            <a:off x="4480559" y="1828800"/>
-            <a:ext cx="3566160" cy="4389120"/>
+            <a:off x="4389120" y="2286000"/>
+            <a:ext cx="3749039" cy="3840480"/>
           </a:xfrm>
           <a:prstGeom prst="rect">
             <a:avLst/>
@@ -4204,7 +4711,7 @@
           <a:solidFill>
             <a:srgbClr val="FFFFFF"/>
           </a:solidFill>
-          <a:ln w="6350">
+          <a:ln w="9525">
             <a:solidFill>
               <a:srgbClr val="E2E8F0"/>
             </a:solidFill>
@@ -4235,14 +4742,14 @@
       </p:sp>
       <p:sp>
         <p:nvSpPr>
-          <p:cNvPr id="14" name="Rectangle 13"/>
+          <p:cNvPr id="16" name="Rectangle 15"/>
           <p:cNvSpPr/>
           <p:nvPr/>
         </p:nvSpPr>
         <p:spPr>
           <a:xfrm>
-            <a:off x="4480559" y="1828800"/>
-            <a:ext cx="3566160" cy="54864"/>
+            <a:off x="4389120" y="2286000"/>
+            <a:ext cx="3749039" cy="45720"/>
           </a:xfrm>
           <a:prstGeom prst="rect">
             <a:avLst/>
@@ -4279,29 +4786,29 @@
       </p:sp>
       <p:sp>
         <p:nvSpPr>
-          <p:cNvPr id="15" name="TextBox 14"/>
-          <p:cNvSpPr txBox="1"/>
-          <p:nvPr/>
-        </p:nvSpPr>
-        <p:spPr>
-          <a:xfrm>
-            <a:off x="4754879" y="2011680"/>
-            <a:ext cx="914400" cy="365760"/>
-          </a:xfrm>
-          <a:prstGeom prst="rect">
-            <a:avLst/>
-          </a:prstGeom>
-          <a:noFill/>
-        </p:spPr>
-        <p:txBody>
-          <a:bodyPr wrap="square" lIns="0" rIns="0" tIns="0" bIns="0">
-            <a:spAutoFit/>
-          </a:bodyPr>
-          <a:lstStyle/>
-          <a:p>
-            <a:pPr algn="l"/>
-            <a:r>
-              <a:rPr sz="1200" b="1" i="0">
+          <p:cNvPr id="17" name="TextBox 16"/>
+          <p:cNvSpPr txBox="1"/>
+          <p:nvPr/>
+        </p:nvSpPr>
+        <p:spPr>
+          <a:xfrm>
+            <a:off x="4663440" y="2423160"/>
+            <a:ext cx="914400" cy="320040"/>
+          </a:xfrm>
+          <a:prstGeom prst="rect">
+            <a:avLst/>
+          </a:prstGeom>
+          <a:noFill/>
+        </p:spPr>
+        <p:txBody>
+          <a:bodyPr wrap="square" lIns="0" rIns="0" tIns="0" bIns="0">
+            <a:spAutoFit/>
+          </a:bodyPr>
+          <a:lstStyle/>
+          <a:p>
+            <a:pPr algn="l"/>
+            <a:r>
+              <a:rPr sz="1100" b="1" i="0">
                 <a:solidFill>
                   <a:srgbClr val="10B981"/>
                 </a:solidFill>
@@ -4314,84 +4821,119 @@
       </p:sp>
       <p:sp>
         <p:nvSpPr>
-          <p:cNvPr id="16" name="TextBox 15"/>
-          <p:cNvSpPr txBox="1"/>
-          <p:nvPr/>
-        </p:nvSpPr>
-        <p:spPr>
-          <a:xfrm>
-            <a:off x="4754879" y="2377440"/>
-            <a:ext cx="3200400" cy="548640"/>
-          </a:xfrm>
-          <a:prstGeom prst="rect">
-            <a:avLst/>
-          </a:prstGeom>
-          <a:noFill/>
-        </p:spPr>
-        <p:txBody>
-          <a:bodyPr wrap="square" lIns="0" rIns="0" tIns="0" bIns="0">
-            <a:spAutoFit/>
-          </a:bodyPr>
-          <a:lstStyle/>
-          <a:p>
-            <a:pPr algn="l"/>
-            <a:r>
-              <a:rPr sz="1800" b="1" i="0">
+          <p:cNvPr id="18" name="TextBox 17"/>
+          <p:cNvSpPr txBox="1"/>
+          <p:nvPr/>
+        </p:nvSpPr>
+        <p:spPr>
+          <a:xfrm>
+            <a:off x="4663440" y="2743200"/>
+            <a:ext cx="3383280" cy="457200"/>
+          </a:xfrm>
+          <a:prstGeom prst="rect">
+            <a:avLst/>
+          </a:prstGeom>
+          <a:noFill/>
+        </p:spPr>
+        <p:txBody>
+          <a:bodyPr wrap="square" lIns="0" rIns="0" tIns="0" bIns="0">
+            <a:spAutoFit/>
+          </a:bodyPr>
+          <a:lstStyle/>
+          <a:p>
+            <a:pPr algn="l"/>
+            <a:r>
+              <a:rPr sz="1700" b="1" i="0">
                 <a:solidFill>
                   <a:srgbClr val="0F172A"/>
                 </a:solidFill>
                 <a:latin typeface="Calibri"/>
               </a:rPr>
-              <a:t>Predicción de devoluciones</a:t>
-            </a:r>
-          </a:p>
-        </p:txBody>
-      </p:sp>
-      <p:sp>
-        <p:nvSpPr>
-          <p:cNvPr id="17" name="TextBox 16"/>
-          <p:cNvSpPr txBox="1"/>
-          <p:nvPr/>
-        </p:nvSpPr>
-        <p:spPr>
-          <a:xfrm>
-            <a:off x="4754879" y="3108960"/>
-            <a:ext cx="3200400" cy="1645920"/>
-          </a:xfrm>
-          <a:prstGeom prst="rect">
-            <a:avLst/>
-          </a:prstGeom>
-          <a:noFill/>
-        </p:spPr>
-        <p:txBody>
-          <a:bodyPr wrap="square" lIns="0" rIns="0" tIns="0" bIns="0">
-            <a:spAutoFit/>
-          </a:bodyPr>
-          <a:lstStyle/>
-          <a:p>
-            <a:pPr algn="l"/>
-            <a:r>
-              <a:rPr sz="1100" b="0" i="0">
+              <a:t>Modelo de devoluciones</a:t>
+            </a:r>
+          </a:p>
+        </p:txBody>
+      </p:sp>
+      <p:sp>
+        <p:nvSpPr>
+          <p:cNvPr id="19" name="TextBox 18"/>
+          <p:cNvSpPr txBox="1"/>
+          <p:nvPr/>
+        </p:nvSpPr>
+        <p:spPr>
+          <a:xfrm>
+            <a:off x="4663440" y="3246120"/>
+            <a:ext cx="3383280" cy="365760"/>
+          </a:xfrm>
+          <a:prstGeom prst="rect">
+            <a:avLst/>
+          </a:prstGeom>
+          <a:noFill/>
+        </p:spPr>
+        <p:txBody>
+          <a:bodyPr wrap="square" lIns="0" rIns="0" tIns="0" bIns="0">
+            <a:spAutoFit/>
+          </a:bodyPr>
+          <a:lstStyle/>
+          <a:p>
+            <a:pPr algn="l"/>
+            <a:r>
+              <a:rPr sz="1200" b="0" i="1">
+                <a:solidFill>
+                  <a:srgbClr val="64748B"/>
+                </a:solidFill>
+                <a:latin typeface="Calibri"/>
+              </a:rPr>
+              <a:t>¿Qué probabilidad hay de devolución?</a:t>
+            </a:r>
+          </a:p>
+        </p:txBody>
+      </p:sp>
+      <p:sp>
+        <p:nvSpPr>
+          <p:cNvPr id="20" name="TextBox 19"/>
+          <p:cNvSpPr txBox="1"/>
+          <p:nvPr/>
+        </p:nvSpPr>
+        <p:spPr>
+          <a:xfrm>
+            <a:off x="4663440" y="3749039"/>
+            <a:ext cx="3383280" cy="1371600"/>
+          </a:xfrm>
+          <a:prstGeom prst="rect">
+            <a:avLst/>
+          </a:prstGeom>
+          <a:noFill/>
+        </p:spPr>
+        <p:txBody>
+          <a:bodyPr wrap="square" lIns="0" rIns="0" tIns="0" bIns="0">
+            <a:spAutoFit/>
+          </a:bodyPr>
+          <a:lstStyle/>
+          <a:p>
+            <a:pPr algn="l"/>
+            <a:r>
+              <a:rPr sz="1050" b="0" i="0">
                 <a:solidFill>
                   <a:srgbClr val="1E293B"/>
                 </a:solidFill>
                 <a:latin typeface="Calibri"/>
               </a:rPr>
-              <a:t>Classifier con labels semi-sintéticas derivadas de tasas sectoriales reales (Narvar, Optoro).</a:t>
+              <a:t>Classifier con labels semi-sintéticas derivadas de tasas sectoriales (Narvar, Optoro).</a:t>
             </a:r>
           </a:p>
         </p:txBody>
       </p:sp>
       <p:cxnSp>
         <p:nvCxnSpPr>
-          <p:cNvPr id="18" name="Connector 17"/>
+          <p:cNvPr id="21" name="Connector 20"/>
           <p:cNvCxnSpPr/>
           <p:nvPr/>
         </p:nvCxnSpPr>
         <p:spPr>
           <a:xfrm>
-            <a:off x="4754879" y="4937760"/>
-            <a:ext cx="3017521" cy="0"/>
+            <a:off x="4663440" y="5074920"/>
+            <a:ext cx="3200400" cy="0"/>
           </a:xfrm>
           <a:prstGeom prst="line">
             <a:avLst/>
@@ -4419,49 +4961,49 @@
       </p:cxnSp>
       <p:sp>
         <p:nvSpPr>
-          <p:cNvPr id="19" name="TextBox 18"/>
-          <p:cNvSpPr txBox="1"/>
-          <p:nvPr/>
-        </p:nvSpPr>
-        <p:spPr>
-          <a:xfrm>
-            <a:off x="4754879" y="5074920"/>
-            <a:ext cx="3200400" cy="457200"/>
-          </a:xfrm>
-          <a:prstGeom prst="rect">
-            <a:avLst/>
-          </a:prstGeom>
-          <a:noFill/>
-        </p:spPr>
-        <p:txBody>
-          <a:bodyPr wrap="square" lIns="0" rIns="0" tIns="0" bIns="0">
-            <a:spAutoFit/>
-          </a:bodyPr>
-          <a:lstStyle/>
-          <a:p>
-            <a:pPr algn="l"/>
-            <a:r>
-              <a:rPr sz="2000" b="1" i="0">
+          <p:cNvPr id="22" name="TextBox 21"/>
+          <p:cNvSpPr txBox="1"/>
+          <p:nvPr/>
+        </p:nvSpPr>
+        <p:spPr>
+          <a:xfrm>
+            <a:off x="4663440" y="5212080"/>
+            <a:ext cx="3383280" cy="457200"/>
+          </a:xfrm>
+          <a:prstGeom prst="rect">
+            <a:avLst/>
+          </a:prstGeom>
+          <a:noFill/>
+        </p:spPr>
+        <p:txBody>
+          <a:bodyPr wrap="square" lIns="0" rIns="0" tIns="0" bIns="0">
+            <a:spAutoFit/>
+          </a:bodyPr>
+          <a:lstStyle/>
+          <a:p>
+            <a:pPr algn="l"/>
+            <a:r>
+              <a:rPr sz="2200" b="1" i="0">
                 <a:solidFill>
                   <a:srgbClr val="059669"/>
                 </a:solidFill>
                 <a:latin typeface="Calibri"/>
               </a:rPr>
-              <a:t>ROC-AUC 0,637</a:t>
-            </a:r>
-          </a:p>
-        </p:txBody>
-      </p:sp>
-      <p:sp>
-        <p:nvSpPr>
-          <p:cNvPr id="20" name="TextBox 19"/>
-          <p:cNvSpPr txBox="1"/>
-          <p:nvPr/>
-        </p:nvSpPr>
-        <p:spPr>
-          <a:xfrm>
-            <a:off x="4754879" y="5623560"/>
-            <a:ext cx="3200400" cy="365760"/>
+              <a:t>ROC-AUC 0,64</a:t>
+            </a:r>
+          </a:p>
+        </p:txBody>
+      </p:sp>
+      <p:sp>
+        <p:nvSpPr>
+          <p:cNvPr id="23" name="TextBox 22"/>
+          <p:cNvSpPr txBox="1"/>
+          <p:nvPr/>
+        </p:nvSpPr>
+        <p:spPr>
+          <a:xfrm>
+            <a:off x="4663440" y="5760720"/>
+            <a:ext cx="3383280" cy="320040"/>
           </a:xfrm>
           <a:prstGeom prst="rect">
             <a:avLst/>
@@ -4489,14 +5031,14 @@
       </p:sp>
       <p:sp>
         <p:nvSpPr>
-          <p:cNvPr id="21" name="Rectangle 20"/>
+          <p:cNvPr id="24" name="Rectangle 23"/>
           <p:cNvSpPr/>
           <p:nvPr/>
         </p:nvSpPr>
         <p:spPr>
           <a:xfrm>
-            <a:off x="8229600" y="1828800"/>
-            <a:ext cx="3566160" cy="4389120"/>
+            <a:off x="8321040" y="2286000"/>
+            <a:ext cx="3749039" cy="3840480"/>
           </a:xfrm>
           <a:prstGeom prst="rect">
             <a:avLst/>
@@ -4504,7 +5046,7 @@
           <a:solidFill>
             <a:srgbClr val="FFFFFF"/>
           </a:solidFill>
-          <a:ln w="6350">
+          <a:ln w="9525">
             <a:solidFill>
               <a:srgbClr val="E2E8F0"/>
             </a:solidFill>
@@ -4535,14 +5077,14 @@
       </p:sp>
       <p:sp>
         <p:nvSpPr>
-          <p:cNvPr id="22" name="Rectangle 21"/>
+          <p:cNvPr id="25" name="Rectangle 24"/>
           <p:cNvSpPr/>
           <p:nvPr/>
         </p:nvSpPr>
         <p:spPr>
           <a:xfrm>
-            <a:off x="8229600" y="1828800"/>
-            <a:ext cx="3566160" cy="54864"/>
+            <a:off x="8321040" y="2286000"/>
+            <a:ext cx="3749039" cy="45720"/>
           </a:xfrm>
           <a:prstGeom prst="rect">
             <a:avLst/>
@@ -4579,29 +5121,29 @@
       </p:sp>
       <p:sp>
         <p:nvSpPr>
-          <p:cNvPr id="23" name="TextBox 22"/>
-          <p:cNvSpPr txBox="1"/>
-          <p:nvPr/>
-        </p:nvSpPr>
-        <p:spPr>
-          <a:xfrm>
-            <a:off x="8503920" y="2011680"/>
-            <a:ext cx="914400" cy="365760"/>
-          </a:xfrm>
-          <a:prstGeom prst="rect">
-            <a:avLst/>
-          </a:prstGeom>
-          <a:noFill/>
-        </p:spPr>
-        <p:txBody>
-          <a:bodyPr wrap="square" lIns="0" rIns="0" tIns="0" bIns="0">
-            <a:spAutoFit/>
-          </a:bodyPr>
-          <a:lstStyle/>
-          <a:p>
-            <a:pPr algn="l"/>
-            <a:r>
-              <a:rPr sz="1200" b="1" i="0">
+          <p:cNvPr id="26" name="TextBox 25"/>
+          <p:cNvSpPr txBox="1"/>
+          <p:nvPr/>
+        </p:nvSpPr>
+        <p:spPr>
+          <a:xfrm>
+            <a:off x="8595360" y="2423160"/>
+            <a:ext cx="914400" cy="320040"/>
+          </a:xfrm>
+          <a:prstGeom prst="rect">
+            <a:avLst/>
+          </a:prstGeom>
+          <a:noFill/>
+        </p:spPr>
+        <p:txBody>
+          <a:bodyPr wrap="square" lIns="0" rIns="0" tIns="0" bIns="0">
+            <a:spAutoFit/>
+          </a:bodyPr>
+          <a:lstStyle/>
+          <a:p>
+            <a:pPr algn="l"/>
+            <a:r>
+              <a:rPr sz="1100" b="1" i="0">
                 <a:solidFill>
                   <a:srgbClr val="10B981"/>
                 </a:solidFill>
@@ -4614,29 +5156,29 @@
       </p:sp>
       <p:sp>
         <p:nvSpPr>
-          <p:cNvPr id="24" name="TextBox 23"/>
-          <p:cNvSpPr txBox="1"/>
-          <p:nvPr/>
-        </p:nvSpPr>
-        <p:spPr>
-          <a:xfrm>
-            <a:off x="8503920" y="2377440"/>
-            <a:ext cx="3200400" cy="548640"/>
-          </a:xfrm>
-          <a:prstGeom prst="rect">
-            <a:avLst/>
-          </a:prstGeom>
-          <a:noFill/>
-        </p:spPr>
-        <p:txBody>
-          <a:bodyPr wrap="square" lIns="0" rIns="0" tIns="0" bIns="0">
-            <a:spAutoFit/>
-          </a:bodyPr>
-          <a:lstStyle/>
-          <a:p>
-            <a:pPr algn="l"/>
-            <a:r>
-              <a:rPr sz="1800" b="1" i="0">
+          <p:cNvPr id="27" name="TextBox 26"/>
+          <p:cNvSpPr txBox="1"/>
+          <p:nvPr/>
+        </p:nvSpPr>
+        <p:spPr>
+          <a:xfrm>
+            <a:off x="8595360" y="2743200"/>
+            <a:ext cx="3383280" cy="457200"/>
+          </a:xfrm>
+          <a:prstGeom prst="rect">
+            <a:avLst/>
+          </a:prstGeom>
+          <a:noFill/>
+        </p:spPr>
+        <p:txBody>
+          <a:bodyPr wrap="square" lIns="0" rIns="0" tIns="0" bIns="0">
+            <a:spAutoFit/>
+          </a:bodyPr>
+          <a:lstStyle/>
+          <a:p>
+            <a:pPr algn="l"/>
+            <a:r>
+              <a:rPr sz="1700" b="1" i="0">
                 <a:solidFill>
                   <a:srgbClr val="0F172A"/>
                 </a:solidFill>
@@ -4649,49 +5191,84 @@
       </p:sp>
       <p:sp>
         <p:nvSpPr>
-          <p:cNvPr id="25" name="TextBox 24"/>
-          <p:cNvSpPr txBox="1"/>
-          <p:nvPr/>
-        </p:nvSpPr>
-        <p:spPr>
-          <a:xfrm>
-            <a:off x="8503920" y="3108960"/>
-            <a:ext cx="3200400" cy="1645920"/>
-          </a:xfrm>
-          <a:prstGeom prst="rect">
-            <a:avLst/>
-          </a:prstGeom>
-          <a:noFill/>
-        </p:spPr>
-        <p:txBody>
-          <a:bodyPr wrap="square" lIns="0" rIns="0" tIns="0" bIns="0">
-            <a:spAutoFit/>
-          </a:bodyPr>
-          <a:lstStyle/>
-          <a:p>
-            <a:pPr algn="l"/>
-            <a:r>
-              <a:rPr sz="1100" b="0" i="0">
+          <p:cNvPr id="28" name="TextBox 27"/>
+          <p:cNvSpPr txBox="1"/>
+          <p:nvPr/>
+        </p:nvSpPr>
+        <p:spPr>
+          <a:xfrm>
+            <a:off x="8595360" y="3246120"/>
+            <a:ext cx="3383280" cy="365760"/>
+          </a:xfrm>
+          <a:prstGeom prst="rect">
+            <a:avLst/>
+          </a:prstGeom>
+          <a:noFill/>
+        </p:spPr>
+        <p:txBody>
+          <a:bodyPr wrap="square" lIns="0" rIns="0" tIns="0" bIns="0">
+            <a:spAutoFit/>
+          </a:bodyPr>
+          <a:lstStyle/>
+          <a:p>
+            <a:pPr algn="l"/>
+            <a:r>
+              <a:rPr sz="1200" b="0" i="1">
+                <a:solidFill>
+                  <a:srgbClr val="64748B"/>
+                </a:solidFill>
+                <a:latin typeface="Calibri"/>
+              </a:rPr>
+              <a:t>¿Cuánto margen genera cada decisión?</a:t>
+            </a:r>
+          </a:p>
+        </p:txBody>
+      </p:sp>
+      <p:sp>
+        <p:nvSpPr>
+          <p:cNvPr id="29" name="TextBox 28"/>
+          <p:cNvSpPr txBox="1"/>
+          <p:nvPr/>
+        </p:nvSpPr>
+        <p:spPr>
+          <a:xfrm>
+            <a:off x="8595360" y="3749039"/>
+            <a:ext cx="3383280" cy="1371600"/>
+          </a:xfrm>
+          <a:prstGeom prst="rect">
+            <a:avLst/>
+          </a:prstGeom>
+          <a:noFill/>
+        </p:spPr>
+        <p:txBody>
+          <a:bodyPr wrap="square" lIns="0" rIns="0" tIns="0" bIns="0">
+            <a:spAutoFit/>
+          </a:bodyPr>
+          <a:lstStyle/>
+          <a:p>
+            <a:pPr algn="l"/>
+            <a:r>
+              <a:rPr sz="1050" b="0" i="0">
                 <a:solidFill>
                   <a:srgbClr val="1E293B"/>
                 </a:solidFill>
                 <a:latin typeface="Calibri"/>
               </a:rPr>
-              <a:t>Traduce las predicciones en € de margen bajo distintas políticas. Incluye lost demand penalty.</a:t>
+              <a:t>Combina demanda × devoluciones × supuestos económicos. Convierte ML en euros.</a:t>
             </a:r>
           </a:p>
         </p:txBody>
       </p:sp>
       <p:cxnSp>
         <p:nvCxnSpPr>
-          <p:cNvPr id="26" name="Connector 25"/>
+          <p:cNvPr id="30" name="Connector 29"/>
           <p:cNvCxnSpPr/>
           <p:nvPr/>
         </p:nvCxnSpPr>
         <p:spPr>
           <a:xfrm>
-            <a:off x="8503920" y="4937760"/>
-            <a:ext cx="3017520" cy="0"/>
+            <a:off x="8595360" y="5074920"/>
+            <a:ext cx="3200399" cy="0"/>
           </a:xfrm>
           <a:prstGeom prst="line">
             <a:avLst/>
@@ -4719,49 +5296,49 @@
       </p:cxnSp>
       <p:sp>
         <p:nvSpPr>
-          <p:cNvPr id="27" name="TextBox 26"/>
-          <p:cNvSpPr txBox="1"/>
-          <p:nvPr/>
-        </p:nvSpPr>
-        <p:spPr>
-          <a:xfrm>
-            <a:off x="8503920" y="5074920"/>
-            <a:ext cx="3200400" cy="457200"/>
-          </a:xfrm>
-          <a:prstGeom prst="rect">
-            <a:avLst/>
-          </a:prstGeom>
-          <a:noFill/>
-        </p:spPr>
-        <p:txBody>
-          <a:bodyPr wrap="square" lIns="0" rIns="0" tIns="0" bIns="0">
-            <a:spAutoFit/>
-          </a:bodyPr>
-          <a:lstStyle/>
-          <a:p>
-            <a:pPr algn="l"/>
-            <a:r>
-              <a:rPr sz="2000" b="1" i="0">
+          <p:cNvPr id="31" name="TextBox 30"/>
+          <p:cNvSpPr txBox="1"/>
+          <p:nvPr/>
+        </p:nvSpPr>
+        <p:spPr>
+          <a:xfrm>
+            <a:off x="8595360" y="5212080"/>
+            <a:ext cx="3383280" cy="457200"/>
+          </a:xfrm>
+          <a:prstGeom prst="rect">
+            <a:avLst/>
+          </a:prstGeom>
+          <a:noFill/>
+        </p:spPr>
+        <p:txBody>
+          <a:bodyPr wrap="square" lIns="0" rIns="0" tIns="0" bIns="0">
+            <a:spAutoFit/>
+          </a:bodyPr>
+          <a:lstStyle/>
+          <a:p>
+            <a:pPr algn="l"/>
+            <a:r>
+              <a:rPr sz="2200" b="1" i="0">
                 <a:solidFill>
                   <a:srgbClr val="059669"/>
                 </a:solidFill>
                 <a:latin typeface="Calibri"/>
               </a:rPr>
-              <a:t>+175.5K €</a:t>
-            </a:r>
-          </a:p>
-        </p:txBody>
-      </p:sp>
-      <p:sp>
-        <p:nvSpPr>
-          <p:cNvPr id="28" name="TextBox 27"/>
-          <p:cNvSpPr txBox="1"/>
-          <p:nvPr/>
-        </p:nvSpPr>
-        <p:spPr>
-          <a:xfrm>
-            <a:off x="8503920" y="5623560"/>
-            <a:ext cx="3200400" cy="365760"/>
+              <a:t>+175,5K €</a:t>
+            </a:r>
+          </a:p>
+        </p:txBody>
+      </p:sp>
+      <p:sp>
+        <p:nvSpPr>
+          <p:cNvPr id="32" name="TextBox 31"/>
+          <p:cNvSpPr txBox="1"/>
+          <p:nvPr/>
+        </p:nvSpPr>
+        <p:spPr>
+          <a:xfrm>
+            <a:off x="8595360" y="5760720"/>
+            <a:ext cx="3383280" cy="320040"/>
           </a:xfrm>
           <a:prstGeom prst="rect">
             <a:avLst/>
@@ -4782,7 +5359,78 @@
                 </a:solidFill>
                 <a:latin typeface="Calibri"/>
               </a:rPr>
-              <a:t>+6,8% margen adicional</a:t>
+              <a:t>vs baseline humano</a:t>
+            </a:r>
+          </a:p>
+        </p:txBody>
+      </p:sp>
+      <p:sp>
+        <p:nvSpPr>
+          <p:cNvPr id="33" name="TextBox 32"/>
+          <p:cNvSpPr txBox="1"/>
+          <p:nvPr/>
+        </p:nvSpPr>
+        <p:spPr>
+          <a:xfrm>
+            <a:off x="10972800" y="6446520"/>
+            <a:ext cx="914400" cy="274320"/>
+          </a:xfrm>
+          <a:prstGeom prst="rect">
+            <a:avLst/>
+          </a:prstGeom>
+          <a:noFill/>
+        </p:spPr>
+        <p:txBody>
+          <a:bodyPr wrap="square" lIns="0" rIns="0" tIns="0" bIns="0">
+            <a:spAutoFit/>
+          </a:bodyPr>
+          <a:lstStyle/>
+          <a:p>
+            <a:pPr algn="r"/>
+            <a:r>
+              <a:rPr sz="900" b="0" i="1">
+                <a:solidFill>
+                  <a:srgbClr val="64748B"/>
+                </a:solidFill>
+                <a:latin typeface="Calibri"/>
+              </a:rPr>
+              <a:t>03 / 08</a:t>
+            </a:r>
+          </a:p>
+        </p:txBody>
+      </p:sp>
+      <p:sp>
+        <p:nvSpPr>
+          <p:cNvPr id="34" name="TextBox 33"/>
+          <p:cNvSpPr txBox="1"/>
+          <p:nvPr/>
+        </p:nvSpPr>
+        <p:spPr>
+          <a:xfrm>
+            <a:off x="457200" y="6446520"/>
+            <a:ext cx="5486400" cy="274320"/>
+          </a:xfrm>
+          <a:prstGeom prst="rect">
+            <a:avLst/>
+          </a:prstGeom>
+          <a:noFill/>
+        </p:spPr>
+        <p:txBody>
+          <a:bodyPr wrap="square" lIns="0" rIns="0" tIns="0" bIns="0">
+            <a:spAutoFit/>
+          </a:bodyPr>
+          <a:lstStyle/>
+          <a:p>
+            <a:pPr algn="l"/>
+            <a:r>
+              <a:rPr sz="900" b="0" i="1">
+                <a:solidFill>
+                  <a:srgbClr val="10B981"/>
+                </a:solidFill>
+                <a:latin typeface="Consolas"/>
+                <a:hlinkClick r:id="rId2"/>
+              </a:rPr>
+              <a:t>fashion-ai-engine-app.streamlit.app</a:t>
             </a:r>
           </a:p>
         </p:txBody>
@@ -4813,7 +5461,7 @@
         </p:nvSpPr>
         <p:spPr>
           <a:xfrm>
-            <a:off x="731520" y="457200"/>
+            <a:off x="457200" y="457200"/>
             <a:ext cx="10972800" cy="274320"/>
           </a:xfrm>
           <a:prstGeom prst="rect">
@@ -4835,7 +5483,7 @@
                 </a:solidFill>
                 <a:latin typeface="Calibri"/>
               </a:rPr>
-              <a:t>SECCIÓN 3 · RESULTADOS</a:t>
+              <a:t>DATASET</a:t>
             </a:r>
           </a:p>
         </p:txBody>
@@ -4848,29 +5496,29 @@
         </p:nvSpPr>
         <p:spPr>
           <a:xfrm>
-            <a:off x="731520" y="777240"/>
-            <a:ext cx="10972800" cy="731520"/>
-          </a:xfrm>
-          <a:prstGeom prst="rect">
-            <a:avLst/>
-          </a:prstGeom>
-          <a:noFill/>
-        </p:spPr>
-        <p:txBody>
-          <a:bodyPr wrap="square" lIns="0" rIns="0" tIns="0" bIns="0">
-            <a:spAutoFit/>
-          </a:bodyPr>
-          <a:lstStyle/>
-          <a:p>
-            <a:pPr algn="l"/>
-            <a:r>
-              <a:rPr sz="2800" b="1" i="0">
+            <a:off x="457200" y="777240"/>
+            <a:ext cx="10972800" cy="777240"/>
+          </a:xfrm>
+          <a:prstGeom prst="rect">
+            <a:avLst/>
+          </a:prstGeom>
+          <a:noFill/>
+        </p:spPr>
+        <p:txBody>
+          <a:bodyPr wrap="square" lIns="0" rIns="0" tIns="0" bIns="0">
+            <a:spAutoFit/>
+          </a:bodyPr>
+          <a:lstStyle/>
+          <a:p>
+            <a:pPr algn="l"/>
+            <a:r>
+              <a:rPr sz="3000" b="1" i="0">
                 <a:solidFill>
                   <a:srgbClr val="0F172A"/>
                 </a:solidFill>
                 <a:latin typeface="Calibri"/>
               </a:rPr>
-              <a:t>El motor no produce menos: produce mejor</a:t>
+              <a:t>Por qué H&amp;M Personalized Fashion Recommendations</a:t>
             </a:r>
           </a:p>
         </p:txBody>
@@ -4883,8 +5531,8 @@
         </p:nvCxnSpPr>
         <p:spPr>
           <a:xfrm>
-            <a:off x="731520" y="1554480"/>
-            <a:ext cx="10698480" cy="0"/>
+            <a:off x="457200" y="1691640"/>
+            <a:ext cx="11274552" cy="0"/>
           </a:xfrm>
           <a:prstGeom prst="line">
             <a:avLst/>
@@ -4918,19 +5566,17 @@
         </p:nvSpPr>
         <p:spPr>
           <a:xfrm>
-            <a:off x="731520" y="1828800"/>
-            <a:ext cx="2651760" cy="1554480"/>
+            <a:off x="457200" y="1920240"/>
+            <a:ext cx="5669280" cy="4297680"/>
           </a:xfrm>
           <a:prstGeom prst="rect">
             <a:avLst/>
           </a:prstGeom>
           <a:solidFill>
-            <a:srgbClr val="FFFFFF"/>
+            <a:srgbClr val="F8FAFC"/>
           </a:solidFill>
-          <a:ln w="6350">
-            <a:solidFill>
-              <a:srgbClr val="E2E8F0"/>
-            </a:solidFill>
+          <a:ln>
+            <a:noFill/>
           </a:ln>
           <a:effectLst/>
         </p:spPr>
@@ -4958,14 +5604,469 @@
       </p:sp>
       <p:sp>
         <p:nvSpPr>
-          <p:cNvPr id="6" name="Rectangle 5"/>
+          <p:cNvPr id="6" name="TextBox 5"/>
+          <p:cNvSpPr txBox="1"/>
+          <p:nvPr/>
+        </p:nvSpPr>
+        <p:spPr>
+          <a:xfrm>
+            <a:off x="685800" y="2103120"/>
+            <a:ext cx="5486400" cy="274320"/>
+          </a:xfrm>
+          <a:prstGeom prst="rect">
+            <a:avLst/>
+          </a:prstGeom>
+          <a:noFill/>
+        </p:spPr>
+        <p:txBody>
+          <a:bodyPr wrap="square" lIns="0" rIns="0" tIns="0" bIns="0">
+            <a:spAutoFit/>
+          </a:bodyPr>
+          <a:lstStyle/>
+          <a:p>
+            <a:pPr algn="l"/>
+            <a:r>
+              <a:rPr sz="1000" b="1" i="0">
+                <a:solidFill>
+                  <a:srgbClr val="10B981"/>
+                </a:solidFill>
+                <a:latin typeface="Calibri"/>
+              </a:rPr>
+              <a:t>H&amp;M KAGGLE COMPETITION · 2022</a:t>
+            </a:r>
+          </a:p>
+        </p:txBody>
+      </p:sp>
+      <p:sp>
+        <p:nvSpPr>
+          <p:cNvPr id="7" name="TextBox 6"/>
+          <p:cNvSpPr txBox="1"/>
+          <p:nvPr/>
+        </p:nvSpPr>
+        <p:spPr>
+          <a:xfrm>
+            <a:off x="685800" y="2423160"/>
+            <a:ext cx="5486400" cy="914400"/>
+          </a:xfrm>
+          <a:prstGeom prst="rect">
+            <a:avLst/>
+          </a:prstGeom>
+          <a:noFill/>
+        </p:spPr>
+        <p:txBody>
+          <a:bodyPr wrap="square" lIns="0" rIns="0" tIns="0" bIns="0">
+            <a:spAutoFit/>
+          </a:bodyPr>
+          <a:lstStyle/>
+          <a:p>
+            <a:pPr algn="l"/>
+            <a:r>
+              <a:rPr sz="5800" b="1" i="0">
+                <a:solidFill>
+                  <a:srgbClr val="0F172A"/>
+                </a:solidFill>
+                <a:latin typeface="Calibri"/>
+              </a:rPr>
+              <a:t>31,8M</a:t>
+            </a:r>
+          </a:p>
+        </p:txBody>
+      </p:sp>
+      <p:sp>
+        <p:nvSpPr>
+          <p:cNvPr id="8" name="TextBox 7"/>
+          <p:cNvSpPr txBox="1"/>
+          <p:nvPr/>
+        </p:nvSpPr>
+        <p:spPr>
+          <a:xfrm>
+            <a:off x="685800" y="3383280"/>
+            <a:ext cx="5486400" cy="365760"/>
+          </a:xfrm>
+          <a:prstGeom prst="rect">
+            <a:avLst/>
+          </a:prstGeom>
+          <a:noFill/>
+        </p:spPr>
+        <p:txBody>
+          <a:bodyPr wrap="square" lIns="0" rIns="0" tIns="0" bIns="0">
+            <a:spAutoFit/>
+          </a:bodyPr>
+          <a:lstStyle/>
+          <a:p>
+            <a:pPr algn="l"/>
+            <a:r>
+              <a:rPr sz="1400" b="0" i="0">
+                <a:solidFill>
+                  <a:srgbClr val="1E293B"/>
+                </a:solidFill>
+                <a:latin typeface="Calibri"/>
+              </a:rPr>
+              <a:t>transacciones reales</a:t>
+            </a:r>
+          </a:p>
+        </p:txBody>
+      </p:sp>
+      <p:sp>
+        <p:nvSpPr>
+          <p:cNvPr id="9" name="TextBox 8"/>
+          <p:cNvSpPr txBox="1"/>
+          <p:nvPr/>
+        </p:nvSpPr>
+        <p:spPr>
+          <a:xfrm>
+            <a:off x="685800" y="3749039"/>
+            <a:ext cx="5486400" cy="365760"/>
+          </a:xfrm>
+          <a:prstGeom prst="rect">
+            <a:avLst/>
+          </a:prstGeom>
+          <a:noFill/>
+        </p:spPr>
+        <p:txBody>
+          <a:bodyPr wrap="square" lIns="0" rIns="0" tIns="0" bIns="0">
+            <a:spAutoFit/>
+          </a:bodyPr>
+          <a:lstStyle/>
+          <a:p>
+            <a:pPr algn="l"/>
+            <a:r>
+              <a:rPr sz="1100" b="0" i="1">
+                <a:solidFill>
+                  <a:srgbClr val="64748B"/>
+                </a:solidFill>
+                <a:latin typeface="Calibri"/>
+              </a:rPr>
+              <a:t>septiembre 2018 — septiembre 2020</a:t>
+            </a:r>
+          </a:p>
+        </p:txBody>
+      </p:sp>
+      <p:sp>
+        <p:nvSpPr>
+          <p:cNvPr id="10" name="TextBox 9"/>
+          <p:cNvSpPr txBox="1"/>
+          <p:nvPr/>
+        </p:nvSpPr>
+        <p:spPr>
+          <a:xfrm>
+            <a:off x="685800" y="4297680"/>
+            <a:ext cx="1691640" cy="457200"/>
+          </a:xfrm>
+          <a:prstGeom prst="rect">
+            <a:avLst/>
+          </a:prstGeom>
+          <a:noFill/>
+        </p:spPr>
+        <p:txBody>
+          <a:bodyPr wrap="square" lIns="0" rIns="0" tIns="0" bIns="0">
+            <a:spAutoFit/>
+          </a:bodyPr>
+          <a:lstStyle/>
+          <a:p>
+            <a:pPr algn="l"/>
+            <a:r>
+              <a:rPr sz="2200" b="1" i="0">
+                <a:solidFill>
+                  <a:srgbClr val="059669"/>
+                </a:solidFill>
+                <a:latin typeface="Calibri"/>
+              </a:rPr>
+              <a:t>105K</a:t>
+            </a:r>
+          </a:p>
+        </p:txBody>
+      </p:sp>
+      <p:sp>
+        <p:nvSpPr>
+          <p:cNvPr id="11" name="TextBox 10"/>
+          <p:cNvSpPr txBox="1"/>
+          <p:nvPr/>
+        </p:nvSpPr>
+        <p:spPr>
+          <a:xfrm>
+            <a:off x="685800" y="4800600"/>
+            <a:ext cx="1691640" cy="274320"/>
+          </a:xfrm>
+          <a:prstGeom prst="rect">
+            <a:avLst/>
+          </a:prstGeom>
+          <a:noFill/>
+        </p:spPr>
+        <p:txBody>
+          <a:bodyPr wrap="square" lIns="0" rIns="0" tIns="0" bIns="0">
+            <a:spAutoFit/>
+          </a:bodyPr>
+          <a:lstStyle/>
+          <a:p>
+            <a:pPr algn="l"/>
+            <a:r>
+              <a:rPr sz="1000" b="0" i="0">
+                <a:solidFill>
+                  <a:srgbClr val="64748B"/>
+                </a:solidFill>
+                <a:latin typeface="Calibri"/>
+              </a:rPr>
+              <a:t>artículos</a:t>
+            </a:r>
+          </a:p>
+        </p:txBody>
+      </p:sp>
+      <p:sp>
+        <p:nvSpPr>
+          <p:cNvPr id="12" name="TextBox 11"/>
+          <p:cNvSpPr txBox="1"/>
+          <p:nvPr/>
+        </p:nvSpPr>
+        <p:spPr>
+          <a:xfrm>
+            <a:off x="2468880" y="4297680"/>
+            <a:ext cx="1691640" cy="457200"/>
+          </a:xfrm>
+          <a:prstGeom prst="rect">
+            <a:avLst/>
+          </a:prstGeom>
+          <a:noFill/>
+        </p:spPr>
+        <p:txBody>
+          <a:bodyPr wrap="square" lIns="0" rIns="0" tIns="0" bIns="0">
+            <a:spAutoFit/>
+          </a:bodyPr>
+          <a:lstStyle/>
+          <a:p>
+            <a:pPr algn="l"/>
+            <a:r>
+              <a:rPr sz="2200" b="1" i="0">
+                <a:solidFill>
+                  <a:srgbClr val="059669"/>
+                </a:solidFill>
+                <a:latin typeface="Calibri"/>
+              </a:rPr>
+              <a:t>1,37M</a:t>
+            </a:r>
+          </a:p>
+        </p:txBody>
+      </p:sp>
+      <p:sp>
+        <p:nvSpPr>
+          <p:cNvPr id="13" name="TextBox 12"/>
+          <p:cNvSpPr txBox="1"/>
+          <p:nvPr/>
+        </p:nvSpPr>
+        <p:spPr>
+          <a:xfrm>
+            <a:off x="2468880" y="4800600"/>
+            <a:ext cx="1691640" cy="274320"/>
+          </a:xfrm>
+          <a:prstGeom prst="rect">
+            <a:avLst/>
+          </a:prstGeom>
+          <a:noFill/>
+        </p:spPr>
+        <p:txBody>
+          <a:bodyPr wrap="square" lIns="0" rIns="0" tIns="0" bIns="0">
+            <a:spAutoFit/>
+          </a:bodyPr>
+          <a:lstStyle/>
+          <a:p>
+            <a:pPr algn="l"/>
+            <a:r>
+              <a:rPr sz="1000" b="0" i="0">
+                <a:solidFill>
+                  <a:srgbClr val="64748B"/>
+                </a:solidFill>
+                <a:latin typeface="Calibri"/>
+              </a:rPr>
+              <a:t>clientes</a:t>
+            </a:r>
+          </a:p>
+        </p:txBody>
+      </p:sp>
+      <p:sp>
+        <p:nvSpPr>
+          <p:cNvPr id="14" name="TextBox 13"/>
+          <p:cNvSpPr txBox="1"/>
+          <p:nvPr/>
+        </p:nvSpPr>
+        <p:spPr>
+          <a:xfrm>
+            <a:off x="4251960" y="4297680"/>
+            <a:ext cx="1691640" cy="457200"/>
+          </a:xfrm>
+          <a:prstGeom prst="rect">
+            <a:avLst/>
+          </a:prstGeom>
+          <a:noFill/>
+        </p:spPr>
+        <p:txBody>
+          <a:bodyPr wrap="square" lIns="0" rIns="0" tIns="0" bIns="0">
+            <a:spAutoFit/>
+          </a:bodyPr>
+          <a:lstStyle/>
+          <a:p>
+            <a:pPr algn="l"/>
+            <a:r>
+              <a:rPr sz="2200" b="1" i="0">
+                <a:solidFill>
+                  <a:srgbClr val="059669"/>
+                </a:solidFill>
+                <a:latin typeface="Calibri"/>
+              </a:rPr>
+              <a:t>2 años</a:t>
+            </a:r>
+          </a:p>
+        </p:txBody>
+      </p:sp>
+      <p:sp>
+        <p:nvSpPr>
+          <p:cNvPr id="15" name="TextBox 14"/>
+          <p:cNvSpPr txBox="1"/>
+          <p:nvPr/>
+        </p:nvSpPr>
+        <p:spPr>
+          <a:xfrm>
+            <a:off x="4251960" y="4800600"/>
+            <a:ext cx="1691640" cy="274320"/>
+          </a:xfrm>
+          <a:prstGeom prst="rect">
+            <a:avLst/>
+          </a:prstGeom>
+          <a:noFill/>
+        </p:spPr>
+        <p:txBody>
+          <a:bodyPr wrap="square" lIns="0" rIns="0" tIns="0" bIns="0">
+            <a:spAutoFit/>
+          </a:bodyPr>
+          <a:lstStyle/>
+          <a:p>
+            <a:pPr algn="l"/>
+            <a:r>
+              <a:rPr sz="1000" b="0" i="0">
+                <a:solidFill>
+                  <a:srgbClr val="64748B"/>
+                </a:solidFill>
+                <a:latin typeface="Calibri"/>
+              </a:rPr>
+              <a:t>histórico</a:t>
+            </a:r>
+          </a:p>
+        </p:txBody>
+      </p:sp>
+      <p:sp>
+        <p:nvSpPr>
+          <p:cNvPr id="16" name="TextBox 15"/>
+          <p:cNvSpPr txBox="1"/>
+          <p:nvPr/>
+        </p:nvSpPr>
+        <p:spPr>
+          <a:xfrm>
+            <a:off x="685800" y="5623560"/>
+            <a:ext cx="5486400" cy="365760"/>
+          </a:xfrm>
+          <a:prstGeom prst="rect">
+            <a:avLst/>
+          </a:prstGeom>
+          <a:noFill/>
+        </p:spPr>
+        <p:txBody>
+          <a:bodyPr wrap="square" lIns="0" rIns="0" tIns="0" bIns="0">
+            <a:spAutoFit/>
+          </a:bodyPr>
+          <a:lstStyle/>
+          <a:p>
+            <a:pPr algn="l"/>
+            <a:r>
+              <a:rPr sz="1200" b="1" i="1">
+                <a:solidFill>
+                  <a:srgbClr val="0F172A"/>
+                </a:solidFill>
+                <a:latin typeface="Calibri"/>
+              </a:rPr>
+              <a:t>→ Volumen industrial real</a:t>
+            </a:r>
+          </a:p>
+        </p:txBody>
+      </p:sp>
+      <p:sp>
+        <p:nvSpPr>
+          <p:cNvPr id="17" name="TextBox 16"/>
+          <p:cNvSpPr txBox="1"/>
+          <p:nvPr/>
+        </p:nvSpPr>
+        <p:spPr>
+          <a:xfrm>
+            <a:off x="685800" y="5989320"/>
+            <a:ext cx="5486400" cy="274320"/>
+          </a:xfrm>
+          <a:prstGeom prst="rect">
+            <a:avLst/>
+          </a:prstGeom>
+          <a:noFill/>
+        </p:spPr>
+        <p:txBody>
+          <a:bodyPr wrap="square" lIns="0" rIns="0" tIns="0" bIns="0">
+            <a:spAutoFit/>
+          </a:bodyPr>
+          <a:lstStyle/>
+          <a:p>
+            <a:pPr algn="l"/>
+            <a:r>
+              <a:rPr sz="1000" b="0" i="0">
+                <a:solidFill>
+                  <a:srgbClr val="64748B"/>
+                </a:solidFill>
+                <a:latin typeface="Calibri"/>
+              </a:rPr>
+              <a:t>No un dataset de juguete: condiciones que se parecen a las de H&amp;M de verdad.</a:t>
+            </a:r>
+          </a:p>
+        </p:txBody>
+      </p:sp>
+      <p:sp>
+        <p:nvSpPr>
+          <p:cNvPr id="18" name="TextBox 17"/>
+          <p:cNvSpPr txBox="1"/>
+          <p:nvPr/>
+        </p:nvSpPr>
+        <p:spPr>
+          <a:xfrm>
+            <a:off x="6492240" y="2103120"/>
+            <a:ext cx="5486400" cy="274320"/>
+          </a:xfrm>
+          <a:prstGeom prst="rect">
+            <a:avLst/>
+          </a:prstGeom>
+          <a:noFill/>
+        </p:spPr>
+        <p:txBody>
+          <a:bodyPr wrap="square" lIns="0" rIns="0" tIns="0" bIns="0">
+            <a:spAutoFit/>
+          </a:bodyPr>
+          <a:lstStyle/>
+          <a:p>
+            <a:pPr algn="l"/>
+            <a:r>
+              <a:rPr sz="1000" b="1" i="0">
+                <a:solidFill>
+                  <a:srgbClr val="10B981"/>
+                </a:solidFill>
+                <a:latin typeface="Calibri"/>
+              </a:rPr>
+              <a:t>POR QUÉ LO ELEGÍ</a:t>
+            </a:r>
+          </a:p>
+        </p:txBody>
+      </p:sp>
+      <p:sp>
+        <p:nvSpPr>
+          <p:cNvPr id="19" name="Rectangle 18"/>
           <p:cNvSpPr/>
           <p:nvPr/>
         </p:nvSpPr>
         <p:spPr>
           <a:xfrm>
-            <a:off x="731520" y="1828800"/>
-            <a:ext cx="2651760" cy="45720"/>
+            <a:off x="6492240" y="2468880"/>
+            <a:ext cx="45720" cy="640080"/>
           </a:xfrm>
           <a:prstGeom prst="rect">
             <a:avLst/>
@@ -5002,84 +6103,49 @@
       </p:sp>
       <p:sp>
         <p:nvSpPr>
-          <p:cNvPr id="7" name="TextBox 6"/>
-          <p:cNvSpPr txBox="1"/>
-          <p:nvPr/>
-        </p:nvSpPr>
-        <p:spPr>
-          <a:xfrm>
-            <a:off x="914400" y="2011680"/>
-            <a:ext cx="2286000" cy="274320"/>
-          </a:xfrm>
-          <a:prstGeom prst="rect">
-            <a:avLst/>
-          </a:prstGeom>
-          <a:noFill/>
-        </p:spPr>
-        <p:txBody>
-          <a:bodyPr wrap="square" lIns="0" rIns="0" tIns="0" bIns="0">
-            <a:spAutoFit/>
-          </a:bodyPr>
-          <a:lstStyle/>
-          <a:p>
-            <a:pPr algn="l"/>
-            <a:r>
-              <a:rPr sz="900" b="1" i="0">
-                <a:solidFill>
-                  <a:srgbClr val="64748B"/>
-                </a:solidFill>
-                <a:latin typeface="Calibri"/>
-              </a:rPr>
-              <a:t>MARGEN INCREMENTAL</a:t>
-            </a:r>
-          </a:p>
-        </p:txBody>
-      </p:sp>
-      <p:sp>
-        <p:nvSpPr>
-          <p:cNvPr id="8" name="TextBox 7"/>
-          <p:cNvSpPr txBox="1"/>
-          <p:nvPr/>
-        </p:nvSpPr>
-        <p:spPr>
-          <a:xfrm>
-            <a:off x="914400" y="2331720"/>
-            <a:ext cx="2286000" cy="731520"/>
-          </a:xfrm>
-          <a:prstGeom prst="rect">
-            <a:avLst/>
-          </a:prstGeom>
-          <a:noFill/>
-        </p:spPr>
-        <p:txBody>
-          <a:bodyPr wrap="square" lIns="0" rIns="0" tIns="0" bIns="0">
-            <a:spAutoFit/>
-          </a:bodyPr>
-          <a:lstStyle/>
-          <a:p>
-            <a:pPr algn="l"/>
-            <a:r>
-              <a:rPr sz="3200" b="1" i="0">
-                <a:solidFill>
-                  <a:srgbClr val="059669"/>
-                </a:solidFill>
-                <a:latin typeface="Calibri"/>
-              </a:rPr>
-              <a:t>+175,5K €</a:t>
-            </a:r>
-          </a:p>
-        </p:txBody>
-      </p:sp>
-      <p:sp>
-        <p:nvSpPr>
-          <p:cNvPr id="9" name="TextBox 8"/>
-          <p:cNvSpPr txBox="1"/>
-          <p:nvPr/>
-        </p:nvSpPr>
-        <p:spPr>
-          <a:xfrm>
-            <a:off x="914400" y="2926080"/>
-            <a:ext cx="2286000" cy="365760"/>
+          <p:cNvPr id="20" name="TextBox 19"/>
+          <p:cNvSpPr txBox="1"/>
+          <p:nvPr/>
+        </p:nvSpPr>
+        <p:spPr>
+          <a:xfrm>
+            <a:off x="6675120" y="2468880"/>
+            <a:ext cx="5029200" cy="320040"/>
+          </a:xfrm>
+          <a:prstGeom prst="rect">
+            <a:avLst/>
+          </a:prstGeom>
+          <a:noFill/>
+        </p:spPr>
+        <p:txBody>
+          <a:bodyPr wrap="square" lIns="0" rIns="0" tIns="0" bIns="0">
+            <a:spAutoFit/>
+          </a:bodyPr>
+          <a:lstStyle/>
+          <a:p>
+            <a:pPr algn="l"/>
+            <a:r>
+              <a:rPr sz="1200" b="1" i="0">
+                <a:solidFill>
+                  <a:srgbClr val="0F172A"/>
+                </a:solidFill>
+                <a:latin typeface="Calibri"/>
+              </a:rPr>
+              <a:t>Volumen</a:t>
+            </a:r>
+          </a:p>
+        </p:txBody>
+      </p:sp>
+      <p:sp>
+        <p:nvSpPr>
+          <p:cNvPr id="21" name="TextBox 20"/>
+          <p:cNvSpPr txBox="1"/>
+          <p:nvPr/>
+        </p:nvSpPr>
+        <p:spPr>
+          <a:xfrm>
+            <a:off x="6675120" y="2788920"/>
+            <a:ext cx="5029200" cy="365760"/>
           </a:xfrm>
           <a:prstGeom prst="rect">
             <a:avLst/>
@@ -5096,71 +6162,25 @@
             <a:r>
               <a:rPr sz="1000" b="0" i="0">
                 <a:solidFill>
-                  <a:srgbClr val="64748B"/>
-                </a:solidFill>
-                <a:latin typeface="Calibri"/>
-              </a:rPr>
-              <a:t>vs baseline humano</a:t>
-            </a:r>
-          </a:p>
-        </p:txBody>
-      </p:sp>
-      <p:sp>
-        <p:nvSpPr>
-          <p:cNvPr id="10" name="Rectangle 9"/>
+                  <a:srgbClr val="1E293B"/>
+                </a:solidFill>
+                <a:latin typeface="Calibri"/>
+              </a:rPr>
+              <a:t>31,8M transacciones — fuerza a usar pipelines reales y modelos que escalen</a:t>
+            </a:r>
+          </a:p>
+        </p:txBody>
+      </p:sp>
+      <p:sp>
+        <p:nvSpPr>
+          <p:cNvPr id="22" name="Rectangle 21"/>
           <p:cNvSpPr/>
           <p:nvPr/>
         </p:nvSpPr>
         <p:spPr>
           <a:xfrm>
-            <a:off x="3566160" y="1828800"/>
-            <a:ext cx="2651760" cy="1554480"/>
-          </a:xfrm>
-          <a:prstGeom prst="rect">
-            <a:avLst/>
-          </a:prstGeom>
-          <a:solidFill>
-            <a:srgbClr val="FFFFFF"/>
-          </a:solidFill>
-          <a:ln w="6350">
-            <a:solidFill>
-              <a:srgbClr val="E2E8F0"/>
-            </a:solidFill>
-          </a:ln>
-          <a:effectLst/>
-        </p:spPr>
-        <p:style>
-          <a:lnRef idx="1">
-            <a:schemeClr val="accent1"/>
-          </a:lnRef>
-          <a:fillRef idx="3">
-            <a:schemeClr val="accent1"/>
-          </a:fillRef>
-          <a:effectRef idx="2">
-            <a:schemeClr val="accent1"/>
-          </a:effectRef>
-          <a:fontRef idx="minor">
-            <a:schemeClr val="lt1"/>
-          </a:fontRef>
-        </p:style>
-        <p:txBody>
-          <a:bodyPr rtlCol="0" anchor="ctr"/>
-          <a:lstStyle/>
-          <a:p>
-            <a:pPr algn="ctr"/>
-          </a:p>
-        </p:txBody>
-      </p:sp>
-      <p:sp>
-        <p:nvSpPr>
-          <p:cNvPr id="11" name="Rectangle 10"/>
-          <p:cNvSpPr/>
-          <p:nvPr/>
-        </p:nvSpPr>
-        <p:spPr>
-          <a:xfrm>
-            <a:off x="3566160" y="1828800"/>
-            <a:ext cx="2651760" cy="45720"/>
+            <a:off x="6492240" y="3246120"/>
+            <a:ext cx="45720" cy="640080"/>
           </a:xfrm>
           <a:prstGeom prst="rect">
             <a:avLst/>
@@ -5197,84 +6217,49 @@
       </p:sp>
       <p:sp>
         <p:nvSpPr>
-          <p:cNvPr id="12" name="TextBox 11"/>
-          <p:cNvSpPr txBox="1"/>
-          <p:nvPr/>
-        </p:nvSpPr>
-        <p:spPr>
-          <a:xfrm>
-            <a:off x="3749039" y="2011680"/>
-            <a:ext cx="2286000" cy="274320"/>
-          </a:xfrm>
-          <a:prstGeom prst="rect">
-            <a:avLst/>
-          </a:prstGeom>
-          <a:noFill/>
-        </p:spPr>
-        <p:txBody>
-          <a:bodyPr wrap="square" lIns="0" rIns="0" tIns="0" bIns="0">
-            <a:spAutoFit/>
-          </a:bodyPr>
-          <a:lstStyle/>
-          <a:p>
-            <a:pPr algn="l"/>
-            <a:r>
-              <a:rPr sz="900" b="1" i="0">
-                <a:solidFill>
-                  <a:srgbClr val="64748B"/>
-                </a:solidFill>
-                <a:latin typeface="Calibri"/>
-              </a:rPr>
-              <a:t>DELTA EN %</a:t>
-            </a:r>
-          </a:p>
-        </p:txBody>
-      </p:sp>
-      <p:sp>
-        <p:nvSpPr>
-          <p:cNvPr id="13" name="TextBox 12"/>
-          <p:cNvSpPr txBox="1"/>
-          <p:nvPr/>
-        </p:nvSpPr>
-        <p:spPr>
-          <a:xfrm>
-            <a:off x="3749039" y="2331720"/>
-            <a:ext cx="2286000" cy="731520"/>
-          </a:xfrm>
-          <a:prstGeom prst="rect">
-            <a:avLst/>
-          </a:prstGeom>
-          <a:noFill/>
-        </p:spPr>
-        <p:txBody>
-          <a:bodyPr wrap="square" lIns="0" rIns="0" tIns="0" bIns="0">
-            <a:spAutoFit/>
-          </a:bodyPr>
-          <a:lstStyle/>
-          <a:p>
-            <a:pPr algn="l"/>
-            <a:r>
-              <a:rPr sz="3200" b="1" i="0">
-                <a:solidFill>
-                  <a:srgbClr val="059669"/>
-                </a:solidFill>
-                <a:latin typeface="Calibri"/>
-              </a:rPr>
-              <a:t>+6,8%</a:t>
-            </a:r>
-          </a:p>
-        </p:txBody>
-      </p:sp>
-      <p:sp>
-        <p:nvSpPr>
-          <p:cNvPr id="14" name="TextBox 13"/>
-          <p:cNvSpPr txBox="1"/>
-          <p:nvPr/>
-        </p:nvSpPr>
-        <p:spPr>
-          <a:xfrm>
-            <a:off x="3749039" y="2926080"/>
-            <a:ext cx="2286000" cy="365760"/>
+          <p:cNvPr id="23" name="TextBox 22"/>
+          <p:cNvSpPr txBox="1"/>
+          <p:nvPr/>
+        </p:nvSpPr>
+        <p:spPr>
+          <a:xfrm>
+            <a:off x="6675120" y="3246120"/>
+            <a:ext cx="5029200" cy="320040"/>
+          </a:xfrm>
+          <a:prstGeom prst="rect">
+            <a:avLst/>
+          </a:prstGeom>
+          <a:noFill/>
+        </p:spPr>
+        <p:txBody>
+          <a:bodyPr wrap="square" lIns="0" rIns="0" tIns="0" bIns="0">
+            <a:spAutoFit/>
+          </a:bodyPr>
+          <a:lstStyle/>
+          <a:p>
+            <a:pPr algn="l"/>
+            <a:r>
+              <a:rPr sz="1200" b="1" i="0">
+                <a:solidFill>
+                  <a:srgbClr val="0F172A"/>
+                </a:solidFill>
+                <a:latin typeface="Calibri"/>
+              </a:rPr>
+              <a:t>Calidad de metadatos</a:t>
+            </a:r>
+          </a:p>
+        </p:txBody>
+      </p:sp>
+      <p:sp>
+        <p:nvSpPr>
+          <p:cNvPr id="24" name="TextBox 23"/>
+          <p:cNvSpPr txBox="1"/>
+          <p:nvPr/>
+        </p:nvSpPr>
+        <p:spPr>
+          <a:xfrm>
+            <a:off x="6675120" y="3566160"/>
+            <a:ext cx="5029200" cy="365760"/>
           </a:xfrm>
           <a:prstGeom prst="rect">
             <a:avLst/>
@@ -5291,71 +6276,25 @@
             <a:r>
               <a:rPr sz="1000" b="0" i="0">
                 <a:solidFill>
-                  <a:srgbClr val="64748B"/>
-                </a:solidFill>
-                <a:latin typeface="Calibri"/>
-              </a:rPr>
-              <a:t>al mismo presupuesto</a:t>
-            </a:r>
-          </a:p>
-        </p:txBody>
-      </p:sp>
-      <p:sp>
-        <p:nvSpPr>
-          <p:cNvPr id="15" name="Rectangle 14"/>
+                  <a:srgbClr val="1E293B"/>
+                </a:solidFill>
+                <a:latin typeface="Calibri"/>
+              </a:rPr>
+              <a:t>Cada artículo tiene 25 atributos: tipo, color, departamento, índice…</a:t>
+            </a:r>
+          </a:p>
+        </p:txBody>
+      </p:sp>
+      <p:sp>
+        <p:nvSpPr>
+          <p:cNvPr id="25" name="Rectangle 24"/>
           <p:cNvSpPr/>
           <p:nvPr/>
         </p:nvSpPr>
         <p:spPr>
           <a:xfrm>
-            <a:off x="6400800" y="1828800"/>
-            <a:ext cx="2651760" cy="1554480"/>
-          </a:xfrm>
-          <a:prstGeom prst="rect">
-            <a:avLst/>
-          </a:prstGeom>
-          <a:solidFill>
-            <a:srgbClr val="FFFFFF"/>
-          </a:solidFill>
-          <a:ln w="6350">
-            <a:solidFill>
-              <a:srgbClr val="E2E8F0"/>
-            </a:solidFill>
-          </a:ln>
-          <a:effectLst/>
-        </p:spPr>
-        <p:style>
-          <a:lnRef idx="1">
-            <a:schemeClr val="accent1"/>
-          </a:lnRef>
-          <a:fillRef idx="3">
-            <a:schemeClr val="accent1"/>
-          </a:fillRef>
-          <a:effectRef idx="2">
-            <a:schemeClr val="accent1"/>
-          </a:effectRef>
-          <a:fontRef idx="minor">
-            <a:schemeClr val="lt1"/>
-          </a:fontRef>
-        </p:style>
-        <p:txBody>
-          <a:bodyPr rtlCol="0" anchor="ctr"/>
-          <a:lstStyle/>
-          <a:p>
-            <a:pPr algn="ctr"/>
-          </a:p>
-        </p:txBody>
-      </p:sp>
-      <p:sp>
-        <p:nvSpPr>
-          <p:cNvPr id="16" name="Rectangle 15"/>
-          <p:cNvSpPr/>
-          <p:nvPr/>
-        </p:nvSpPr>
-        <p:spPr>
-          <a:xfrm>
-            <a:off x="6400800" y="1828800"/>
-            <a:ext cx="2651760" cy="45720"/>
+            <a:off x="6492240" y="4023360"/>
+            <a:ext cx="45720" cy="640080"/>
           </a:xfrm>
           <a:prstGeom prst="rect">
             <a:avLst/>
@@ -5392,84 +6331,49 @@
       </p:sp>
       <p:sp>
         <p:nvSpPr>
-          <p:cNvPr id="17" name="TextBox 16"/>
-          <p:cNvSpPr txBox="1"/>
-          <p:nvPr/>
-        </p:nvSpPr>
-        <p:spPr>
-          <a:xfrm>
-            <a:off x="6583680" y="2011680"/>
-            <a:ext cx="2286000" cy="274320"/>
-          </a:xfrm>
-          <a:prstGeom prst="rect">
-            <a:avLst/>
-          </a:prstGeom>
-          <a:noFill/>
-        </p:spPr>
-        <p:txBody>
-          <a:bodyPr wrap="square" lIns="0" rIns="0" tIns="0" bIns="0">
-            <a:spAutoFit/>
-          </a:bodyPr>
-          <a:lstStyle/>
-          <a:p>
-            <a:pPr algn="l"/>
-            <a:r>
-              <a:rPr sz="900" b="1" i="0">
-                <a:solidFill>
-                  <a:srgbClr val="64748B"/>
-                </a:solidFill>
-                <a:latin typeface="Calibri"/>
-              </a:rPr>
-              <a:t>STOCK MUERTO EVITADO</a:t>
-            </a:r>
-          </a:p>
-        </p:txBody>
-      </p:sp>
-      <p:sp>
-        <p:nvSpPr>
-          <p:cNvPr id="18" name="TextBox 17"/>
-          <p:cNvSpPr txBox="1"/>
-          <p:nvPr/>
-        </p:nvSpPr>
-        <p:spPr>
-          <a:xfrm>
-            <a:off x="6583680" y="2331720"/>
-            <a:ext cx="2286000" cy="731520"/>
-          </a:xfrm>
-          <a:prstGeom prst="rect">
-            <a:avLst/>
-          </a:prstGeom>
-          <a:noFill/>
-        </p:spPr>
-        <p:txBody>
-          <a:bodyPr wrap="square" lIns="0" rIns="0" tIns="0" bIns="0">
-            <a:spAutoFit/>
-          </a:bodyPr>
-          <a:lstStyle/>
-          <a:p>
-            <a:pPr algn="l"/>
-            <a:r>
-              <a:rPr sz="3200" b="1" i="0">
+          <p:cNvPr id="26" name="TextBox 25"/>
+          <p:cNvSpPr txBox="1"/>
+          <p:nvPr/>
+        </p:nvSpPr>
+        <p:spPr>
+          <a:xfrm>
+            <a:off x="6675120" y="4023360"/>
+            <a:ext cx="5029200" cy="320040"/>
+          </a:xfrm>
+          <a:prstGeom prst="rect">
+            <a:avLst/>
+          </a:prstGeom>
+          <a:noFill/>
+        </p:spPr>
+        <p:txBody>
+          <a:bodyPr wrap="square" lIns="0" rIns="0" tIns="0" bIns="0">
+            <a:spAutoFit/>
+          </a:bodyPr>
+          <a:lstStyle/>
+          <a:p>
+            <a:pPr algn="l"/>
+            <a:r>
+              <a:rPr sz="1200" b="1" i="0">
                 <a:solidFill>
                   <a:srgbClr val="0F172A"/>
                 </a:solidFill>
                 <a:latin typeface="Calibri"/>
               </a:rPr>
-              <a:t>5,6K uds</a:t>
-            </a:r>
-          </a:p>
-        </p:txBody>
-      </p:sp>
-      <p:sp>
-        <p:nvSpPr>
-          <p:cNvPr id="19" name="TextBox 18"/>
-          <p:cNvSpPr txBox="1"/>
-          <p:nvPr/>
-        </p:nvSpPr>
-        <p:spPr>
-          <a:xfrm>
-            <a:off x="6583680" y="2926080"/>
-            <a:ext cx="2286000" cy="365760"/>
+              <a:t>Histórico temporal</a:t>
+            </a:r>
+          </a:p>
+        </p:txBody>
+      </p:sp>
+      <p:sp>
+        <p:nvSpPr>
+          <p:cNvPr id="27" name="TextBox 26"/>
+          <p:cNvSpPr txBox="1"/>
+          <p:nvPr/>
+        </p:nvSpPr>
+        <p:spPr>
+          <a:xfrm>
+            <a:off x="6675120" y="4343400"/>
+            <a:ext cx="5029200" cy="365760"/>
           </a:xfrm>
           <a:prstGeom prst="rect">
             <a:avLst/>
@@ -5486,71 +6390,25 @@
             <a:r>
               <a:rPr sz="1000" b="0" i="0">
                 <a:solidFill>
-                  <a:srgbClr val="64748B"/>
-                </a:solidFill>
-                <a:latin typeface="Calibri"/>
-              </a:rPr>
-              <a:t>−5,4% unsold</a:t>
-            </a:r>
-          </a:p>
-        </p:txBody>
-      </p:sp>
-      <p:sp>
-        <p:nvSpPr>
-          <p:cNvPr id="20" name="Rectangle 19"/>
+                  <a:srgbClr val="1E293B"/>
+                </a:solidFill>
+                <a:latin typeface="Calibri"/>
+              </a:rPr>
+              <a:t>2 años permiten validación temporal estricta sin trampas</a:t>
+            </a:r>
+          </a:p>
+        </p:txBody>
+      </p:sp>
+      <p:sp>
+        <p:nvSpPr>
+          <p:cNvPr id="28" name="Rectangle 27"/>
           <p:cNvSpPr/>
           <p:nvPr/>
         </p:nvSpPr>
         <p:spPr>
           <a:xfrm>
-            <a:off x="9235440" y="1828800"/>
-            <a:ext cx="2651760" cy="1554480"/>
-          </a:xfrm>
-          <a:prstGeom prst="rect">
-            <a:avLst/>
-          </a:prstGeom>
-          <a:solidFill>
-            <a:srgbClr val="FFFFFF"/>
-          </a:solidFill>
-          <a:ln w="6350">
-            <a:solidFill>
-              <a:srgbClr val="E2E8F0"/>
-            </a:solidFill>
-          </a:ln>
-          <a:effectLst/>
-        </p:spPr>
-        <p:style>
-          <a:lnRef idx="1">
-            <a:schemeClr val="accent1"/>
-          </a:lnRef>
-          <a:fillRef idx="3">
-            <a:schemeClr val="accent1"/>
-          </a:fillRef>
-          <a:effectRef idx="2">
-            <a:schemeClr val="accent1"/>
-          </a:effectRef>
-          <a:fontRef idx="minor">
-            <a:schemeClr val="lt1"/>
-          </a:fontRef>
-        </p:style>
-        <p:txBody>
-          <a:bodyPr rtlCol="0" anchor="ctr"/>
-          <a:lstStyle/>
-          <a:p>
-            <a:pPr algn="ctr"/>
-          </a:p>
-        </p:txBody>
-      </p:sp>
-      <p:sp>
-        <p:nvSpPr>
-          <p:cNvPr id="21" name="Rectangle 20"/>
-          <p:cNvSpPr/>
-          <p:nvPr/>
-        </p:nvSpPr>
-        <p:spPr>
-          <a:xfrm>
-            <a:off x="9235440" y="1828800"/>
-            <a:ext cx="2651760" cy="45720"/>
+            <a:off x="6492240" y="4800600"/>
+            <a:ext cx="45720" cy="640080"/>
           </a:xfrm>
           <a:prstGeom prst="rect">
             <a:avLst/>
@@ -5587,84 +6445,49 @@
       </p:sp>
       <p:sp>
         <p:nvSpPr>
-          <p:cNvPr id="22" name="TextBox 21"/>
-          <p:cNvSpPr txBox="1"/>
-          <p:nvPr/>
-        </p:nvSpPr>
-        <p:spPr>
-          <a:xfrm>
-            <a:off x="9418319" y="2011680"/>
-            <a:ext cx="2286000" cy="274320"/>
-          </a:xfrm>
-          <a:prstGeom prst="rect">
-            <a:avLst/>
-          </a:prstGeom>
-          <a:noFill/>
-        </p:spPr>
-        <p:txBody>
-          <a:bodyPr wrap="square" lIns="0" rIns="0" tIns="0" bIns="0">
-            <a:spAutoFit/>
-          </a:bodyPr>
-          <a:lstStyle/>
-          <a:p>
-            <a:pPr algn="l"/>
-            <a:r>
-              <a:rPr sz="900" b="1" i="0">
-                <a:solidFill>
-                  <a:srgbClr val="64748B"/>
-                </a:solidFill>
-                <a:latin typeface="Calibri"/>
-              </a:rPr>
-              <a:t>GAP VS ORACLE</a:t>
-            </a:r>
-          </a:p>
-        </p:txBody>
-      </p:sp>
-      <p:sp>
-        <p:nvSpPr>
-          <p:cNvPr id="23" name="TextBox 22"/>
-          <p:cNvSpPr txBox="1"/>
-          <p:nvPr/>
-        </p:nvSpPr>
-        <p:spPr>
-          <a:xfrm>
-            <a:off x="9418319" y="2331720"/>
-            <a:ext cx="2286000" cy="731520"/>
-          </a:xfrm>
-          <a:prstGeom prst="rect">
-            <a:avLst/>
-          </a:prstGeom>
-          <a:noFill/>
-        </p:spPr>
-        <p:txBody>
-          <a:bodyPr wrap="square" lIns="0" rIns="0" tIns="0" bIns="0">
-            <a:spAutoFit/>
-          </a:bodyPr>
-          <a:lstStyle/>
-          <a:p>
-            <a:pPr algn="l"/>
-            <a:r>
-              <a:rPr sz="3200" b="1" i="0">
+          <p:cNvPr id="29" name="TextBox 28"/>
+          <p:cNvSpPr txBox="1"/>
+          <p:nvPr/>
+        </p:nvSpPr>
+        <p:spPr>
+          <a:xfrm>
+            <a:off x="6675120" y="4800600"/>
+            <a:ext cx="5029200" cy="320040"/>
+          </a:xfrm>
+          <a:prstGeom prst="rect">
+            <a:avLst/>
+          </a:prstGeom>
+          <a:noFill/>
+        </p:spPr>
+        <p:txBody>
+          <a:bodyPr wrap="square" lIns="0" rIns="0" tIns="0" bIns="0">
+            <a:spAutoFit/>
+          </a:bodyPr>
+          <a:lstStyle/>
+          <a:p>
+            <a:pPr algn="l"/>
+            <a:r>
+              <a:rPr sz="1200" b="1" i="0">
                 <a:solidFill>
                   <a:srgbClr val="0F172A"/>
                 </a:solidFill>
                 <a:latin typeface="Calibri"/>
               </a:rPr>
-              <a:t>+214K €</a:t>
-            </a:r>
-          </a:p>
-        </p:txBody>
-      </p:sp>
-      <p:sp>
-        <p:nvSpPr>
-          <p:cNvPr id="24" name="TextBox 23"/>
-          <p:cNvSpPr txBox="1"/>
-          <p:nvPr/>
-        </p:nvSpPr>
-        <p:spPr>
-          <a:xfrm>
-            <a:off x="9418319" y="2926080"/>
-            <a:ext cx="2286000" cy="365760"/>
+              <a:t>Reproducibilidad</a:t>
+            </a:r>
+          </a:p>
+        </p:txBody>
+      </p:sp>
+      <p:sp>
+        <p:nvSpPr>
+          <p:cNvPr id="30" name="TextBox 29"/>
+          <p:cNvSpPr txBox="1"/>
+          <p:nvPr/>
+        </p:nvSpPr>
+        <p:spPr>
+          <a:xfrm>
+            <a:off x="6675120" y="5120640"/>
+            <a:ext cx="5029200" cy="365760"/>
           </a:xfrm>
           <a:prstGeom prst="rect">
             <a:avLst/>
@@ -5681,69 +6504,25 @@
             <a:r>
               <a:rPr sz="1000" b="0" i="0">
                 <a:solidFill>
-                  <a:srgbClr val="64748B"/>
-                </a:solidFill>
-                <a:latin typeface="Calibri"/>
-              </a:rPr>
-              <a:t>techo teórico de mejora</a:t>
-            </a:r>
-          </a:p>
-        </p:txBody>
-      </p:sp>
-      <p:sp>
-        <p:nvSpPr>
-          <p:cNvPr id="25" name="Rectangle 24"/>
+                  <a:srgbClr val="1E293B"/>
+                </a:solidFill>
+                <a:latin typeface="Calibri"/>
+              </a:rPr>
+              <a:t>Público y descargable vía Kaggle — cualquiera puede replicar</a:t>
+            </a:r>
+          </a:p>
+        </p:txBody>
+      </p:sp>
+      <p:sp>
+        <p:nvSpPr>
+          <p:cNvPr id="31" name="Rectangle 30"/>
           <p:cNvSpPr/>
           <p:nvPr/>
         </p:nvSpPr>
         <p:spPr>
           <a:xfrm>
-            <a:off x="731520" y="3840480"/>
-            <a:ext cx="10698480" cy="2011680"/>
-          </a:xfrm>
-          <a:prstGeom prst="rect">
-            <a:avLst/>
-          </a:prstGeom>
-          <a:solidFill>
-            <a:srgbClr val="F8FAFC"/>
-          </a:solidFill>
-          <a:ln>
-            <a:noFill/>
-          </a:ln>
-          <a:effectLst/>
-        </p:spPr>
-        <p:style>
-          <a:lnRef idx="1">
-            <a:schemeClr val="accent1"/>
-          </a:lnRef>
-          <a:fillRef idx="3">
-            <a:schemeClr val="accent1"/>
-          </a:fillRef>
-          <a:effectRef idx="2">
-            <a:schemeClr val="accent1"/>
-          </a:effectRef>
-          <a:fontRef idx="minor">
-            <a:schemeClr val="lt1"/>
-          </a:fontRef>
-        </p:style>
-        <p:txBody>
-          <a:bodyPr rtlCol="0" anchor="ctr"/>
-          <a:lstStyle/>
-          <a:p>
-            <a:pPr algn="ctr"/>
-          </a:p>
-        </p:txBody>
-      </p:sp>
-      <p:sp>
-        <p:nvSpPr>
-          <p:cNvPr id="26" name="Rectangle 25"/>
-          <p:cNvSpPr/>
-          <p:nvPr/>
-        </p:nvSpPr>
-        <p:spPr>
-          <a:xfrm>
-            <a:off x="731520" y="3840480"/>
-            <a:ext cx="54864" cy="2011680"/>
+            <a:off x="6492240" y="5577840"/>
+            <a:ext cx="45720" cy="640080"/>
           </a:xfrm>
           <a:prstGeom prst="rect">
             <a:avLst/>
@@ -5780,105 +6559,141 @@
       </p:sp>
       <p:sp>
         <p:nvSpPr>
-          <p:cNvPr id="27" name="TextBox 26"/>
-          <p:cNvSpPr txBox="1"/>
-          <p:nvPr/>
-        </p:nvSpPr>
-        <p:spPr>
-          <a:xfrm>
-            <a:off x="1097280" y="4114800"/>
-            <a:ext cx="10058400" cy="548640"/>
-          </a:xfrm>
-          <a:prstGeom prst="rect">
-            <a:avLst/>
-          </a:prstGeom>
-          <a:noFill/>
-        </p:spPr>
-        <p:txBody>
-          <a:bodyPr wrap="square" lIns="0" rIns="0" tIns="0" bIns="0">
-            <a:spAutoFit/>
-          </a:bodyPr>
-          <a:lstStyle/>
-          <a:p>
-            <a:pPr algn="l"/>
-            <a:r>
-              <a:rPr sz="2000" b="0" i="1">
+          <p:cNvPr id="32" name="TextBox 31"/>
+          <p:cNvSpPr txBox="1"/>
+          <p:nvPr/>
+        </p:nvSpPr>
+        <p:spPr>
+          <a:xfrm>
+            <a:off x="6675120" y="5577840"/>
+            <a:ext cx="5029200" cy="320040"/>
+          </a:xfrm>
+          <a:prstGeom prst="rect">
+            <a:avLst/>
+          </a:prstGeom>
+          <a:noFill/>
+        </p:spPr>
+        <p:txBody>
+          <a:bodyPr wrap="square" lIns="0" rIns="0" tIns="0" bIns="0">
+            <a:spAutoFit/>
+          </a:bodyPr>
+          <a:lstStyle/>
+          <a:p>
+            <a:pPr algn="l"/>
+            <a:r>
+              <a:rPr sz="1200" b="1" i="0">
                 <a:solidFill>
                   <a:srgbClr val="0F172A"/>
                 </a:solidFill>
                 <a:latin typeface="Calibri"/>
               </a:rPr>
-              <a:t>Reasignar la producción entre artículos según su margen neto esperado</a:t>
-            </a:r>
-          </a:p>
-        </p:txBody>
-      </p:sp>
-      <p:sp>
-        <p:nvSpPr>
-          <p:cNvPr id="28" name="TextBox 27"/>
-          <p:cNvSpPr txBox="1"/>
-          <p:nvPr/>
-        </p:nvSpPr>
-        <p:spPr>
-          <a:xfrm>
-            <a:off x="1097280" y="4663440"/>
-            <a:ext cx="10058400" cy="548640"/>
-          </a:xfrm>
-          <a:prstGeom prst="rect">
-            <a:avLst/>
-          </a:prstGeom>
-          <a:noFill/>
-        </p:spPr>
-        <p:txBody>
-          <a:bodyPr wrap="square" lIns="0" rIns="0" tIns="0" bIns="0">
-            <a:spAutoFit/>
-          </a:bodyPr>
-          <a:lstStyle/>
-          <a:p>
-            <a:pPr algn="l"/>
-            <a:r>
-              <a:rPr sz="2000" b="0" i="1">
-                <a:solidFill>
-                  <a:srgbClr val="0F172A"/>
-                </a:solidFill>
-                <a:latin typeface="Calibri"/>
-              </a:rPr>
-              <a:t>—no según volumen— genera +175.535 € adicionales sin producir una sola unidad más.</a:t>
-            </a:r>
-          </a:p>
-        </p:txBody>
-      </p:sp>
-      <p:sp>
-        <p:nvSpPr>
-          <p:cNvPr id="29" name="TextBox 28"/>
-          <p:cNvSpPr txBox="1"/>
-          <p:nvPr/>
-        </p:nvSpPr>
-        <p:spPr>
-          <a:xfrm>
-            <a:off x="1097280" y="5349240"/>
-            <a:ext cx="10058400" cy="457200"/>
-          </a:xfrm>
-          <a:prstGeom prst="rect">
-            <a:avLst/>
-          </a:prstGeom>
-          <a:noFill/>
-        </p:spPr>
-        <p:txBody>
-          <a:bodyPr wrap="square" lIns="0" rIns="0" tIns="0" bIns="0">
-            <a:spAutoFit/>
-          </a:bodyPr>
-          <a:lstStyle/>
-          <a:p>
-            <a:pPr algn="l"/>
-            <a:r>
-              <a:rPr sz="1400" b="1" i="0">
-                <a:solidFill>
-                  <a:srgbClr val="059669"/>
-                </a:solidFill>
-                <a:latin typeface="Calibri"/>
-              </a:rPr>
-              <a:t>Mismo presupuesto. Mejor distribución. Resultado cuantificado.</a:t>
+              <a:t>Industria con problema real</a:t>
+            </a:r>
+          </a:p>
+        </p:txBody>
+      </p:sp>
+      <p:sp>
+        <p:nvSpPr>
+          <p:cNvPr id="33" name="TextBox 32"/>
+          <p:cNvSpPr txBox="1"/>
+          <p:nvPr/>
+        </p:nvSpPr>
+        <p:spPr>
+          <a:xfrm>
+            <a:off x="6675120" y="5897879"/>
+            <a:ext cx="5029200" cy="365760"/>
+          </a:xfrm>
+          <a:prstGeom prst="rect">
+            <a:avLst/>
+          </a:prstGeom>
+          <a:noFill/>
+        </p:spPr>
+        <p:txBody>
+          <a:bodyPr wrap="square" lIns="0" rIns="0" tIns="0" bIns="0">
+            <a:spAutoFit/>
+          </a:bodyPr>
+          <a:lstStyle/>
+          <a:p>
+            <a:pPr algn="l"/>
+            <a:r>
+              <a:rPr sz="1000" b="0" i="0">
+                <a:solidFill>
+                  <a:srgbClr val="1E293B"/>
+                </a:solidFill>
+                <a:latin typeface="Calibri"/>
+              </a:rPr>
+              <a:t>Moda destruye 30% de stock; el caso de uso es claro</a:t>
+            </a:r>
+          </a:p>
+        </p:txBody>
+      </p:sp>
+      <p:sp>
+        <p:nvSpPr>
+          <p:cNvPr id="34" name="TextBox 33"/>
+          <p:cNvSpPr txBox="1"/>
+          <p:nvPr/>
+        </p:nvSpPr>
+        <p:spPr>
+          <a:xfrm>
+            <a:off x="10972800" y="6446520"/>
+            <a:ext cx="914400" cy="274320"/>
+          </a:xfrm>
+          <a:prstGeom prst="rect">
+            <a:avLst/>
+          </a:prstGeom>
+          <a:noFill/>
+        </p:spPr>
+        <p:txBody>
+          <a:bodyPr wrap="square" lIns="0" rIns="0" tIns="0" bIns="0">
+            <a:spAutoFit/>
+          </a:bodyPr>
+          <a:lstStyle/>
+          <a:p>
+            <a:pPr algn="r"/>
+            <a:r>
+              <a:rPr sz="900" b="0" i="1">
+                <a:solidFill>
+                  <a:srgbClr val="64748B"/>
+                </a:solidFill>
+                <a:latin typeface="Calibri"/>
+              </a:rPr>
+              <a:t>04 / 08</a:t>
+            </a:r>
+          </a:p>
+        </p:txBody>
+      </p:sp>
+      <p:sp>
+        <p:nvSpPr>
+          <p:cNvPr id="35" name="TextBox 34"/>
+          <p:cNvSpPr txBox="1"/>
+          <p:nvPr/>
+        </p:nvSpPr>
+        <p:spPr>
+          <a:xfrm>
+            <a:off x="457200" y="6446520"/>
+            <a:ext cx="5486400" cy="274320"/>
+          </a:xfrm>
+          <a:prstGeom prst="rect">
+            <a:avLst/>
+          </a:prstGeom>
+          <a:noFill/>
+        </p:spPr>
+        <p:txBody>
+          <a:bodyPr wrap="square" lIns="0" rIns="0" tIns="0" bIns="0">
+            <a:spAutoFit/>
+          </a:bodyPr>
+          <a:lstStyle/>
+          <a:p>
+            <a:pPr algn="l"/>
+            <a:r>
+              <a:rPr sz="900" b="0" i="1">
+                <a:solidFill>
+                  <a:srgbClr val="10B981"/>
+                </a:solidFill>
+                <a:latin typeface="Consolas"/>
+                <a:hlinkClick r:id="rId2"/>
+              </a:rPr>
+              <a:t>fashion-ai-engine-app.streamlit.app</a:t>
             </a:r>
           </a:p>
         </p:txBody>
@@ -5909,7 +6724,7 @@
         </p:nvSpPr>
         <p:spPr>
           <a:xfrm>
-            <a:off x="731520" y="457200"/>
+            <a:off x="457200" y="457200"/>
             <a:ext cx="10972800" cy="274320"/>
           </a:xfrm>
           <a:prstGeom prst="rect">
@@ -5931,7 +6746,7 @@
                 </a:solidFill>
                 <a:latin typeface="Calibri"/>
               </a:rPr>
-              <a:t>SECCIÓN 4 · CASO DE USO</a:t>
+              <a:t>GENERALIZACIÓN</a:t>
             </a:r>
           </a:p>
         </p:txBody>
@@ -5944,29 +6759,29 @@
         </p:nvSpPr>
         <p:spPr>
           <a:xfrm>
-            <a:off x="731520" y="777240"/>
-            <a:ext cx="10972800" cy="731520"/>
-          </a:xfrm>
-          <a:prstGeom prst="rect">
-            <a:avLst/>
-          </a:prstGeom>
-          <a:noFill/>
-        </p:spPr>
-        <p:txBody>
-          <a:bodyPr wrap="square" lIns="0" rIns="0" tIns="0" bIns="0">
-            <a:spAutoFit/>
-          </a:bodyPr>
-          <a:lstStyle/>
-          <a:p>
-            <a:pPr algn="l"/>
-            <a:r>
-              <a:rPr sz="2800" b="1" i="0">
+            <a:off x="457200" y="777240"/>
+            <a:ext cx="10972800" cy="777240"/>
+          </a:xfrm>
+          <a:prstGeom prst="rect">
+            <a:avLst/>
+          </a:prstGeom>
+          <a:noFill/>
+        </p:spPr>
+        <p:txBody>
+          <a:bodyPr wrap="square" lIns="0" rIns="0" tIns="0" bIns="0">
+            <a:spAutoFit/>
+          </a:bodyPr>
+          <a:lstStyle/>
+          <a:p>
+            <a:pPr algn="l"/>
+            <a:r>
+              <a:rPr sz="3000" b="1" i="0">
                 <a:solidFill>
                   <a:srgbClr val="0F172A"/>
                 </a:solidFill>
                 <a:latin typeface="Calibri"/>
               </a:rPr>
-              <a:t>Un día en la vida de una buyer con la herramienta</a:t>
+              <a:t>Cómo se adapta el motor a otra marca</a:t>
             </a:r>
           </a:p>
         </p:txBody>
@@ -5979,8 +6794,8 @@
         </p:nvCxnSpPr>
         <p:spPr>
           <a:xfrm>
-            <a:off x="731520" y="1554480"/>
-            <a:ext cx="10698480" cy="0"/>
+            <a:off x="457200" y="1691640"/>
+            <a:ext cx="11274552" cy="0"/>
           </a:xfrm>
           <a:prstGeom prst="line">
             <a:avLst/>
@@ -6008,14 +6823,49 @@
       </p:cxnSp>
       <p:sp>
         <p:nvSpPr>
-          <p:cNvPr id="5" name="Rectangle 4"/>
+          <p:cNvPr id="5" name="TextBox 4"/>
+          <p:cNvSpPr txBox="1"/>
+          <p:nvPr/>
+        </p:nvSpPr>
+        <p:spPr>
+          <a:xfrm>
+            <a:off x="457200" y="1828800"/>
+            <a:ext cx="11430000" cy="365760"/>
+          </a:xfrm>
+          <a:prstGeom prst="rect">
+            <a:avLst/>
+          </a:prstGeom>
+          <a:noFill/>
+        </p:spPr>
+        <p:txBody>
+          <a:bodyPr wrap="square" lIns="0" rIns="0" tIns="0" bIns="0">
+            <a:spAutoFit/>
+          </a:bodyPr>
+          <a:lstStyle/>
+          <a:p>
+            <a:pPr algn="l"/>
+            <a:r>
+              <a:rPr sz="1300" b="0" i="1">
+                <a:solidFill>
+                  <a:srgbClr val="64748B"/>
+                </a:solidFill>
+                <a:latin typeface="Calibri"/>
+              </a:rPr>
+              <a:t>El sistema NO depende de H&amp;M: depende de la estructura de los datos. Cualquier marca puede usarlo.</a:t>
+            </a:r>
+          </a:p>
+        </p:txBody>
+      </p:sp>
+      <p:sp>
+        <p:nvSpPr>
+          <p:cNvPr id="6" name="Rectangle 5"/>
           <p:cNvSpPr/>
           <p:nvPr/>
         </p:nvSpPr>
         <p:spPr>
           <a:xfrm>
-            <a:off x="731520" y="1920240"/>
-            <a:ext cx="1371600" cy="640080"/>
+            <a:off x="457200" y="2331720"/>
+            <a:ext cx="640080" cy="640080"/>
           </a:xfrm>
           <a:prstGeom prst="rect">
             <a:avLst/>
@@ -6052,14 +6902,14 @@
       </p:sp>
       <p:sp>
         <p:nvSpPr>
-          <p:cNvPr id="6" name="TextBox 5"/>
-          <p:cNvSpPr txBox="1"/>
-          <p:nvPr/>
-        </p:nvSpPr>
-        <p:spPr>
-          <a:xfrm>
-            <a:off x="731520" y="2084832"/>
-            <a:ext cx="1371600" cy="457200"/>
+          <p:cNvPr id="7" name="TextBox 6"/>
+          <p:cNvSpPr txBox="1"/>
+          <p:nvPr/>
+        </p:nvSpPr>
+        <p:spPr>
+          <a:xfrm>
+            <a:off x="457200" y="2496312"/>
+            <a:ext cx="640080" cy="365760"/>
           </a:xfrm>
           <a:prstGeom prst="rect">
             <a:avLst/>
@@ -6074,27 +6924,27 @@
           <a:p>
             <a:pPr algn="ctr"/>
             <a:r>
-              <a:rPr sz="1100" b="1" i="0">
+              <a:rPr sz="1500" b="1" i="0">
                 <a:solidFill>
                   <a:srgbClr val="FFFFFF"/>
                 </a:solidFill>
                 <a:latin typeface="Calibri"/>
               </a:rPr>
-              <a:t>Lunes 9:00</a:t>
-            </a:r>
-          </a:p>
-        </p:txBody>
-      </p:sp>
-      <p:sp>
-        <p:nvSpPr>
-          <p:cNvPr id="7" name="TextBox 6"/>
-          <p:cNvSpPr txBox="1"/>
-          <p:nvPr/>
-        </p:nvSpPr>
-        <p:spPr>
-          <a:xfrm>
-            <a:off x="2286000" y="1965960"/>
-            <a:ext cx="5943600" cy="365760"/>
+              <a:t>01</a:t>
+            </a:r>
+          </a:p>
+        </p:txBody>
+      </p:sp>
+      <p:sp>
+        <p:nvSpPr>
+          <p:cNvPr id="8" name="TextBox 7"/>
+          <p:cNvSpPr txBox="1"/>
+          <p:nvPr/>
+        </p:nvSpPr>
+        <p:spPr>
+          <a:xfrm>
+            <a:off x="1371600" y="2331720"/>
+            <a:ext cx="5029200" cy="320040"/>
           </a:xfrm>
           <a:prstGeom prst="rect">
             <a:avLst/>
@@ -6115,56 +6965,91 @@
                 </a:solidFill>
                 <a:latin typeface="Calibri"/>
               </a:rPr>
-              <a:t>Recibe el plan de producción de la temporada</a:t>
-            </a:r>
-          </a:p>
-        </p:txBody>
-      </p:sp>
-      <p:sp>
-        <p:nvSpPr>
-          <p:cNvPr id="8" name="TextBox 7"/>
-          <p:cNvSpPr txBox="1"/>
-          <p:nvPr/>
-        </p:nvSpPr>
-        <p:spPr>
-          <a:xfrm>
-            <a:off x="2286000" y="2286000"/>
-            <a:ext cx="8229600" cy="274320"/>
-          </a:xfrm>
-          <a:prstGeom prst="rect">
-            <a:avLst/>
-          </a:prstGeom>
-          <a:noFill/>
-        </p:spPr>
-        <p:txBody>
-          <a:bodyPr wrap="square" lIns="0" rIns="0" tIns="0" bIns="0">
-            <a:spAutoFit/>
-          </a:bodyPr>
-          <a:lstStyle/>
-          <a:p>
-            <a:pPr algn="l"/>
-            <a:r>
-              <a:rPr sz="1100" b="0" i="1">
-                <a:solidFill>
-                  <a:srgbClr val="64748B"/>
-                </a:solidFill>
-                <a:latin typeface="Calibri"/>
-              </a:rPr>
-              <a:t>Abre el Decision Simulator</a:t>
-            </a:r>
-          </a:p>
-        </p:txBody>
-      </p:sp>
-      <p:sp>
-        <p:nvSpPr>
-          <p:cNvPr id="9" name="Rectangle 8"/>
+              <a:t>Subir transacciones</a:t>
+            </a:r>
+          </a:p>
+        </p:txBody>
+      </p:sp>
+      <p:sp>
+        <p:nvSpPr>
+          <p:cNvPr id="9" name="TextBox 8"/>
+          <p:cNvSpPr txBox="1"/>
+          <p:nvPr/>
+        </p:nvSpPr>
+        <p:spPr>
+          <a:xfrm>
+            <a:off x="1371600" y="2651760"/>
+            <a:ext cx="6400800" cy="320040"/>
+          </a:xfrm>
+          <a:prstGeom prst="rect">
+            <a:avLst/>
+          </a:prstGeom>
+          <a:noFill/>
+        </p:spPr>
+        <p:txBody>
+          <a:bodyPr wrap="square" lIns="0" rIns="0" tIns="0" bIns="0">
+            <a:spAutoFit/>
+          </a:bodyPr>
+          <a:lstStyle/>
+          <a:p>
+            <a:pPr algn="l"/>
+            <a:r>
+              <a:rPr sz="1050" b="0" i="0">
+                <a:solidFill>
+                  <a:srgbClr val="1E293B"/>
+                </a:solidFill>
+                <a:latin typeface="Calibri"/>
+              </a:rPr>
+              <a:t>CSV con columnas: fecha, article_id, customer_id, price, quantity</a:t>
+            </a:r>
+          </a:p>
+        </p:txBody>
+      </p:sp>
+      <p:sp>
+        <p:nvSpPr>
+          <p:cNvPr id="10" name="TextBox 9"/>
+          <p:cNvSpPr txBox="1"/>
+          <p:nvPr/>
+        </p:nvSpPr>
+        <p:spPr>
+          <a:xfrm>
+            <a:off x="8229600" y="2496312"/>
+            <a:ext cx="3657600" cy="365760"/>
+          </a:xfrm>
+          <a:prstGeom prst="rect">
+            <a:avLst/>
+          </a:prstGeom>
+          <a:noFill/>
+        </p:spPr>
+        <p:txBody>
+          <a:bodyPr wrap="square" lIns="0" rIns="0" tIns="0" bIns="0">
+            <a:spAutoFit/>
+          </a:bodyPr>
+          <a:lstStyle/>
+          <a:p>
+            <a:pPr algn="l"/>
+            <a:r>
+              <a:rPr sz="1000" b="0" i="0">
+                <a:solidFill>
+                  <a:srgbClr val="059669"/>
+                </a:solidFill>
+                <a:latin typeface="Consolas"/>
+              </a:rPr>
+              <a:t>data/raw/transactions.csv</a:t>
+            </a:r>
+          </a:p>
+        </p:txBody>
+      </p:sp>
+      <p:sp>
+        <p:nvSpPr>
+          <p:cNvPr id="11" name="Rectangle 10"/>
           <p:cNvSpPr/>
           <p:nvPr/>
         </p:nvSpPr>
         <p:spPr>
           <a:xfrm>
-            <a:off x="731520" y="2788920"/>
-            <a:ext cx="1371600" cy="640080"/>
+            <a:off x="457200" y="3108960"/>
+            <a:ext cx="640080" cy="640080"/>
           </a:xfrm>
           <a:prstGeom prst="rect">
             <a:avLst/>
@@ -6201,14 +7086,14 @@
       </p:sp>
       <p:sp>
         <p:nvSpPr>
-          <p:cNvPr id="10" name="TextBox 9"/>
-          <p:cNvSpPr txBox="1"/>
-          <p:nvPr/>
-        </p:nvSpPr>
-        <p:spPr>
-          <a:xfrm>
-            <a:off x="731520" y="2953512"/>
-            <a:ext cx="1371600" cy="457200"/>
+          <p:cNvPr id="12" name="TextBox 11"/>
+          <p:cNvSpPr txBox="1"/>
+          <p:nvPr/>
+        </p:nvSpPr>
+        <p:spPr>
+          <a:xfrm>
+            <a:off x="457200" y="3273552"/>
+            <a:ext cx="640080" cy="365760"/>
           </a:xfrm>
           <a:prstGeom prst="rect">
             <a:avLst/>
@@ -6223,27 +7108,27 @@
           <a:p>
             <a:pPr algn="ctr"/>
             <a:r>
-              <a:rPr sz="1100" b="1" i="0">
+              <a:rPr sz="1500" b="1" i="0">
                 <a:solidFill>
                   <a:srgbClr val="FFFFFF"/>
                 </a:solidFill>
                 <a:latin typeface="Calibri"/>
               </a:rPr>
-              <a:t>Lunes 9:15</a:t>
-            </a:r>
-          </a:p>
-        </p:txBody>
-      </p:sp>
-      <p:sp>
-        <p:nvSpPr>
-          <p:cNvPr id="11" name="TextBox 10"/>
-          <p:cNvSpPr txBox="1"/>
-          <p:nvPr/>
-        </p:nvSpPr>
-        <p:spPr>
-          <a:xfrm>
-            <a:off x="2286000" y="2834639"/>
-            <a:ext cx="5943600" cy="365760"/>
+              <a:t>02</a:t>
+            </a:r>
+          </a:p>
+        </p:txBody>
+      </p:sp>
+      <p:sp>
+        <p:nvSpPr>
+          <p:cNvPr id="13" name="TextBox 12"/>
+          <p:cNvSpPr txBox="1"/>
+          <p:nvPr/>
+        </p:nvSpPr>
+        <p:spPr>
+          <a:xfrm>
+            <a:off x="1371600" y="3108960"/>
+            <a:ext cx="5029200" cy="320040"/>
           </a:xfrm>
           <a:prstGeom prst="rect">
             <a:avLst/>
@@ -6264,56 +7149,91 @@
                 </a:solidFill>
                 <a:latin typeface="Calibri"/>
               </a:rPr>
-              <a:t>Ajusta supuestos económicos a la realidad de su categoría</a:t>
-            </a:r>
-          </a:p>
-        </p:txBody>
-      </p:sp>
-      <p:sp>
-        <p:nvSpPr>
-          <p:cNvPr id="12" name="TextBox 11"/>
-          <p:cNvSpPr txBox="1"/>
-          <p:nvPr/>
-        </p:nvSpPr>
-        <p:spPr>
-          <a:xfrm>
-            <a:off x="2286000" y="3154679"/>
-            <a:ext cx="8229600" cy="274320"/>
-          </a:xfrm>
-          <a:prstGeom prst="rect">
-            <a:avLst/>
-          </a:prstGeom>
-          <a:noFill/>
-        </p:spPr>
-        <p:txBody>
-          <a:bodyPr wrap="square" lIns="0" rIns="0" tIns="0" bIns="0">
-            <a:spAutoFit/>
-          </a:bodyPr>
-          <a:lstStyle/>
-          <a:p>
-            <a:pPr algn="l"/>
-            <a:r>
-              <a:rPr sz="1100" b="0" i="1">
-                <a:solidFill>
-                  <a:srgbClr val="64748B"/>
-                </a:solidFill>
-                <a:latin typeface="Calibri"/>
-              </a:rPr>
-              <a:t>Slider: margen 53% → 58%, return cost 18€</a:t>
-            </a:r>
-          </a:p>
-        </p:txBody>
-      </p:sp>
-      <p:sp>
-        <p:nvSpPr>
-          <p:cNvPr id="13" name="Rectangle 12"/>
+              <a:t>Subir catálogo</a:t>
+            </a:r>
+          </a:p>
+        </p:txBody>
+      </p:sp>
+      <p:sp>
+        <p:nvSpPr>
+          <p:cNvPr id="14" name="TextBox 13"/>
+          <p:cNvSpPr txBox="1"/>
+          <p:nvPr/>
+        </p:nvSpPr>
+        <p:spPr>
+          <a:xfrm>
+            <a:off x="1371600" y="3429000"/>
+            <a:ext cx="6400800" cy="320040"/>
+          </a:xfrm>
+          <a:prstGeom prst="rect">
+            <a:avLst/>
+          </a:prstGeom>
+          <a:noFill/>
+        </p:spPr>
+        <p:txBody>
+          <a:bodyPr wrap="square" lIns="0" rIns="0" tIns="0" bIns="0">
+            <a:spAutoFit/>
+          </a:bodyPr>
+          <a:lstStyle/>
+          <a:p>
+            <a:pPr algn="l"/>
+            <a:r>
+              <a:rPr sz="1050" b="0" i="0">
+                <a:solidFill>
+                  <a:srgbClr val="1E293B"/>
+                </a:solidFill>
+                <a:latin typeface="Calibri"/>
+              </a:rPr>
+              <a:t>CSV con atributos del producto: tipo, color, departamento, etc.</a:t>
+            </a:r>
+          </a:p>
+        </p:txBody>
+      </p:sp>
+      <p:sp>
+        <p:nvSpPr>
+          <p:cNvPr id="15" name="TextBox 14"/>
+          <p:cNvSpPr txBox="1"/>
+          <p:nvPr/>
+        </p:nvSpPr>
+        <p:spPr>
+          <a:xfrm>
+            <a:off x="8229600" y="3273552"/>
+            <a:ext cx="3657600" cy="365760"/>
+          </a:xfrm>
+          <a:prstGeom prst="rect">
+            <a:avLst/>
+          </a:prstGeom>
+          <a:noFill/>
+        </p:spPr>
+        <p:txBody>
+          <a:bodyPr wrap="square" lIns="0" rIns="0" tIns="0" bIns="0">
+            <a:spAutoFit/>
+          </a:bodyPr>
+          <a:lstStyle/>
+          <a:p>
+            <a:pPr algn="l"/>
+            <a:r>
+              <a:rPr sz="1000" b="0" i="0">
+                <a:solidFill>
+                  <a:srgbClr val="059669"/>
+                </a:solidFill>
+                <a:latin typeface="Consolas"/>
+              </a:rPr>
+              <a:t>data/raw/articles.csv</a:t>
+            </a:r>
+          </a:p>
+        </p:txBody>
+      </p:sp>
+      <p:sp>
+        <p:nvSpPr>
+          <p:cNvPr id="16" name="Rectangle 15"/>
           <p:cNvSpPr/>
           <p:nvPr/>
         </p:nvSpPr>
         <p:spPr>
           <a:xfrm>
-            <a:off x="731520" y="3657600"/>
-            <a:ext cx="1371600" cy="640080"/>
+            <a:off x="457200" y="3886200"/>
+            <a:ext cx="640080" cy="640080"/>
           </a:xfrm>
           <a:prstGeom prst="rect">
             <a:avLst/>
@@ -6350,14 +7270,14 @@
       </p:sp>
       <p:sp>
         <p:nvSpPr>
-          <p:cNvPr id="14" name="TextBox 13"/>
-          <p:cNvSpPr txBox="1"/>
-          <p:nvPr/>
-        </p:nvSpPr>
-        <p:spPr>
-          <a:xfrm>
-            <a:off x="731520" y="3822191"/>
-            <a:ext cx="1371600" cy="457200"/>
+          <p:cNvPr id="17" name="TextBox 16"/>
+          <p:cNvSpPr txBox="1"/>
+          <p:nvPr/>
+        </p:nvSpPr>
+        <p:spPr>
+          <a:xfrm>
+            <a:off x="457200" y="4050791"/>
+            <a:ext cx="640080" cy="365760"/>
           </a:xfrm>
           <a:prstGeom prst="rect">
             <a:avLst/>
@@ -6372,27 +7292,27 @@
           <a:p>
             <a:pPr algn="ctr"/>
             <a:r>
-              <a:rPr sz="1100" b="1" i="0">
+              <a:rPr sz="1500" b="1" i="0">
                 <a:solidFill>
                   <a:srgbClr val="FFFFFF"/>
                 </a:solidFill>
                 <a:latin typeface="Calibri"/>
               </a:rPr>
-              <a:t>Lunes 9:30</a:t>
-            </a:r>
-          </a:p>
-        </p:txBody>
-      </p:sp>
-      <p:sp>
-        <p:nvSpPr>
-          <p:cNvPr id="15" name="TextBox 14"/>
-          <p:cNvSpPr txBox="1"/>
-          <p:nvPr/>
-        </p:nvSpPr>
-        <p:spPr>
-          <a:xfrm>
-            <a:off x="2286000" y="3703320"/>
-            <a:ext cx="5943600" cy="365760"/>
+              <a:t>03</a:t>
+            </a:r>
+          </a:p>
+        </p:txBody>
+      </p:sp>
+      <p:sp>
+        <p:nvSpPr>
+          <p:cNvPr id="18" name="TextBox 17"/>
+          <p:cNvSpPr txBox="1"/>
+          <p:nvPr/>
+        </p:nvSpPr>
+        <p:spPr>
+          <a:xfrm>
+            <a:off x="1371600" y="3886200"/>
+            <a:ext cx="5029200" cy="320040"/>
           </a:xfrm>
           <a:prstGeom prst="rect">
             <a:avLst/>
@@ -6413,56 +7333,91 @@
                 </a:solidFill>
                 <a:latin typeface="Calibri"/>
               </a:rPr>
-              <a:t>Identifica los 50 productos de mayor riesgo de devolución</a:t>
-            </a:r>
-          </a:p>
-        </p:txBody>
-      </p:sp>
-      <p:sp>
-        <p:nvSpPr>
-          <p:cNvPr id="16" name="TextBox 15"/>
-          <p:cNvSpPr txBox="1"/>
-          <p:nvPr/>
-        </p:nvSpPr>
-        <p:spPr>
-          <a:xfrm>
-            <a:off x="2286000" y="4023360"/>
-            <a:ext cx="8229600" cy="274320"/>
-          </a:xfrm>
-          <a:prstGeom prst="rect">
-            <a:avLst/>
-          </a:prstGeom>
-          <a:noFill/>
-        </p:spPr>
-        <p:txBody>
-          <a:bodyPr wrap="square" lIns="0" rIns="0" tIns="0" bIns="0">
-            <a:spAutoFit/>
-          </a:bodyPr>
-          <a:lstStyle/>
-          <a:p>
-            <a:pPr algn="l"/>
-            <a:r>
-              <a:rPr sz="1100" b="0" i="1">
-                <a:solidFill>
-                  <a:srgbClr val="64748B"/>
-                </a:solidFill>
-                <a:latin typeface="Calibri"/>
-              </a:rPr>
-              <a:t>Descarga CSV desde Returns Risk</a:t>
-            </a:r>
-          </a:p>
-        </p:txBody>
-      </p:sp>
-      <p:sp>
-        <p:nvSpPr>
-          <p:cNvPr id="17" name="Rectangle 16"/>
+              <a:t>Definir supuestos económicos</a:t>
+            </a:r>
+          </a:p>
+        </p:txBody>
+      </p:sp>
+      <p:sp>
+        <p:nvSpPr>
+          <p:cNvPr id="19" name="TextBox 18"/>
+          <p:cNvSpPr txBox="1"/>
+          <p:nvPr/>
+        </p:nvSpPr>
+        <p:spPr>
+          <a:xfrm>
+            <a:off x="1371600" y="4206240"/>
+            <a:ext cx="6400800" cy="320040"/>
+          </a:xfrm>
+          <a:prstGeom prst="rect">
+            <a:avLst/>
+          </a:prstGeom>
+          <a:noFill/>
+        </p:spPr>
+        <p:txBody>
+          <a:bodyPr wrap="square" lIns="0" rIns="0" tIns="0" bIns="0">
+            <a:spAutoFit/>
+          </a:bodyPr>
+          <a:lstStyle/>
+          <a:p>
+            <a:pPr algn="l"/>
+            <a:r>
+              <a:rPr sz="1050" b="0" i="0">
+                <a:solidFill>
+                  <a:srgbClr val="1E293B"/>
+                </a:solidFill>
+                <a:latin typeface="Calibri"/>
+              </a:rPr>
+              <a:t>Margen bruto, coste devolución, markdown depth, tasa destrucción</a:t>
+            </a:r>
+          </a:p>
+        </p:txBody>
+      </p:sp>
+      <p:sp>
+        <p:nvSpPr>
+          <p:cNvPr id="20" name="TextBox 19"/>
+          <p:cNvSpPr txBox="1"/>
+          <p:nvPr/>
+        </p:nvSpPr>
+        <p:spPr>
+          <a:xfrm>
+            <a:off x="8229600" y="4050791"/>
+            <a:ext cx="3657600" cy="365760"/>
+          </a:xfrm>
+          <a:prstGeom prst="rect">
+            <a:avLst/>
+          </a:prstGeom>
+          <a:noFill/>
+        </p:spPr>
+        <p:txBody>
+          <a:bodyPr wrap="square" lIns="0" rIns="0" tIns="0" bIns="0">
+            <a:spAutoFit/>
+          </a:bodyPr>
+          <a:lstStyle/>
+          <a:p>
+            <a:pPr algn="l"/>
+            <a:r>
+              <a:rPr sz="1000" b="0" i="0">
+                <a:solidFill>
+                  <a:srgbClr val="059669"/>
+                </a:solidFill>
+                <a:latin typeface="Consolas"/>
+              </a:rPr>
+              <a:t>configs/default.yaml</a:t>
+            </a:r>
+          </a:p>
+        </p:txBody>
+      </p:sp>
+      <p:sp>
+        <p:nvSpPr>
+          <p:cNvPr id="21" name="Rectangle 20"/>
           <p:cNvSpPr/>
           <p:nvPr/>
         </p:nvSpPr>
         <p:spPr>
           <a:xfrm>
-            <a:off x="731520" y="4526279"/>
-            <a:ext cx="1371600" cy="640080"/>
+            <a:off x="457200" y="4663440"/>
+            <a:ext cx="640080" cy="640080"/>
           </a:xfrm>
           <a:prstGeom prst="rect">
             <a:avLst/>
@@ -6499,14 +7454,14 @@
       </p:sp>
       <p:sp>
         <p:nvSpPr>
-          <p:cNvPr id="18" name="TextBox 17"/>
-          <p:cNvSpPr txBox="1"/>
-          <p:nvPr/>
-        </p:nvSpPr>
-        <p:spPr>
-          <a:xfrm>
-            <a:off x="731520" y="4690871"/>
-            <a:ext cx="1371600" cy="457200"/>
+          <p:cNvPr id="22" name="TextBox 21"/>
+          <p:cNvSpPr txBox="1"/>
+          <p:nvPr/>
+        </p:nvSpPr>
+        <p:spPr>
+          <a:xfrm>
+            <a:off x="457200" y="4828031"/>
+            <a:ext cx="640080" cy="365760"/>
           </a:xfrm>
           <a:prstGeom prst="rect">
             <a:avLst/>
@@ -6521,27 +7476,27 @@
           <a:p>
             <a:pPr algn="ctr"/>
             <a:r>
-              <a:rPr sz="1100" b="1" i="0">
+              <a:rPr sz="1500" b="1" i="0">
                 <a:solidFill>
                   <a:srgbClr val="FFFFFF"/>
                 </a:solidFill>
                 <a:latin typeface="Calibri"/>
               </a:rPr>
-              <a:t>Lunes 10:00</a:t>
-            </a:r>
-          </a:p>
-        </p:txBody>
-      </p:sp>
-      <p:sp>
-        <p:nvSpPr>
-          <p:cNvPr id="19" name="TextBox 18"/>
-          <p:cNvSpPr txBox="1"/>
-          <p:nvPr/>
-        </p:nvSpPr>
-        <p:spPr>
-          <a:xfrm>
-            <a:off x="2286000" y="4571999"/>
-            <a:ext cx="5943600" cy="365760"/>
+              <a:t>04</a:t>
+            </a:r>
+          </a:p>
+        </p:txBody>
+      </p:sp>
+      <p:sp>
+        <p:nvSpPr>
+          <p:cNvPr id="23" name="TextBox 22"/>
+          <p:cNvSpPr txBox="1"/>
+          <p:nvPr/>
+        </p:nvSpPr>
+        <p:spPr>
+          <a:xfrm>
+            <a:off x="1371600" y="4663440"/>
+            <a:ext cx="5029200" cy="320040"/>
           </a:xfrm>
           <a:prstGeom prst="rect">
             <a:avLst/>
@@ -6562,56 +7517,91 @@
                 </a:solidFill>
                 <a:latin typeface="Calibri"/>
               </a:rPr>
-              <a:t>Reasigna producción de productos riesgo a productos seguros</a:t>
-            </a:r>
-          </a:p>
-        </p:txBody>
-      </p:sp>
-      <p:sp>
-        <p:nvSpPr>
-          <p:cNvPr id="20" name="TextBox 19"/>
-          <p:cNvSpPr txBox="1"/>
-          <p:nvPr/>
-        </p:nvSpPr>
-        <p:spPr>
-          <a:xfrm>
-            <a:off x="2286000" y="4892040"/>
-            <a:ext cx="8229600" cy="274320"/>
-          </a:xfrm>
-          <a:prstGeom prst="rect">
-            <a:avLst/>
-          </a:prstGeom>
-          <a:noFill/>
-        </p:spPr>
-        <p:txBody>
-          <a:bodyPr wrap="square" lIns="0" rIns="0" tIns="0" bIns="0">
-            <a:spAutoFit/>
-          </a:bodyPr>
-          <a:lstStyle/>
-          <a:p>
-            <a:pPr algn="l"/>
-            <a:r>
-              <a:rPr sz="1100" b="0" i="1">
-                <a:solidFill>
-                  <a:srgbClr val="64748B"/>
-                </a:solidFill>
-                <a:latin typeface="Calibri"/>
-              </a:rPr>
-              <a:t>El simulador recalcula el P&amp;L en vivo</a:t>
-            </a:r>
-          </a:p>
-        </p:txBody>
-      </p:sp>
-      <p:sp>
-        <p:nvSpPr>
-          <p:cNvPr id="21" name="Rectangle 20"/>
+              <a:t>Ejecutar el pipeline</a:t>
+            </a:r>
+          </a:p>
+        </p:txBody>
+      </p:sp>
+      <p:sp>
+        <p:nvSpPr>
+          <p:cNvPr id="24" name="TextBox 23"/>
+          <p:cNvSpPr txBox="1"/>
+          <p:nvPr/>
+        </p:nvSpPr>
+        <p:spPr>
+          <a:xfrm>
+            <a:off x="1371600" y="4983479"/>
+            <a:ext cx="6400800" cy="320040"/>
+          </a:xfrm>
+          <a:prstGeom prst="rect">
+            <a:avLst/>
+          </a:prstGeom>
+          <a:noFill/>
+        </p:spPr>
+        <p:txBody>
+          <a:bodyPr wrap="square" lIns="0" rIns="0" tIns="0" bIns="0">
+            <a:spAutoFit/>
+          </a:bodyPr>
+          <a:lstStyle/>
+          <a:p>
+            <a:pPr algn="l"/>
+            <a:r>
+              <a:rPr sz="1050" b="0" i="0">
+                <a:solidFill>
+                  <a:srgbClr val="1E293B"/>
+                </a:solidFill>
+                <a:latin typeface="Calibri"/>
+              </a:rPr>
+              <a:t>Un script reentrena los modelos sobre los datos de la nueva marca</a:t>
+            </a:r>
+          </a:p>
+        </p:txBody>
+      </p:sp>
+      <p:sp>
+        <p:nvSpPr>
+          <p:cNvPr id="25" name="TextBox 24"/>
+          <p:cNvSpPr txBox="1"/>
+          <p:nvPr/>
+        </p:nvSpPr>
+        <p:spPr>
+          <a:xfrm>
+            <a:off x="8229600" y="4828031"/>
+            <a:ext cx="3657600" cy="365760"/>
+          </a:xfrm>
+          <a:prstGeom prst="rect">
+            <a:avLst/>
+          </a:prstGeom>
+          <a:noFill/>
+        </p:spPr>
+        <p:txBody>
+          <a:bodyPr wrap="square" lIns="0" rIns="0" tIns="0" bIns="0">
+            <a:spAutoFit/>
+          </a:bodyPr>
+          <a:lstStyle/>
+          <a:p>
+            <a:pPr algn="l"/>
+            <a:r>
+              <a:rPr sz="1000" b="0" i="0">
+                <a:solidFill>
+                  <a:srgbClr val="059669"/>
+                </a:solidFill>
+                <a:latin typeface="Consolas"/>
+              </a:rPr>
+              <a:t>python -m src.training</a:t>
+            </a:r>
+          </a:p>
+        </p:txBody>
+      </p:sp>
+      <p:sp>
+        <p:nvSpPr>
+          <p:cNvPr id="26" name="Rectangle 25"/>
           <p:cNvSpPr/>
           <p:nvPr/>
         </p:nvSpPr>
         <p:spPr>
           <a:xfrm>
-            <a:off x="731520" y="5394960"/>
-            <a:ext cx="1371600" cy="640080"/>
+            <a:off x="457200" y="5440679"/>
+            <a:ext cx="640080" cy="640080"/>
           </a:xfrm>
           <a:prstGeom prst="rect">
             <a:avLst/>
@@ -6648,14 +7638,14 @@
       </p:sp>
       <p:sp>
         <p:nvSpPr>
-          <p:cNvPr id="22" name="TextBox 21"/>
-          <p:cNvSpPr txBox="1"/>
-          <p:nvPr/>
-        </p:nvSpPr>
-        <p:spPr>
-          <a:xfrm>
-            <a:off x="731520" y="5559552"/>
-            <a:ext cx="1371600" cy="457200"/>
+          <p:cNvPr id="27" name="TextBox 26"/>
+          <p:cNvSpPr txBox="1"/>
+          <p:nvPr/>
+        </p:nvSpPr>
+        <p:spPr>
+          <a:xfrm>
+            <a:off x="457200" y="5605271"/>
+            <a:ext cx="640080" cy="365760"/>
           </a:xfrm>
           <a:prstGeom prst="rect">
             <a:avLst/>
@@ -6670,27 +7660,27 @@
           <a:p>
             <a:pPr algn="ctr"/>
             <a:r>
-              <a:rPr sz="1100" b="1" i="0">
+              <a:rPr sz="1500" b="1" i="0">
                 <a:solidFill>
                   <a:srgbClr val="FFFFFF"/>
                 </a:solidFill>
                 <a:latin typeface="Calibri"/>
               </a:rPr>
-              <a:t>Lunes 11:00</a:t>
-            </a:r>
-          </a:p>
-        </p:txBody>
-      </p:sp>
-      <p:sp>
-        <p:nvSpPr>
-          <p:cNvPr id="23" name="TextBox 22"/>
-          <p:cNvSpPr txBox="1"/>
-          <p:nvPr/>
-        </p:nvSpPr>
-        <p:spPr>
-          <a:xfrm>
-            <a:off x="2286000" y="5440680"/>
-            <a:ext cx="5943600" cy="365760"/>
+              <a:t>05</a:t>
+            </a:r>
+          </a:p>
+        </p:txBody>
+      </p:sp>
+      <p:sp>
+        <p:nvSpPr>
+          <p:cNvPr id="28" name="TextBox 27"/>
+          <p:cNvSpPr txBox="1"/>
+          <p:nvPr/>
+        </p:nvSpPr>
+        <p:spPr>
+          <a:xfrm>
+            <a:off x="1371600" y="5440679"/>
+            <a:ext cx="5029200" cy="320040"/>
           </a:xfrm>
           <a:prstGeom prst="rect">
             <a:avLst/>
@@ -6711,42 +7701,148 @@
                 </a:solidFill>
                 <a:latin typeface="Calibri"/>
               </a:rPr>
-              <a:t>Presenta el plan revisado a su director con +175K € documentados</a:t>
-            </a:r>
-          </a:p>
-        </p:txBody>
-      </p:sp>
-      <p:sp>
-        <p:nvSpPr>
-          <p:cNvPr id="24" name="TextBox 23"/>
-          <p:cNvSpPr txBox="1"/>
-          <p:nvPr/>
-        </p:nvSpPr>
-        <p:spPr>
-          <a:xfrm>
-            <a:off x="2286000" y="5760720"/>
-            <a:ext cx="8229600" cy="274320"/>
-          </a:xfrm>
-          <a:prstGeom prst="rect">
-            <a:avLst/>
-          </a:prstGeom>
-          <a:noFill/>
-        </p:spPr>
-        <p:txBody>
-          <a:bodyPr wrap="square" lIns="0" rIns="0" tIns="0" bIns="0">
-            <a:spAutoFit/>
-          </a:bodyPr>
-          <a:lstStyle/>
-          <a:p>
-            <a:pPr algn="l"/>
-            <a:r>
-              <a:rPr sz="1100" b="0" i="1">
+              <a:t>Lanzar la app</a:t>
+            </a:r>
+          </a:p>
+        </p:txBody>
+      </p:sp>
+      <p:sp>
+        <p:nvSpPr>
+          <p:cNvPr id="29" name="TextBox 28"/>
+          <p:cNvSpPr txBox="1"/>
+          <p:nvPr/>
+        </p:nvSpPr>
+        <p:spPr>
+          <a:xfrm>
+            <a:off x="1371600" y="5760719"/>
+            <a:ext cx="6400800" cy="320040"/>
+          </a:xfrm>
+          <a:prstGeom prst="rect">
+            <a:avLst/>
+          </a:prstGeom>
+          <a:noFill/>
+        </p:spPr>
+        <p:txBody>
+          <a:bodyPr wrap="square" lIns="0" rIns="0" tIns="0" bIns="0">
+            <a:spAutoFit/>
+          </a:bodyPr>
+          <a:lstStyle/>
+          <a:p>
+            <a:pPr algn="l"/>
+            <a:r>
+              <a:rPr sz="1050" b="0" i="0">
+                <a:solidFill>
+                  <a:srgbClr val="1E293B"/>
+                </a:solidFill>
+                <a:latin typeface="Calibri"/>
+              </a:rPr>
+              <a:t>Misma app Streamlit; ahora muestra KPIs de la nueva marca</a:t>
+            </a:r>
+          </a:p>
+        </p:txBody>
+      </p:sp>
+      <p:sp>
+        <p:nvSpPr>
+          <p:cNvPr id="30" name="TextBox 29"/>
+          <p:cNvSpPr txBox="1"/>
+          <p:nvPr/>
+        </p:nvSpPr>
+        <p:spPr>
+          <a:xfrm>
+            <a:off x="8229600" y="5605271"/>
+            <a:ext cx="3657600" cy="365760"/>
+          </a:xfrm>
+          <a:prstGeom prst="rect">
+            <a:avLst/>
+          </a:prstGeom>
+          <a:noFill/>
+        </p:spPr>
+        <p:txBody>
+          <a:bodyPr wrap="square" lIns="0" rIns="0" tIns="0" bIns="0">
+            <a:spAutoFit/>
+          </a:bodyPr>
+          <a:lstStyle/>
+          <a:p>
+            <a:pPr algn="l"/>
+            <a:r>
+              <a:rPr sz="1000" b="0" i="0">
+                <a:solidFill>
+                  <a:srgbClr val="059669"/>
+                </a:solidFill>
+                <a:latin typeface="Consolas"/>
+              </a:rPr>
+              <a:t>streamlit run app_streamlit/streamlit_app.py</a:t>
+            </a:r>
+          </a:p>
+        </p:txBody>
+      </p:sp>
+      <p:sp>
+        <p:nvSpPr>
+          <p:cNvPr id="31" name="TextBox 30"/>
+          <p:cNvSpPr txBox="1"/>
+          <p:nvPr/>
+        </p:nvSpPr>
+        <p:spPr>
+          <a:xfrm>
+            <a:off x="10972800" y="6446520"/>
+            <a:ext cx="914400" cy="274320"/>
+          </a:xfrm>
+          <a:prstGeom prst="rect">
+            <a:avLst/>
+          </a:prstGeom>
+          <a:noFill/>
+        </p:spPr>
+        <p:txBody>
+          <a:bodyPr wrap="square" lIns="0" rIns="0" tIns="0" bIns="0">
+            <a:spAutoFit/>
+          </a:bodyPr>
+          <a:lstStyle/>
+          <a:p>
+            <a:pPr algn="r"/>
+            <a:r>
+              <a:rPr sz="900" b="0" i="1">
                 <a:solidFill>
                   <a:srgbClr val="64748B"/>
                 </a:solidFill>
                 <a:latin typeface="Calibri"/>
               </a:rPr>
-              <a:t>Decisión basada en datos, no en intuición</a:t>
+              <a:t>05 / 08</a:t>
+            </a:r>
+          </a:p>
+        </p:txBody>
+      </p:sp>
+      <p:sp>
+        <p:nvSpPr>
+          <p:cNvPr id="32" name="TextBox 31"/>
+          <p:cNvSpPr txBox="1"/>
+          <p:nvPr/>
+        </p:nvSpPr>
+        <p:spPr>
+          <a:xfrm>
+            <a:off x="457200" y="6446520"/>
+            <a:ext cx="5486400" cy="274320"/>
+          </a:xfrm>
+          <a:prstGeom prst="rect">
+            <a:avLst/>
+          </a:prstGeom>
+          <a:noFill/>
+        </p:spPr>
+        <p:txBody>
+          <a:bodyPr wrap="square" lIns="0" rIns="0" tIns="0" bIns="0">
+            <a:spAutoFit/>
+          </a:bodyPr>
+          <a:lstStyle/>
+          <a:p>
+            <a:pPr algn="l"/>
+            <a:r>
+              <a:rPr sz="900" b="0" i="1">
+                <a:solidFill>
+                  <a:srgbClr val="10B981"/>
+                </a:solidFill>
+                <a:latin typeface="Consolas"/>
+                <a:hlinkClick r:id="rId2"/>
+              </a:rPr>
+              <a:t>fashion-ai-engine-app.streamlit.app</a:t>
             </a:r>
           </a:p>
         </p:txBody>
@@ -6777,7 +7873,7 @@
         </p:nvSpPr>
         <p:spPr>
           <a:xfrm>
-            <a:off x="731520" y="457200"/>
+            <a:off x="457200" y="457200"/>
             <a:ext cx="10972800" cy="274320"/>
           </a:xfrm>
           <a:prstGeom prst="rect">
@@ -6799,7 +7895,7 @@
                 </a:solidFill>
                 <a:latin typeface="Calibri"/>
               </a:rPr>
-              <a:t>SECCIÓN 5 · PRODUCTO</a:t>
+              <a:t>RESULTADOS</a:t>
             </a:r>
           </a:p>
         </p:txBody>
@@ -6812,29 +7908,29 @@
         </p:nvSpPr>
         <p:spPr>
           <a:xfrm>
-            <a:off x="731520" y="777240"/>
-            <a:ext cx="10972800" cy="731520"/>
-          </a:xfrm>
-          <a:prstGeom prst="rect">
-            <a:avLst/>
-          </a:prstGeom>
-          <a:noFill/>
-        </p:spPr>
-        <p:txBody>
-          <a:bodyPr wrap="square" lIns="0" rIns="0" tIns="0" bIns="0">
-            <a:spAutoFit/>
-          </a:bodyPr>
-          <a:lstStyle/>
-          <a:p>
-            <a:pPr algn="l"/>
-            <a:r>
-              <a:rPr sz="2800" b="1" i="0">
+            <a:off x="457200" y="777240"/>
+            <a:ext cx="10972800" cy="777240"/>
+          </a:xfrm>
+          <a:prstGeom prst="rect">
+            <a:avLst/>
+          </a:prstGeom>
+          <a:noFill/>
+        </p:spPr>
+        <p:txBody>
+          <a:bodyPr wrap="square" lIns="0" rIns="0" tIns="0" bIns="0">
+            <a:spAutoFit/>
+          </a:bodyPr>
+          <a:lstStyle/>
+          <a:p>
+            <a:pPr algn="l"/>
+            <a:r>
+              <a:rPr sz="3000" b="1" i="0">
                 <a:solidFill>
                   <a:srgbClr val="0F172A"/>
                 </a:solidFill>
                 <a:latin typeface="Calibri"/>
               </a:rPr>
-              <a:t>Una app, cinco vistas, decisiones accionables</a:t>
+              <a:t>Comparativa de 4 políticas de producción</a:t>
             </a:r>
           </a:p>
         </p:txBody>
@@ -6847,8 +7943,8 @@
         </p:nvCxnSpPr>
         <p:spPr>
           <a:xfrm>
-            <a:off x="731520" y="1554480"/>
-            <a:ext cx="10698480" cy="0"/>
+            <a:off x="457200" y="1691640"/>
+            <a:ext cx="11274552" cy="0"/>
           </a:xfrm>
           <a:prstGeom prst="line">
             <a:avLst/>
@@ -6876,14 +7972,601 @@
       </p:cxnSp>
       <p:sp>
         <p:nvSpPr>
-          <p:cNvPr id="5" name="Rectangle 4"/>
+          <p:cNvPr id="5" name="TextBox 4"/>
+          <p:cNvSpPr txBox="1"/>
+          <p:nvPr/>
+        </p:nvSpPr>
+        <p:spPr>
+          <a:xfrm>
+            <a:off x="457200" y="1828800"/>
+            <a:ext cx="11430000" cy="365760"/>
+          </a:xfrm>
+          <a:prstGeom prst="rect">
+            <a:avLst/>
+          </a:prstGeom>
+          <a:noFill/>
+        </p:spPr>
+        <p:txBody>
+          <a:bodyPr wrap="square" lIns="0" rIns="0" tIns="0" bIns="0">
+            <a:spAutoFit/>
+          </a:bodyPr>
+          <a:lstStyle/>
+          <a:p>
+            <a:pPr algn="l"/>
+            <a:r>
+              <a:rPr sz="1200" b="0" i="1">
+                <a:solidFill>
+                  <a:srgbClr val="64748B"/>
+                </a:solidFill>
+                <a:latin typeface="Calibri"/>
+              </a:rPr>
+              <a:t>Mismo dataset, mismo periodo, mismo presupuesto. Cuatro políticas distintas. Comparación honesta:</a:t>
+            </a:r>
+          </a:p>
+        </p:txBody>
+      </p:sp>
+      <p:sp>
+        <p:nvSpPr>
+          <p:cNvPr id="6" name="Rectangle 5"/>
           <p:cNvSpPr/>
           <p:nvPr/>
         </p:nvSpPr>
         <p:spPr>
           <a:xfrm>
-            <a:off x="731520" y="1920240"/>
-            <a:ext cx="457200" cy="594360"/>
+            <a:off x="457200" y="2331720"/>
+            <a:ext cx="2697480" cy="2103120"/>
+          </a:xfrm>
+          <a:prstGeom prst="rect">
+            <a:avLst/>
+          </a:prstGeom>
+          <a:solidFill>
+            <a:srgbClr val="E2E8F0"/>
+          </a:solidFill>
+          <a:ln>
+            <a:noFill/>
+          </a:ln>
+          <a:effectLst/>
+        </p:spPr>
+        <p:style>
+          <a:lnRef idx="1">
+            <a:schemeClr val="accent1"/>
+          </a:lnRef>
+          <a:fillRef idx="3">
+            <a:schemeClr val="accent1"/>
+          </a:fillRef>
+          <a:effectRef idx="2">
+            <a:schemeClr val="accent1"/>
+          </a:effectRef>
+          <a:fontRef idx="minor">
+            <a:schemeClr val="lt1"/>
+          </a:fontRef>
+        </p:style>
+        <p:txBody>
+          <a:bodyPr rtlCol="0" anchor="ctr"/>
+          <a:lstStyle/>
+          <a:p>
+            <a:pPr algn="ctr"/>
+          </a:p>
+        </p:txBody>
+      </p:sp>
+      <p:sp>
+        <p:nvSpPr>
+          <p:cNvPr id="7" name="TextBox 6"/>
+          <p:cNvSpPr txBox="1"/>
+          <p:nvPr/>
+        </p:nvSpPr>
+        <p:spPr>
+          <a:xfrm>
+            <a:off x="640080" y="2468880"/>
+            <a:ext cx="2331720" cy="274320"/>
+          </a:xfrm>
+          <a:prstGeom prst="rect">
+            <a:avLst/>
+          </a:prstGeom>
+          <a:noFill/>
+        </p:spPr>
+        <p:txBody>
+          <a:bodyPr wrap="square" lIns="0" rIns="0" tIns="0" bIns="0">
+            <a:spAutoFit/>
+          </a:bodyPr>
+          <a:lstStyle/>
+          <a:p>
+            <a:pPr algn="l"/>
+            <a:r>
+              <a:rPr sz="1100" b="1" i="0">
+                <a:solidFill>
+                  <a:srgbClr val="0F172A"/>
+                </a:solidFill>
+                <a:latin typeface="Calibri"/>
+              </a:rPr>
+              <a:t>ORACLE</a:t>
+            </a:r>
+          </a:p>
+        </p:txBody>
+      </p:sp>
+      <p:sp>
+        <p:nvSpPr>
+          <p:cNvPr id="8" name="TextBox 7"/>
+          <p:cNvSpPr txBox="1"/>
+          <p:nvPr/>
+        </p:nvSpPr>
+        <p:spPr>
+          <a:xfrm>
+            <a:off x="640080" y="2788920"/>
+            <a:ext cx="2331720" cy="822960"/>
+          </a:xfrm>
+          <a:prstGeom prst="rect">
+            <a:avLst/>
+          </a:prstGeom>
+          <a:noFill/>
+        </p:spPr>
+        <p:txBody>
+          <a:bodyPr wrap="square" lIns="0" rIns="0" tIns="0" bIns="0">
+            <a:spAutoFit/>
+          </a:bodyPr>
+          <a:lstStyle/>
+          <a:p>
+            <a:pPr algn="l"/>
+            <a:r>
+              <a:rPr sz="3200" b="1" i="0">
+                <a:solidFill>
+                  <a:srgbClr val="0F172A"/>
+                </a:solidFill>
+                <a:latin typeface="Calibri"/>
+              </a:rPr>
+              <a:t>2,95M €</a:t>
+            </a:r>
+          </a:p>
+        </p:txBody>
+      </p:sp>
+      <p:sp>
+        <p:nvSpPr>
+          <p:cNvPr id="9" name="TextBox 8"/>
+          <p:cNvSpPr txBox="1"/>
+          <p:nvPr/>
+        </p:nvSpPr>
+        <p:spPr>
+          <a:xfrm>
+            <a:off x="640080" y="3657600"/>
+            <a:ext cx="2331720" cy="365760"/>
+          </a:xfrm>
+          <a:prstGeom prst="rect">
+            <a:avLst/>
+          </a:prstGeom>
+          <a:noFill/>
+        </p:spPr>
+        <p:txBody>
+          <a:bodyPr wrap="square" lIns="0" rIns="0" tIns="0" bIns="0">
+            <a:spAutoFit/>
+          </a:bodyPr>
+          <a:lstStyle/>
+          <a:p>
+            <a:pPr algn="l"/>
+            <a:r>
+              <a:rPr sz="1000" b="0" i="1">
+                <a:solidFill>
+                  <a:srgbClr val="0F172A"/>
+                </a:solidFill>
+                <a:latin typeface="Calibri"/>
+              </a:rPr>
+              <a:t>Conoce el futuro perfectamente</a:t>
+            </a:r>
+          </a:p>
+        </p:txBody>
+      </p:sp>
+      <p:sp>
+        <p:nvSpPr>
+          <p:cNvPr id="10" name="TextBox 9"/>
+          <p:cNvSpPr txBox="1"/>
+          <p:nvPr/>
+        </p:nvSpPr>
+        <p:spPr>
+          <a:xfrm>
+            <a:off x="640080" y="4069080"/>
+            <a:ext cx="2331720" cy="274320"/>
+          </a:xfrm>
+          <a:prstGeom prst="rect">
+            <a:avLst/>
+          </a:prstGeom>
+          <a:noFill/>
+        </p:spPr>
+        <p:txBody>
+          <a:bodyPr wrap="square" lIns="0" rIns="0" tIns="0" bIns="0">
+            <a:spAutoFit/>
+          </a:bodyPr>
+          <a:lstStyle/>
+          <a:p>
+            <a:pPr algn="l"/>
+            <a:r>
+              <a:rPr sz="900" b="1" i="0">
+                <a:solidFill>
+                  <a:srgbClr val="0F172A"/>
+                </a:solidFill>
+                <a:latin typeface="Calibri"/>
+              </a:rPr>
+              <a:t>Techo teórico</a:t>
+            </a:r>
+          </a:p>
+        </p:txBody>
+      </p:sp>
+      <p:sp>
+        <p:nvSpPr>
+          <p:cNvPr id="11" name="Rectangle 10"/>
+          <p:cNvSpPr/>
+          <p:nvPr/>
+        </p:nvSpPr>
+        <p:spPr>
+          <a:xfrm>
+            <a:off x="3291840" y="2331720"/>
+            <a:ext cx="2697480" cy="2103120"/>
+          </a:xfrm>
+          <a:prstGeom prst="rect">
+            <a:avLst/>
+          </a:prstGeom>
+          <a:solidFill>
+            <a:srgbClr val="FECACA"/>
+          </a:solidFill>
+          <a:ln>
+            <a:noFill/>
+          </a:ln>
+          <a:effectLst/>
+        </p:spPr>
+        <p:style>
+          <a:lnRef idx="1">
+            <a:schemeClr val="accent1"/>
+          </a:lnRef>
+          <a:fillRef idx="3">
+            <a:schemeClr val="accent1"/>
+          </a:fillRef>
+          <a:effectRef idx="2">
+            <a:schemeClr val="accent1"/>
+          </a:effectRef>
+          <a:fontRef idx="minor">
+            <a:schemeClr val="lt1"/>
+          </a:fontRef>
+        </p:style>
+        <p:txBody>
+          <a:bodyPr rtlCol="0" anchor="ctr"/>
+          <a:lstStyle/>
+          <a:p>
+            <a:pPr algn="ctr"/>
+          </a:p>
+        </p:txBody>
+      </p:sp>
+      <p:sp>
+        <p:nvSpPr>
+          <p:cNvPr id="12" name="TextBox 11"/>
+          <p:cNvSpPr txBox="1"/>
+          <p:nvPr/>
+        </p:nvSpPr>
+        <p:spPr>
+          <a:xfrm>
+            <a:off x="3474720" y="2468880"/>
+            <a:ext cx="2331720" cy="274320"/>
+          </a:xfrm>
+          <a:prstGeom prst="rect">
+            <a:avLst/>
+          </a:prstGeom>
+          <a:noFill/>
+        </p:spPr>
+        <p:txBody>
+          <a:bodyPr wrap="square" lIns="0" rIns="0" tIns="0" bIns="0">
+            <a:spAutoFit/>
+          </a:bodyPr>
+          <a:lstStyle/>
+          <a:p>
+            <a:pPr algn="l"/>
+            <a:r>
+              <a:rPr sz="1100" b="1" i="0">
+                <a:solidFill>
+                  <a:srgbClr val="0F172A"/>
+                </a:solidFill>
+                <a:latin typeface="Calibri"/>
+              </a:rPr>
+              <a:t>NAIVE</a:t>
+            </a:r>
+          </a:p>
+        </p:txBody>
+      </p:sp>
+      <p:sp>
+        <p:nvSpPr>
+          <p:cNvPr id="13" name="TextBox 12"/>
+          <p:cNvSpPr txBox="1"/>
+          <p:nvPr/>
+        </p:nvSpPr>
+        <p:spPr>
+          <a:xfrm>
+            <a:off x="3474720" y="2788920"/>
+            <a:ext cx="2331720" cy="822960"/>
+          </a:xfrm>
+          <a:prstGeom prst="rect">
+            <a:avLst/>
+          </a:prstGeom>
+          <a:noFill/>
+        </p:spPr>
+        <p:txBody>
+          <a:bodyPr wrap="square" lIns="0" rIns="0" tIns="0" bIns="0">
+            <a:spAutoFit/>
+          </a:bodyPr>
+          <a:lstStyle/>
+          <a:p>
+            <a:pPr algn="l"/>
+            <a:r>
+              <a:rPr sz="3200" b="1" i="0">
+                <a:solidFill>
+                  <a:srgbClr val="0F172A"/>
+                </a:solidFill>
+                <a:latin typeface="Calibri"/>
+              </a:rPr>
+              <a:t>2,57M €</a:t>
+            </a:r>
+          </a:p>
+        </p:txBody>
+      </p:sp>
+      <p:sp>
+        <p:nvSpPr>
+          <p:cNvPr id="14" name="TextBox 13"/>
+          <p:cNvSpPr txBox="1"/>
+          <p:nvPr/>
+        </p:nvSpPr>
+        <p:spPr>
+          <a:xfrm>
+            <a:off x="3474720" y="3657600"/>
+            <a:ext cx="2331720" cy="365760"/>
+          </a:xfrm>
+          <a:prstGeom prst="rect">
+            <a:avLst/>
+          </a:prstGeom>
+          <a:noFill/>
+        </p:spPr>
+        <p:txBody>
+          <a:bodyPr wrap="square" lIns="0" rIns="0" tIns="0" bIns="0">
+            <a:spAutoFit/>
+          </a:bodyPr>
+          <a:lstStyle/>
+          <a:p>
+            <a:pPr algn="l"/>
+            <a:r>
+              <a:rPr sz="1000" b="0" i="1">
+                <a:solidFill>
+                  <a:srgbClr val="0F172A"/>
+                </a:solidFill>
+                <a:latin typeface="Calibri"/>
+              </a:rPr>
+              <a:t>Forecast humano con error 25%</a:t>
+            </a:r>
+          </a:p>
+        </p:txBody>
+      </p:sp>
+      <p:sp>
+        <p:nvSpPr>
+          <p:cNvPr id="15" name="TextBox 14"/>
+          <p:cNvSpPr txBox="1"/>
+          <p:nvPr/>
+        </p:nvSpPr>
+        <p:spPr>
+          <a:xfrm>
+            <a:off x="3474720" y="4069080"/>
+            <a:ext cx="2331720" cy="274320"/>
+          </a:xfrm>
+          <a:prstGeom prst="rect">
+            <a:avLst/>
+          </a:prstGeom>
+          <a:noFill/>
+        </p:spPr>
+        <p:txBody>
+          <a:bodyPr wrap="square" lIns="0" rIns="0" tIns="0" bIns="0">
+            <a:spAutoFit/>
+          </a:bodyPr>
+          <a:lstStyle/>
+          <a:p>
+            <a:pPr algn="l"/>
+            <a:r>
+              <a:rPr sz="900" b="1" i="0">
+                <a:solidFill>
+                  <a:srgbClr val="0F172A"/>
+                </a:solidFill>
+                <a:latin typeface="Calibri"/>
+              </a:rPr>
+              <a:t>Baseline a comparar</a:t>
+            </a:r>
+          </a:p>
+        </p:txBody>
+      </p:sp>
+      <p:sp>
+        <p:nvSpPr>
+          <p:cNvPr id="16" name="Rectangle 15"/>
+          <p:cNvSpPr/>
+          <p:nvPr/>
+        </p:nvSpPr>
+        <p:spPr>
+          <a:xfrm>
+            <a:off x="6126480" y="2331720"/>
+            <a:ext cx="2697480" cy="2103120"/>
+          </a:xfrm>
+          <a:prstGeom prst="rect">
+            <a:avLst/>
+          </a:prstGeom>
+          <a:solidFill>
+            <a:srgbClr val="6EE7B7"/>
+          </a:solidFill>
+          <a:ln>
+            <a:noFill/>
+          </a:ln>
+          <a:effectLst/>
+        </p:spPr>
+        <p:style>
+          <a:lnRef idx="1">
+            <a:schemeClr val="accent1"/>
+          </a:lnRef>
+          <a:fillRef idx="3">
+            <a:schemeClr val="accent1"/>
+          </a:fillRef>
+          <a:effectRef idx="2">
+            <a:schemeClr val="accent1"/>
+          </a:effectRef>
+          <a:fontRef idx="minor">
+            <a:schemeClr val="lt1"/>
+          </a:fontRef>
+        </p:style>
+        <p:txBody>
+          <a:bodyPr rtlCol="0" anchor="ctr"/>
+          <a:lstStyle/>
+          <a:p>
+            <a:pPr algn="ctr"/>
+          </a:p>
+        </p:txBody>
+      </p:sp>
+      <p:sp>
+        <p:nvSpPr>
+          <p:cNvPr id="17" name="TextBox 16"/>
+          <p:cNvSpPr txBox="1"/>
+          <p:nvPr/>
+        </p:nvSpPr>
+        <p:spPr>
+          <a:xfrm>
+            <a:off x="6309360" y="2468880"/>
+            <a:ext cx="2331720" cy="274320"/>
+          </a:xfrm>
+          <a:prstGeom prst="rect">
+            <a:avLst/>
+          </a:prstGeom>
+          <a:noFill/>
+        </p:spPr>
+        <p:txBody>
+          <a:bodyPr wrap="square" lIns="0" rIns="0" tIns="0" bIns="0">
+            <a:spAutoFit/>
+          </a:bodyPr>
+          <a:lstStyle/>
+          <a:p>
+            <a:pPr algn="l"/>
+            <a:r>
+              <a:rPr sz="1100" b="1" i="0">
+                <a:solidFill>
+                  <a:srgbClr val="FFFFFF"/>
+                </a:solidFill>
+                <a:latin typeface="Calibri"/>
+              </a:rPr>
+              <a:t>FORECAST</a:t>
+            </a:r>
+          </a:p>
+        </p:txBody>
+      </p:sp>
+      <p:sp>
+        <p:nvSpPr>
+          <p:cNvPr id="18" name="TextBox 17"/>
+          <p:cNvSpPr txBox="1"/>
+          <p:nvPr/>
+        </p:nvSpPr>
+        <p:spPr>
+          <a:xfrm>
+            <a:off x="6309360" y="2788920"/>
+            <a:ext cx="2331720" cy="822960"/>
+          </a:xfrm>
+          <a:prstGeom prst="rect">
+            <a:avLst/>
+          </a:prstGeom>
+          <a:noFill/>
+        </p:spPr>
+        <p:txBody>
+          <a:bodyPr wrap="square" lIns="0" rIns="0" tIns="0" bIns="0">
+            <a:spAutoFit/>
+          </a:bodyPr>
+          <a:lstStyle/>
+          <a:p>
+            <a:pPr algn="l"/>
+            <a:r>
+              <a:rPr sz="3200" b="1" i="0">
+                <a:solidFill>
+                  <a:srgbClr val="FFFFFF"/>
+                </a:solidFill>
+                <a:latin typeface="Calibri"/>
+              </a:rPr>
+              <a:t>2,67M €</a:t>
+            </a:r>
+          </a:p>
+        </p:txBody>
+      </p:sp>
+      <p:sp>
+        <p:nvSpPr>
+          <p:cNvPr id="19" name="TextBox 18"/>
+          <p:cNvSpPr txBox="1"/>
+          <p:nvPr/>
+        </p:nvSpPr>
+        <p:spPr>
+          <a:xfrm>
+            <a:off x="6309360" y="3657600"/>
+            <a:ext cx="2331720" cy="365760"/>
+          </a:xfrm>
+          <a:prstGeom prst="rect">
+            <a:avLst/>
+          </a:prstGeom>
+          <a:noFill/>
+        </p:spPr>
+        <p:txBody>
+          <a:bodyPr wrap="square" lIns="0" rIns="0" tIns="0" bIns="0">
+            <a:spAutoFit/>
+          </a:bodyPr>
+          <a:lstStyle/>
+          <a:p>
+            <a:pPr algn="l"/>
+            <a:r>
+              <a:rPr sz="1000" b="0" i="1">
+                <a:solidFill>
+                  <a:srgbClr val="FFFFFF"/>
+                </a:solidFill>
+                <a:latin typeface="Calibri"/>
+              </a:rPr>
+              <a:t>Solo modelo ML, sin devoluciones</a:t>
+            </a:r>
+          </a:p>
+        </p:txBody>
+      </p:sp>
+      <p:sp>
+        <p:nvSpPr>
+          <p:cNvPr id="20" name="TextBox 19"/>
+          <p:cNvSpPr txBox="1"/>
+          <p:nvPr/>
+        </p:nvSpPr>
+        <p:spPr>
+          <a:xfrm>
+            <a:off x="6309360" y="4069080"/>
+            <a:ext cx="2331720" cy="274320"/>
+          </a:xfrm>
+          <a:prstGeom prst="rect">
+            <a:avLst/>
+          </a:prstGeom>
+          <a:noFill/>
+        </p:spPr>
+        <p:txBody>
+          <a:bodyPr wrap="square" lIns="0" rIns="0" tIns="0" bIns="0">
+            <a:spAutoFit/>
+          </a:bodyPr>
+          <a:lstStyle/>
+          <a:p>
+            <a:pPr algn="l"/>
+            <a:r>
+              <a:rPr sz="900" b="1" i="0">
+                <a:solidFill>
+                  <a:srgbClr val="FFFFFF"/>
+                </a:solidFill>
+                <a:latin typeface="Calibri"/>
+              </a:rPr>
+              <a:t>Mejora parcial</a:t>
+            </a:r>
+          </a:p>
+        </p:txBody>
+      </p:sp>
+      <p:sp>
+        <p:nvSpPr>
+          <p:cNvPr id="21" name="Rectangle 20"/>
+          <p:cNvSpPr/>
+          <p:nvPr/>
+        </p:nvSpPr>
+        <p:spPr>
+          <a:xfrm>
+            <a:off x="8961120" y="2331720"/>
+            <a:ext cx="2697480" cy="2103120"/>
           </a:xfrm>
           <a:prstGeom prst="rect">
             <a:avLst/>
@@ -6920,119 +8603,198 @@
       </p:sp>
       <p:sp>
         <p:nvSpPr>
-          <p:cNvPr id="6" name="TextBox 5"/>
-          <p:cNvSpPr txBox="1"/>
-          <p:nvPr/>
-        </p:nvSpPr>
-        <p:spPr>
-          <a:xfrm>
-            <a:off x="731520" y="2057400"/>
-            <a:ext cx="457200" cy="365760"/>
-          </a:xfrm>
-          <a:prstGeom prst="rect">
-            <a:avLst/>
-          </a:prstGeom>
-          <a:noFill/>
-        </p:spPr>
-        <p:txBody>
-          <a:bodyPr wrap="square" lIns="0" rIns="0" tIns="0" bIns="0">
-            <a:spAutoFit/>
-          </a:bodyPr>
+          <p:cNvPr id="22" name="TextBox 21"/>
+          <p:cNvSpPr txBox="1"/>
+          <p:nvPr/>
+        </p:nvSpPr>
+        <p:spPr>
+          <a:xfrm>
+            <a:off x="9144000" y="2468880"/>
+            <a:ext cx="2331720" cy="274320"/>
+          </a:xfrm>
+          <a:prstGeom prst="rect">
+            <a:avLst/>
+          </a:prstGeom>
+          <a:noFill/>
+        </p:spPr>
+        <p:txBody>
+          <a:bodyPr wrap="square" lIns="0" rIns="0" tIns="0" bIns="0">
+            <a:spAutoFit/>
+          </a:bodyPr>
+          <a:lstStyle/>
+          <a:p>
+            <a:pPr algn="l"/>
+            <a:r>
+              <a:rPr sz="1100" b="1" i="0">
+                <a:solidFill>
+                  <a:srgbClr val="FFFFFF"/>
+                </a:solidFill>
+                <a:latin typeface="Calibri"/>
+              </a:rPr>
+              <a:t>OPTIMIZED</a:t>
+            </a:r>
+          </a:p>
+        </p:txBody>
+      </p:sp>
+      <p:sp>
+        <p:nvSpPr>
+          <p:cNvPr id="23" name="TextBox 22"/>
+          <p:cNvSpPr txBox="1"/>
+          <p:nvPr/>
+        </p:nvSpPr>
+        <p:spPr>
+          <a:xfrm>
+            <a:off x="9144000" y="2788920"/>
+            <a:ext cx="2331720" cy="822960"/>
+          </a:xfrm>
+          <a:prstGeom prst="rect">
+            <a:avLst/>
+          </a:prstGeom>
+          <a:noFill/>
+        </p:spPr>
+        <p:txBody>
+          <a:bodyPr wrap="square" lIns="0" rIns="0" tIns="0" bIns="0">
+            <a:spAutoFit/>
+          </a:bodyPr>
+          <a:lstStyle/>
+          <a:p>
+            <a:pPr algn="l"/>
+            <a:r>
+              <a:rPr sz="3200" b="1" i="0">
+                <a:solidFill>
+                  <a:srgbClr val="FFFFFF"/>
+                </a:solidFill>
+                <a:latin typeface="Calibri"/>
+              </a:rPr>
+              <a:t>2,74M €</a:t>
+            </a:r>
+          </a:p>
+        </p:txBody>
+      </p:sp>
+      <p:sp>
+        <p:nvSpPr>
+          <p:cNvPr id="24" name="TextBox 23"/>
+          <p:cNvSpPr txBox="1"/>
+          <p:nvPr/>
+        </p:nvSpPr>
+        <p:spPr>
+          <a:xfrm>
+            <a:off x="9144000" y="3657600"/>
+            <a:ext cx="2331720" cy="365760"/>
+          </a:xfrm>
+          <a:prstGeom prst="rect">
+            <a:avLst/>
+          </a:prstGeom>
+          <a:noFill/>
+        </p:spPr>
+        <p:txBody>
+          <a:bodyPr wrap="square" lIns="0" rIns="0" tIns="0" bIns="0">
+            <a:spAutoFit/>
+          </a:bodyPr>
+          <a:lstStyle/>
+          <a:p>
+            <a:pPr algn="l"/>
+            <a:r>
+              <a:rPr sz="1000" b="0" i="1">
+                <a:solidFill>
+                  <a:srgbClr val="FFFFFF"/>
+                </a:solidFill>
+                <a:latin typeface="Calibri"/>
+              </a:rPr>
+              <a:t>Sistema completo, α = 0,1</a:t>
+            </a:r>
+          </a:p>
+        </p:txBody>
+      </p:sp>
+      <p:sp>
+        <p:nvSpPr>
+          <p:cNvPr id="25" name="TextBox 24"/>
+          <p:cNvSpPr txBox="1"/>
+          <p:nvPr/>
+        </p:nvSpPr>
+        <p:spPr>
+          <a:xfrm>
+            <a:off x="9144000" y="4069080"/>
+            <a:ext cx="2331720" cy="274320"/>
+          </a:xfrm>
+          <a:prstGeom prst="rect">
+            <a:avLst/>
+          </a:prstGeom>
+          <a:noFill/>
+        </p:spPr>
+        <p:txBody>
+          <a:bodyPr wrap="square" lIns="0" rIns="0" tIns="0" bIns="0">
+            <a:spAutoFit/>
+          </a:bodyPr>
+          <a:lstStyle/>
+          <a:p>
+            <a:pPr algn="l"/>
+            <a:r>
+              <a:rPr sz="900" b="1" i="0">
+                <a:solidFill>
+                  <a:srgbClr val="FFFFFF"/>
+                </a:solidFill>
+                <a:latin typeface="Calibri"/>
+              </a:rPr>
+              <a:t>★ MI SOLUCIÓN</a:t>
+            </a:r>
+          </a:p>
+        </p:txBody>
+      </p:sp>
+      <p:sp>
+        <p:nvSpPr>
+          <p:cNvPr id="26" name="Rectangle 25"/>
+          <p:cNvSpPr/>
+          <p:nvPr/>
+        </p:nvSpPr>
+        <p:spPr>
+          <a:xfrm>
+            <a:off x="457200" y="4754880"/>
+            <a:ext cx="11247120" cy="1554480"/>
+          </a:xfrm>
+          <a:prstGeom prst="rect">
+            <a:avLst/>
+          </a:prstGeom>
+          <a:solidFill>
+            <a:srgbClr val="F8FAFC"/>
+          </a:solidFill>
+          <a:ln>
+            <a:noFill/>
+          </a:ln>
+          <a:effectLst/>
+        </p:spPr>
+        <p:style>
+          <a:lnRef idx="1">
+            <a:schemeClr val="accent1"/>
+          </a:lnRef>
+          <a:fillRef idx="3">
+            <a:schemeClr val="accent1"/>
+          </a:fillRef>
+          <a:effectRef idx="2">
+            <a:schemeClr val="accent1"/>
+          </a:effectRef>
+          <a:fontRef idx="minor">
+            <a:schemeClr val="lt1"/>
+          </a:fontRef>
+        </p:style>
+        <p:txBody>
+          <a:bodyPr rtlCol="0" anchor="ctr"/>
           <a:lstStyle/>
           <a:p>
             <a:pPr algn="ctr"/>
-            <a:r>
-              <a:rPr sz="1800" b="1" i="0">
-                <a:solidFill>
-                  <a:srgbClr val="FFFFFF"/>
-                </a:solidFill>
-                <a:latin typeface="Calibri"/>
-              </a:rPr>
-              <a:t>1</a:t>
-            </a:r>
-          </a:p>
-        </p:txBody>
-      </p:sp>
-      <p:sp>
-        <p:nvSpPr>
-          <p:cNvPr id="7" name="TextBox 6"/>
-          <p:cNvSpPr txBox="1"/>
-          <p:nvPr/>
-        </p:nvSpPr>
-        <p:spPr>
-          <a:xfrm>
-            <a:off x="1554480" y="1965960"/>
-            <a:ext cx="4114800" cy="365760"/>
-          </a:xfrm>
-          <a:prstGeom prst="rect">
-            <a:avLst/>
-          </a:prstGeom>
-          <a:noFill/>
-        </p:spPr>
-        <p:txBody>
-          <a:bodyPr wrap="square" lIns="0" rIns="0" tIns="0" bIns="0">
-            <a:spAutoFit/>
-          </a:bodyPr>
-          <a:lstStyle/>
-          <a:p>
-            <a:pPr algn="l"/>
-            <a:r>
-              <a:rPr sz="1500" b="1" i="0">
-                <a:solidFill>
-                  <a:srgbClr val="0F172A"/>
-                </a:solidFill>
-                <a:latin typeface="Calibri"/>
-              </a:rPr>
-              <a:t>Executive Dashboard</a:t>
-            </a:r>
-          </a:p>
-        </p:txBody>
-      </p:sp>
-      <p:sp>
-        <p:nvSpPr>
-          <p:cNvPr id="8" name="TextBox 7"/>
-          <p:cNvSpPr txBox="1"/>
-          <p:nvPr/>
-        </p:nvSpPr>
-        <p:spPr>
-          <a:xfrm>
-            <a:off x="1554480" y="2267712"/>
-            <a:ext cx="10058400" cy="274320"/>
-          </a:xfrm>
-          <a:prstGeom prst="rect">
-            <a:avLst/>
-          </a:prstGeom>
-          <a:noFill/>
-        </p:spPr>
-        <p:txBody>
-          <a:bodyPr wrap="square" lIns="0" rIns="0" tIns="0" bIns="0">
-            <a:spAutoFit/>
-          </a:bodyPr>
-          <a:lstStyle/>
-          <a:p>
-            <a:pPr algn="l"/>
-            <a:r>
-              <a:rPr sz="1100" b="0" i="0">
-                <a:solidFill>
-                  <a:srgbClr val="64748B"/>
-                </a:solidFill>
-                <a:latin typeface="Calibri"/>
-              </a:rPr>
-              <a:t>KPIs, comparativa de escenarios, sensibilidad a α</a:t>
-            </a:r>
-          </a:p>
-        </p:txBody>
-      </p:sp>
-      <p:sp>
-        <p:nvSpPr>
-          <p:cNvPr id="9" name="Rectangle 8"/>
+          </a:p>
+        </p:txBody>
+      </p:sp>
+      <p:sp>
+        <p:nvSpPr>
+          <p:cNvPr id="27" name="Rectangle 26"/>
           <p:cNvSpPr/>
           <p:nvPr/>
         </p:nvSpPr>
         <p:spPr>
           <a:xfrm>
-            <a:off x="731520" y="2697480"/>
-            <a:ext cx="457200" cy="594360"/>
+            <a:off x="457200" y="4754880"/>
+            <a:ext cx="45720" cy="1554480"/>
           </a:xfrm>
           <a:prstGeom prst="rect">
             <a:avLst/>
@@ -7069,587 +8831,176 @@
       </p:sp>
       <p:sp>
         <p:nvSpPr>
-          <p:cNvPr id="10" name="TextBox 9"/>
-          <p:cNvSpPr txBox="1"/>
-          <p:nvPr/>
-        </p:nvSpPr>
-        <p:spPr>
-          <a:xfrm>
-            <a:off x="731520" y="2834640"/>
-            <a:ext cx="457200" cy="365760"/>
-          </a:xfrm>
-          <a:prstGeom prst="rect">
-            <a:avLst/>
-          </a:prstGeom>
-          <a:noFill/>
-        </p:spPr>
-        <p:txBody>
-          <a:bodyPr wrap="square" lIns="0" rIns="0" tIns="0" bIns="0">
-            <a:spAutoFit/>
-          </a:bodyPr>
-          <a:lstStyle/>
-          <a:p>
-            <a:pPr algn="ctr"/>
-            <a:r>
-              <a:rPr sz="1800" b="1" i="0">
-                <a:solidFill>
-                  <a:srgbClr val="FFFFFF"/>
-                </a:solidFill>
-                <a:latin typeface="Calibri"/>
-              </a:rPr>
-              <a:t>2</a:t>
-            </a:r>
-          </a:p>
-        </p:txBody>
-      </p:sp>
-      <p:sp>
-        <p:nvSpPr>
-          <p:cNvPr id="11" name="TextBox 10"/>
-          <p:cNvSpPr txBox="1"/>
-          <p:nvPr/>
-        </p:nvSpPr>
-        <p:spPr>
-          <a:xfrm>
-            <a:off x="1554480" y="2743200"/>
-            <a:ext cx="4114800" cy="365760"/>
-          </a:xfrm>
-          <a:prstGeom prst="rect">
-            <a:avLst/>
-          </a:prstGeom>
-          <a:noFill/>
-        </p:spPr>
-        <p:txBody>
-          <a:bodyPr wrap="square" lIns="0" rIns="0" tIns="0" bIns="0">
-            <a:spAutoFit/>
-          </a:bodyPr>
-          <a:lstStyle/>
-          <a:p>
-            <a:pPr algn="l"/>
-            <a:r>
-              <a:rPr sz="1500" b="1" i="0">
+          <p:cNvPr id="28" name="TextBox 27"/>
+          <p:cNvSpPr txBox="1"/>
+          <p:nvPr/>
+        </p:nvSpPr>
+        <p:spPr>
+          <a:xfrm>
+            <a:off x="685800" y="4846320"/>
+            <a:ext cx="10972800" cy="548640"/>
+          </a:xfrm>
+          <a:prstGeom prst="rect">
+            <a:avLst/>
+          </a:prstGeom>
+          <a:noFill/>
+        </p:spPr>
+        <p:txBody>
+          <a:bodyPr wrap="square" lIns="0" rIns="0" tIns="0" bIns="0">
+            <a:spAutoFit/>
+          </a:bodyPr>
+          <a:lstStyle/>
+          <a:p>
+            <a:pPr algn="l"/>
+            <a:r>
+              <a:rPr sz="2200" b="1" i="0">
+                <a:solidFill>
+                  <a:srgbClr val="059669"/>
+                </a:solidFill>
+                <a:latin typeface="Calibri"/>
+              </a:rPr>
+              <a:t>+175.535 €  de margen incremental</a:t>
+            </a:r>
+          </a:p>
+        </p:txBody>
+      </p:sp>
+      <p:sp>
+        <p:nvSpPr>
+          <p:cNvPr id="29" name="TextBox 28"/>
+          <p:cNvSpPr txBox="1"/>
+          <p:nvPr/>
+        </p:nvSpPr>
+        <p:spPr>
+          <a:xfrm>
+            <a:off x="685800" y="5440680"/>
+            <a:ext cx="10972800" cy="365760"/>
+          </a:xfrm>
+          <a:prstGeom prst="rect">
+            <a:avLst/>
+          </a:prstGeom>
+          <a:noFill/>
+        </p:spPr>
+        <p:txBody>
+          <a:bodyPr wrap="square" lIns="0" rIns="0" tIns="0" bIns="0">
+            <a:spAutoFit/>
+          </a:bodyPr>
+          <a:lstStyle/>
+          <a:p>
+            <a:pPr algn="l"/>
+            <a:r>
+              <a:rPr sz="1300" b="0" i="0">
                 <a:solidFill>
                   <a:srgbClr val="0F172A"/>
                 </a:solidFill>
                 <a:latin typeface="Calibri"/>
               </a:rPr>
-              <a:t>Decision Simulator</a:t>
-            </a:r>
-          </a:p>
-        </p:txBody>
-      </p:sp>
-      <p:sp>
-        <p:nvSpPr>
-          <p:cNvPr id="12" name="TextBox 11"/>
-          <p:cNvSpPr txBox="1"/>
-          <p:nvPr/>
-        </p:nvSpPr>
-        <p:spPr>
-          <a:xfrm>
-            <a:off x="1554480" y="3044952"/>
-            <a:ext cx="10058400" cy="274320"/>
-          </a:xfrm>
-          <a:prstGeom prst="rect">
-            <a:avLst/>
-          </a:prstGeom>
-          <a:noFill/>
-        </p:spPr>
-        <p:txBody>
-          <a:bodyPr wrap="square" lIns="0" rIns="0" tIns="0" bIns="0">
-            <a:spAutoFit/>
-          </a:bodyPr>
-          <a:lstStyle/>
-          <a:p>
-            <a:pPr algn="l"/>
-            <a:r>
-              <a:rPr sz="1100" b="0" i="0">
+              <a:t>vs baseline humano · al MISMO presupuesto de unidades · evitando 5,6K uds de stock muerto</a:t>
+            </a:r>
+          </a:p>
+        </p:txBody>
+      </p:sp>
+      <p:sp>
+        <p:nvSpPr>
+          <p:cNvPr id="30" name="TextBox 29"/>
+          <p:cNvSpPr txBox="1"/>
+          <p:nvPr/>
+        </p:nvSpPr>
+        <p:spPr>
+          <a:xfrm>
+            <a:off x="685800" y="5852160"/>
+            <a:ext cx="10972800" cy="365760"/>
+          </a:xfrm>
+          <a:prstGeom prst="rect">
+            <a:avLst/>
+          </a:prstGeom>
+          <a:noFill/>
+        </p:spPr>
+        <p:txBody>
+          <a:bodyPr wrap="square" lIns="0" rIns="0" tIns="0" bIns="0">
+            <a:spAutoFit/>
+          </a:bodyPr>
+          <a:lstStyle/>
+          <a:p>
+            <a:pPr algn="l"/>
+            <a:r>
+              <a:rPr sz="1200" b="0" i="1">
                 <a:solidFill>
                   <a:srgbClr val="64748B"/>
                 </a:solidFill>
                 <a:latin typeface="Calibri"/>
               </a:rPr>
-              <a:t>Sliders interactivos · P&amp;L en vivo · botón reset</a:t>
-            </a:r>
-          </a:p>
-        </p:txBody>
-      </p:sp>
-      <p:sp>
-        <p:nvSpPr>
-          <p:cNvPr id="13" name="Rectangle 12"/>
-          <p:cNvSpPr/>
-          <p:nvPr/>
-        </p:nvSpPr>
-        <p:spPr>
-          <a:xfrm>
-            <a:off x="731520" y="3474720"/>
-            <a:ext cx="457200" cy="594360"/>
-          </a:xfrm>
-          <a:prstGeom prst="rect">
-            <a:avLst/>
-          </a:prstGeom>
-          <a:solidFill>
-            <a:srgbClr val="10B981"/>
-          </a:solidFill>
-          <a:ln>
-            <a:noFill/>
-          </a:ln>
-          <a:effectLst/>
-        </p:spPr>
-        <p:style>
-          <a:lnRef idx="1">
-            <a:schemeClr val="accent1"/>
-          </a:lnRef>
-          <a:fillRef idx="3">
-            <a:schemeClr val="accent1"/>
-          </a:fillRef>
-          <a:effectRef idx="2">
-            <a:schemeClr val="accent1"/>
-          </a:effectRef>
-          <a:fontRef idx="minor">
-            <a:schemeClr val="lt1"/>
-          </a:fontRef>
-        </p:style>
-        <p:txBody>
-          <a:bodyPr rtlCol="0" anchor="ctr"/>
-          <a:lstStyle/>
-          <a:p>
-            <a:pPr algn="ctr"/>
-          </a:p>
-        </p:txBody>
-      </p:sp>
-      <p:sp>
-        <p:nvSpPr>
-          <p:cNvPr id="14" name="TextBox 13"/>
-          <p:cNvSpPr txBox="1"/>
-          <p:nvPr/>
-        </p:nvSpPr>
-        <p:spPr>
-          <a:xfrm>
-            <a:off x="731520" y="3611879"/>
-            <a:ext cx="457200" cy="365760"/>
-          </a:xfrm>
-          <a:prstGeom prst="rect">
-            <a:avLst/>
-          </a:prstGeom>
-          <a:noFill/>
-        </p:spPr>
-        <p:txBody>
-          <a:bodyPr wrap="square" lIns="0" rIns="0" tIns="0" bIns="0">
-            <a:spAutoFit/>
-          </a:bodyPr>
-          <a:lstStyle/>
-          <a:p>
-            <a:pPr algn="ctr"/>
-            <a:r>
-              <a:rPr sz="1800" b="1" i="0">
-                <a:solidFill>
-                  <a:srgbClr val="FFFFFF"/>
-                </a:solidFill>
-                <a:latin typeface="Calibri"/>
-              </a:rPr>
-              <a:t>3</a:t>
-            </a:r>
-          </a:p>
-        </p:txBody>
-      </p:sp>
-      <p:sp>
-        <p:nvSpPr>
-          <p:cNvPr id="15" name="TextBox 14"/>
-          <p:cNvSpPr txBox="1"/>
-          <p:nvPr/>
-        </p:nvSpPr>
-        <p:spPr>
-          <a:xfrm>
-            <a:off x="1554480" y="3520439"/>
-            <a:ext cx="4114800" cy="365760"/>
-          </a:xfrm>
-          <a:prstGeom prst="rect">
-            <a:avLst/>
-          </a:prstGeom>
-          <a:noFill/>
-        </p:spPr>
-        <p:txBody>
-          <a:bodyPr wrap="square" lIns="0" rIns="0" tIns="0" bIns="0">
-            <a:spAutoFit/>
-          </a:bodyPr>
-          <a:lstStyle/>
-          <a:p>
-            <a:pPr algn="l"/>
-            <a:r>
-              <a:rPr sz="1500" b="1" i="0">
-                <a:solidFill>
-                  <a:srgbClr val="0F172A"/>
-                </a:solidFill>
-                <a:latin typeface="Calibri"/>
-              </a:rPr>
-              <a:t>Style Intelligence</a:t>
-            </a:r>
-          </a:p>
-        </p:txBody>
-      </p:sp>
-      <p:sp>
-        <p:nvSpPr>
-          <p:cNvPr id="16" name="TextBox 15"/>
-          <p:cNvSpPr txBox="1"/>
-          <p:nvPr/>
-        </p:nvSpPr>
-        <p:spPr>
-          <a:xfrm>
-            <a:off x="1554480" y="3822191"/>
-            <a:ext cx="10058400" cy="274320"/>
-          </a:xfrm>
-          <a:prstGeom prst="rect">
-            <a:avLst/>
-          </a:prstGeom>
-          <a:noFill/>
-        </p:spPr>
-        <p:txBody>
-          <a:bodyPr wrap="square" lIns="0" rIns="0" tIns="0" bIns="0">
-            <a:spAutoFit/>
-          </a:bodyPr>
-          <a:lstStyle/>
-          <a:p>
-            <a:pPr algn="l"/>
-            <a:r>
-              <a:rPr sz="1100" b="0" i="0">
+              <a:t>El sistema no produce menos. Reasigna mejor entre artículos según margen neto esperado.</a:t>
+            </a:r>
+          </a:p>
+        </p:txBody>
+      </p:sp>
+      <p:sp>
+        <p:nvSpPr>
+          <p:cNvPr id="31" name="TextBox 30"/>
+          <p:cNvSpPr txBox="1"/>
+          <p:nvPr/>
+        </p:nvSpPr>
+        <p:spPr>
+          <a:xfrm>
+            <a:off x="10972800" y="6446520"/>
+            <a:ext cx="914400" cy="274320"/>
+          </a:xfrm>
+          <a:prstGeom prst="rect">
+            <a:avLst/>
+          </a:prstGeom>
+          <a:noFill/>
+        </p:spPr>
+        <p:txBody>
+          <a:bodyPr wrap="square" lIns="0" rIns="0" tIns="0" bIns="0">
+            <a:spAutoFit/>
+          </a:bodyPr>
+          <a:lstStyle/>
+          <a:p>
+            <a:pPr algn="r"/>
+            <a:r>
+              <a:rPr sz="900" b="0" i="1">
                 <a:solidFill>
                   <a:srgbClr val="64748B"/>
                 </a:solidFill>
                 <a:latin typeface="Calibri"/>
               </a:rPr>
-              <a:t>Heatmap garment × color · análisis por cluster</a:t>
-            </a:r>
-          </a:p>
-        </p:txBody>
-      </p:sp>
-      <p:sp>
-        <p:nvSpPr>
-          <p:cNvPr id="17" name="Rectangle 16"/>
-          <p:cNvSpPr/>
-          <p:nvPr/>
-        </p:nvSpPr>
-        <p:spPr>
-          <a:xfrm>
-            <a:off x="731520" y="4251960"/>
-            <a:ext cx="457200" cy="594360"/>
-          </a:xfrm>
-          <a:prstGeom prst="rect">
-            <a:avLst/>
-          </a:prstGeom>
-          <a:solidFill>
-            <a:srgbClr val="10B981"/>
-          </a:solidFill>
-          <a:ln>
-            <a:noFill/>
-          </a:ln>
-          <a:effectLst/>
-        </p:spPr>
-        <p:style>
-          <a:lnRef idx="1">
-            <a:schemeClr val="accent1"/>
-          </a:lnRef>
-          <a:fillRef idx="3">
-            <a:schemeClr val="accent1"/>
-          </a:fillRef>
-          <a:effectRef idx="2">
-            <a:schemeClr val="accent1"/>
-          </a:effectRef>
-          <a:fontRef idx="minor">
-            <a:schemeClr val="lt1"/>
-          </a:fontRef>
-        </p:style>
-        <p:txBody>
-          <a:bodyPr rtlCol="0" anchor="ctr"/>
-          <a:lstStyle/>
-          <a:p>
-            <a:pPr algn="ctr"/>
-          </a:p>
-        </p:txBody>
-      </p:sp>
-      <p:sp>
-        <p:nvSpPr>
-          <p:cNvPr id="18" name="TextBox 17"/>
-          <p:cNvSpPr txBox="1"/>
-          <p:nvPr/>
-        </p:nvSpPr>
-        <p:spPr>
-          <a:xfrm>
-            <a:off x="731520" y="4389120"/>
-            <a:ext cx="457200" cy="365760"/>
-          </a:xfrm>
-          <a:prstGeom prst="rect">
-            <a:avLst/>
-          </a:prstGeom>
-          <a:noFill/>
-        </p:spPr>
-        <p:txBody>
-          <a:bodyPr wrap="square" lIns="0" rIns="0" tIns="0" bIns="0">
-            <a:spAutoFit/>
-          </a:bodyPr>
-          <a:lstStyle/>
-          <a:p>
-            <a:pPr algn="ctr"/>
-            <a:r>
-              <a:rPr sz="1800" b="1" i="0">
-                <a:solidFill>
-                  <a:srgbClr val="FFFFFF"/>
-                </a:solidFill>
-                <a:latin typeface="Calibri"/>
-              </a:rPr>
-              <a:t>4</a:t>
-            </a:r>
-          </a:p>
-        </p:txBody>
-      </p:sp>
-      <p:sp>
-        <p:nvSpPr>
-          <p:cNvPr id="19" name="TextBox 18"/>
-          <p:cNvSpPr txBox="1"/>
-          <p:nvPr/>
-        </p:nvSpPr>
-        <p:spPr>
-          <a:xfrm>
-            <a:off x="1554480" y="4297680"/>
-            <a:ext cx="4114800" cy="365760"/>
-          </a:xfrm>
-          <a:prstGeom prst="rect">
-            <a:avLst/>
-          </a:prstGeom>
-          <a:noFill/>
-        </p:spPr>
-        <p:txBody>
-          <a:bodyPr wrap="square" lIns="0" rIns="0" tIns="0" bIns="0">
-            <a:spAutoFit/>
-          </a:bodyPr>
-          <a:lstStyle/>
-          <a:p>
-            <a:pPr algn="l"/>
-            <a:r>
-              <a:rPr sz="1500" b="1" i="0">
-                <a:solidFill>
-                  <a:srgbClr val="0F172A"/>
-                </a:solidFill>
-                <a:latin typeface="Calibri"/>
-              </a:rPr>
-              <a:t>Returns Risk</a:t>
-            </a:r>
-          </a:p>
-        </p:txBody>
-      </p:sp>
-      <p:sp>
-        <p:nvSpPr>
-          <p:cNvPr id="20" name="TextBox 19"/>
-          <p:cNvSpPr txBox="1"/>
-          <p:nvPr/>
-        </p:nvSpPr>
-        <p:spPr>
-          <a:xfrm>
-            <a:off x="1554480" y="4599432"/>
-            <a:ext cx="10058400" cy="274320"/>
-          </a:xfrm>
-          <a:prstGeom prst="rect">
-            <a:avLst/>
-          </a:prstGeom>
-          <a:noFill/>
-        </p:spPr>
-        <p:txBody>
-          <a:bodyPr wrap="square" lIns="0" rIns="0" tIns="0" bIns="0">
-            <a:spAutoFit/>
-          </a:bodyPr>
-          <a:lstStyle/>
-          <a:p>
-            <a:pPr algn="l"/>
-            <a:r>
-              <a:rPr sz="1100" b="0" i="0">
-                <a:solidFill>
-                  <a:srgbClr val="64748B"/>
-                </a:solidFill>
-                <a:latin typeface="Calibri"/>
-              </a:rPr>
-              <a:t>Calibración del modelo · top 50 productos riesgo</a:t>
-            </a:r>
-          </a:p>
-        </p:txBody>
-      </p:sp>
-      <p:sp>
-        <p:nvSpPr>
-          <p:cNvPr id="21" name="Rectangle 20"/>
-          <p:cNvSpPr/>
-          <p:nvPr/>
-        </p:nvSpPr>
-        <p:spPr>
-          <a:xfrm>
-            <a:off x="731520" y="5029200"/>
-            <a:ext cx="457200" cy="594360"/>
-          </a:xfrm>
-          <a:prstGeom prst="rect">
-            <a:avLst/>
-          </a:prstGeom>
-          <a:solidFill>
-            <a:srgbClr val="10B981"/>
-          </a:solidFill>
-          <a:ln>
-            <a:noFill/>
-          </a:ln>
-          <a:effectLst/>
-        </p:spPr>
-        <p:style>
-          <a:lnRef idx="1">
-            <a:schemeClr val="accent1"/>
-          </a:lnRef>
-          <a:fillRef idx="3">
-            <a:schemeClr val="accent1"/>
-          </a:fillRef>
-          <a:effectRef idx="2">
-            <a:schemeClr val="accent1"/>
-          </a:effectRef>
-          <a:fontRef idx="minor">
-            <a:schemeClr val="lt1"/>
-          </a:fontRef>
-        </p:style>
-        <p:txBody>
-          <a:bodyPr rtlCol="0" anchor="ctr"/>
-          <a:lstStyle/>
-          <a:p>
-            <a:pPr algn="ctr"/>
-          </a:p>
-        </p:txBody>
-      </p:sp>
-      <p:sp>
-        <p:nvSpPr>
-          <p:cNvPr id="22" name="TextBox 21"/>
-          <p:cNvSpPr txBox="1"/>
-          <p:nvPr/>
-        </p:nvSpPr>
-        <p:spPr>
-          <a:xfrm>
-            <a:off x="731520" y="5166360"/>
-            <a:ext cx="457200" cy="365760"/>
-          </a:xfrm>
-          <a:prstGeom prst="rect">
-            <a:avLst/>
-          </a:prstGeom>
-          <a:noFill/>
-        </p:spPr>
-        <p:txBody>
-          <a:bodyPr wrap="square" lIns="0" rIns="0" tIns="0" bIns="0">
-            <a:spAutoFit/>
-          </a:bodyPr>
-          <a:lstStyle/>
-          <a:p>
-            <a:pPr algn="ctr"/>
-            <a:r>
-              <a:rPr sz="1800" b="1" i="0">
-                <a:solidFill>
-                  <a:srgbClr val="FFFFFF"/>
-                </a:solidFill>
-                <a:latin typeface="Calibri"/>
-              </a:rPr>
-              <a:t>5</a:t>
-            </a:r>
-          </a:p>
-        </p:txBody>
-      </p:sp>
-      <p:sp>
-        <p:nvSpPr>
-          <p:cNvPr id="23" name="TextBox 22"/>
-          <p:cNvSpPr txBox="1"/>
-          <p:nvPr/>
-        </p:nvSpPr>
-        <p:spPr>
-          <a:xfrm>
-            <a:off x="1554480" y="5074920"/>
-            <a:ext cx="4114800" cy="365760"/>
-          </a:xfrm>
-          <a:prstGeom prst="rect">
-            <a:avLst/>
-          </a:prstGeom>
-          <a:noFill/>
-        </p:spPr>
-        <p:txBody>
-          <a:bodyPr wrap="square" lIns="0" rIns="0" tIns="0" bIns="0">
-            <a:spAutoFit/>
-          </a:bodyPr>
-          <a:lstStyle/>
-          <a:p>
-            <a:pPr algn="l"/>
-            <a:r>
-              <a:rPr sz="1500" b="1" i="0">
-                <a:solidFill>
-                  <a:srgbClr val="0F172A"/>
-                </a:solidFill>
-                <a:latin typeface="Calibri"/>
-              </a:rPr>
-              <a:t>Demand Explorer</a:t>
-            </a:r>
-          </a:p>
-        </p:txBody>
-      </p:sp>
-      <p:sp>
-        <p:nvSpPr>
-          <p:cNvPr id="24" name="TextBox 23"/>
-          <p:cNvSpPr txBox="1"/>
-          <p:nvPr/>
-        </p:nvSpPr>
-        <p:spPr>
-          <a:xfrm>
-            <a:off x="1554480" y="5376672"/>
-            <a:ext cx="10058400" cy="274320"/>
-          </a:xfrm>
-          <a:prstGeom prst="rect">
-            <a:avLst/>
-          </a:prstGeom>
-          <a:noFill/>
-        </p:spPr>
-        <p:txBody>
-          <a:bodyPr wrap="square" lIns="0" rIns="0" tIns="0" bIns="0">
-            <a:spAutoFit/>
-          </a:bodyPr>
-          <a:lstStyle/>
-          <a:p>
-            <a:pPr algn="l"/>
-            <a:r>
-              <a:rPr sz="1100" b="0" i="0">
-                <a:solidFill>
-                  <a:srgbClr val="64748B"/>
-                </a:solidFill>
-                <a:latin typeface="Calibri"/>
-              </a:rPr>
-              <a:t>Forecast vs real por producto · top errores</a:t>
-            </a:r>
-          </a:p>
-        </p:txBody>
-      </p:sp>
-      <p:sp>
-        <p:nvSpPr>
-          <p:cNvPr id="25" name="TextBox 24"/>
-          <p:cNvSpPr txBox="1"/>
-          <p:nvPr/>
-        </p:nvSpPr>
-        <p:spPr>
-          <a:xfrm>
-            <a:off x="731520" y="6126480"/>
-            <a:ext cx="10972800" cy="365760"/>
-          </a:xfrm>
-          <a:prstGeom prst="rect">
-            <a:avLst/>
-          </a:prstGeom>
-          <a:noFill/>
-        </p:spPr>
-        <p:txBody>
-          <a:bodyPr wrap="square" lIns="0" rIns="0" tIns="0" bIns="0">
-            <a:spAutoFit/>
-          </a:bodyPr>
-          <a:lstStyle/>
-          <a:p>
-            <a:pPr algn="l"/>
-            <a:r>
-              <a:rPr sz="1100" b="0" i="1">
-                <a:solidFill>
-                  <a:srgbClr val="64748B"/>
-                </a:solidFill>
-                <a:latin typeface="Calibri"/>
-              </a:rPr>
-              <a:t>Diseño SaaS premium · tipografía Inter · paleta restringida · KPI cards con sombra sutil</a:t>
+              <a:t>06 / 08</a:t>
+            </a:r>
+          </a:p>
+        </p:txBody>
+      </p:sp>
+      <p:sp>
+        <p:nvSpPr>
+          <p:cNvPr id="32" name="TextBox 31"/>
+          <p:cNvSpPr txBox="1"/>
+          <p:nvPr/>
+        </p:nvSpPr>
+        <p:spPr>
+          <a:xfrm>
+            <a:off x="457200" y="6446520"/>
+            <a:ext cx="5486400" cy="274320"/>
+          </a:xfrm>
+          <a:prstGeom prst="rect">
+            <a:avLst/>
+          </a:prstGeom>
+          <a:noFill/>
+        </p:spPr>
+        <p:txBody>
+          <a:bodyPr wrap="square" lIns="0" rIns="0" tIns="0" bIns="0">
+            <a:spAutoFit/>
+          </a:bodyPr>
+          <a:lstStyle/>
+          <a:p>
+            <a:pPr algn="l"/>
+            <a:r>
+              <a:rPr sz="900" b="0" i="1">
+                <a:solidFill>
+                  <a:srgbClr val="10B981"/>
+                </a:solidFill>
+                <a:latin typeface="Consolas"/>
+                <a:hlinkClick r:id="rId2"/>
+              </a:rPr>
+              <a:t>fashion-ai-engine-app.streamlit.app</a:t>
             </a:r>
           </a:p>
         </p:txBody>
@@ -7674,125 +9025,20 @@
       <p:grpSpPr/>
       <p:sp>
         <p:nvSpPr>
-          <p:cNvPr id="2" name="TextBox 1"/>
-          <p:cNvSpPr txBox="1"/>
-          <p:nvPr/>
-        </p:nvSpPr>
-        <p:spPr>
-          <a:xfrm>
-            <a:off x="731520" y="457200"/>
-            <a:ext cx="10972800" cy="274320"/>
-          </a:xfrm>
-          <a:prstGeom prst="rect">
-            <a:avLst/>
-          </a:prstGeom>
-          <a:noFill/>
-        </p:spPr>
-        <p:txBody>
-          <a:bodyPr wrap="square" lIns="0" rIns="0" tIns="0" bIns="0">
-            <a:spAutoFit/>
-          </a:bodyPr>
-          <a:lstStyle/>
-          <a:p>
-            <a:pPr algn="l"/>
-            <a:r>
-              <a:rPr sz="1000" b="1" i="0">
-                <a:solidFill>
-                  <a:srgbClr val="10B981"/>
-                </a:solidFill>
-                <a:latin typeface="Calibri"/>
-              </a:rPr>
-              <a:t>SECCIÓN 6 · LIMITACIONES</a:t>
-            </a:r>
-          </a:p>
-        </p:txBody>
-      </p:sp>
-      <p:sp>
-        <p:nvSpPr>
-          <p:cNvPr id="3" name="TextBox 2"/>
-          <p:cNvSpPr txBox="1"/>
-          <p:nvPr/>
-        </p:nvSpPr>
-        <p:spPr>
-          <a:xfrm>
-            <a:off x="731520" y="777240"/>
-            <a:ext cx="10972800" cy="731520"/>
-          </a:xfrm>
-          <a:prstGeom prst="rect">
-            <a:avLst/>
-          </a:prstGeom>
-          <a:noFill/>
-        </p:spPr>
-        <p:txBody>
-          <a:bodyPr wrap="square" lIns="0" rIns="0" tIns="0" bIns="0">
-            <a:spAutoFit/>
-          </a:bodyPr>
-          <a:lstStyle/>
-          <a:p>
-            <a:pPr algn="l"/>
-            <a:r>
-              <a:rPr sz="2800" b="1" i="0">
-                <a:solidFill>
-                  <a:srgbClr val="0F172A"/>
-                </a:solidFill>
-                <a:latin typeface="Calibri"/>
-              </a:rPr>
-              <a:t>Lo que el proyecto NO hace (y por qué importa)</a:t>
-            </a:r>
-          </a:p>
-        </p:txBody>
-      </p:sp>
-      <p:cxnSp>
-        <p:nvCxnSpPr>
-          <p:cNvPr id="4" name="Connector 3"/>
-          <p:cNvCxnSpPr/>
-          <p:nvPr/>
-        </p:nvCxnSpPr>
-        <p:spPr>
-          <a:xfrm>
-            <a:off x="731520" y="1554480"/>
-            <a:ext cx="10698480" cy="0"/>
-          </a:xfrm>
-          <a:prstGeom prst="line">
-            <a:avLst/>
-          </a:prstGeom>
-          <a:ln w="12700">
-            <a:solidFill>
-              <a:srgbClr val="E2E8F0"/>
-            </a:solidFill>
-          </a:ln>
-        </p:spPr>
-        <p:style>
-          <a:lnRef idx="2">
-            <a:schemeClr val="accent1"/>
-          </a:lnRef>
-          <a:fillRef idx="0">
-            <a:schemeClr val="accent1"/>
-          </a:fillRef>
-          <a:effectRef idx="1">
-            <a:schemeClr val="accent1"/>
-          </a:effectRef>
-          <a:fontRef idx="minor">
-            <a:schemeClr val="tx1"/>
-          </a:fontRef>
-        </p:style>
-      </p:cxnSp>
-      <p:sp>
-        <p:nvSpPr>
-          <p:cNvPr id="5" name="Rectangle 4"/>
+          <p:cNvPr id="2" name="Rectangle 1"/>
           <p:cNvSpPr/>
           <p:nvPr/>
         </p:nvSpPr>
         <p:spPr>
           <a:xfrm>
-            <a:off x="731520" y="1920240"/>
-            <a:ext cx="54864" cy="914400"/>
+            <a:off x="0" y="0"/>
+            <a:ext cx="12191695" cy="6858000"/>
           </a:xfrm>
           <a:prstGeom prst="rect">
             <a:avLst/>
           </a:prstGeom>
           <a:solidFill>
-            <a:srgbClr val="F59E0B"/>
+            <a:srgbClr val="0F172A"/>
           </a:solidFill>
           <a:ln>
             <a:noFill/>
@@ -7823,90 +9069,20 @@
       </p:sp>
       <p:sp>
         <p:nvSpPr>
-          <p:cNvPr id="6" name="TextBox 5"/>
-          <p:cNvSpPr txBox="1"/>
-          <p:nvPr/>
-        </p:nvSpPr>
-        <p:spPr>
-          <a:xfrm>
-            <a:off x="960120" y="1920240"/>
-            <a:ext cx="10515600" cy="457200"/>
-          </a:xfrm>
-          <a:prstGeom prst="rect">
-            <a:avLst/>
-          </a:prstGeom>
-          <a:noFill/>
-        </p:spPr>
-        <p:txBody>
-          <a:bodyPr wrap="square" lIns="0" rIns="0" tIns="0" bIns="0">
-            <a:spAutoFit/>
-          </a:bodyPr>
-          <a:lstStyle/>
-          <a:p>
-            <a:pPr algn="l"/>
-            <a:r>
-              <a:rPr sz="1500" b="1" i="0">
-                <a:solidFill>
-                  <a:srgbClr val="0F172A"/>
-                </a:solidFill>
-                <a:latin typeface="Calibri"/>
-              </a:rPr>
-              <a:t>Labels de devolución semi-sintéticas</a:t>
-            </a:r>
-          </a:p>
-        </p:txBody>
-      </p:sp>
-      <p:sp>
-        <p:nvSpPr>
-          <p:cNvPr id="7" name="TextBox 6"/>
-          <p:cNvSpPr txBox="1"/>
-          <p:nvPr/>
-        </p:nvSpPr>
-        <p:spPr>
-          <a:xfrm>
-            <a:off x="960120" y="2331720"/>
-            <a:ext cx="10515600" cy="548640"/>
-          </a:xfrm>
-          <a:prstGeom prst="rect">
-            <a:avLst/>
-          </a:prstGeom>
-          <a:noFill/>
-        </p:spPr>
-        <p:txBody>
-          <a:bodyPr wrap="square" lIns="0" rIns="0" tIns="0" bIns="0">
-            <a:spAutoFit/>
-          </a:bodyPr>
-          <a:lstStyle/>
-          <a:p>
-            <a:pPr algn="l"/>
-            <a:r>
-              <a:rPr sz="1150" b="0" i="0">
-                <a:solidFill>
-                  <a:srgbClr val="1E293B"/>
-                </a:solidFill>
-                <a:latin typeface="Calibri"/>
-              </a:rPr>
-              <a:t>H&amp;M no publica devoluciones. El modelo aprende patrones realistas pero está sesgado a las tasas sectoriales asumidas. v2 con datos reales (ASOS) eliminaría esto.</a:t>
-            </a:r>
-          </a:p>
-        </p:txBody>
-      </p:sp>
-      <p:sp>
-        <p:nvSpPr>
-          <p:cNvPr id="8" name="Rectangle 7"/>
+          <p:cNvPr id="3" name="Rectangle 2"/>
           <p:cNvSpPr/>
           <p:nvPr/>
         </p:nvSpPr>
         <p:spPr>
           <a:xfrm>
-            <a:off x="731520" y="2971800"/>
-            <a:ext cx="54864" cy="914400"/>
+            <a:off x="0" y="0"/>
+            <a:ext cx="12191695" cy="137160"/>
           </a:xfrm>
           <a:prstGeom prst="rect">
             <a:avLst/>
           </a:prstGeom>
           <a:solidFill>
-            <a:srgbClr val="F59E0B"/>
+            <a:srgbClr val="10B981"/>
           </a:solidFill>
           <a:ln>
             <a:noFill/>
@@ -7937,35 +9113,211 @@
       </p:sp>
       <p:sp>
         <p:nvSpPr>
+          <p:cNvPr id="4" name="TextBox 3"/>
+          <p:cNvSpPr txBox="1"/>
+          <p:nvPr/>
+        </p:nvSpPr>
+        <p:spPr>
+          <a:xfrm>
+            <a:off x="457200" y="731520"/>
+            <a:ext cx="10972800" cy="365760"/>
+          </a:xfrm>
+          <a:prstGeom prst="rect">
+            <a:avLst/>
+          </a:prstGeom>
+          <a:noFill/>
+        </p:spPr>
+        <p:txBody>
+          <a:bodyPr wrap="square" lIns="0" rIns="0" tIns="0" bIns="0">
+            <a:spAutoFit/>
+          </a:bodyPr>
+          <a:lstStyle/>
+          <a:p>
+            <a:pPr algn="ctr"/>
+            <a:r>
+              <a:rPr sz="1100" b="1" i="0">
+                <a:solidFill>
+                  <a:srgbClr val="10B981"/>
+                </a:solidFill>
+                <a:latin typeface="Calibri"/>
+              </a:rPr>
+              <a:t>DEMO EN VIVO</a:t>
+            </a:r>
+          </a:p>
+        </p:txBody>
+      </p:sp>
+      <p:sp>
+        <p:nvSpPr>
+          <p:cNvPr id="5" name="TextBox 4"/>
+          <p:cNvSpPr txBox="1"/>
+          <p:nvPr/>
+        </p:nvSpPr>
+        <p:spPr>
+          <a:xfrm>
+            <a:off x="457200" y="1280160"/>
+            <a:ext cx="11247120" cy="914400"/>
+          </a:xfrm>
+          <a:prstGeom prst="rect">
+            <a:avLst/>
+          </a:prstGeom>
+          <a:noFill/>
+        </p:spPr>
+        <p:txBody>
+          <a:bodyPr wrap="square" lIns="0" rIns="0" tIns="0" bIns="0">
+            <a:spAutoFit/>
+          </a:bodyPr>
+          <a:lstStyle/>
+          <a:p>
+            <a:pPr algn="ctr"/>
+            <a:r>
+              <a:rPr sz="4200" b="1" i="0">
+                <a:solidFill>
+                  <a:srgbClr val="FFFFFF"/>
+                </a:solidFill>
+                <a:latin typeface="Consolas"/>
+                <a:hlinkClick r:id="rId2"/>
+              </a:rPr>
+              <a:t>fashion-ai-engine-app.streamlit.app</a:t>
+            </a:r>
+          </a:p>
+        </p:txBody>
+      </p:sp>
+      <p:sp>
+        <p:nvSpPr>
+          <p:cNvPr id="6" name="TextBox 5"/>
+          <p:cNvSpPr txBox="1"/>
+          <p:nvPr/>
+        </p:nvSpPr>
+        <p:spPr>
+          <a:xfrm>
+            <a:off x="457200" y="2286000"/>
+            <a:ext cx="11247120" cy="365760"/>
+          </a:xfrm>
+          <a:prstGeom prst="rect">
+            <a:avLst/>
+          </a:prstGeom>
+          <a:noFill/>
+        </p:spPr>
+        <p:txBody>
+          <a:bodyPr wrap="square" lIns="0" rIns="0" tIns="0" bIns="0">
+            <a:spAutoFit/>
+          </a:bodyPr>
+          <a:lstStyle/>
+          <a:p>
+            <a:pPr algn="ctr"/>
+            <a:r>
+              <a:rPr sz="1200" b="0" i="1">
+                <a:solidFill>
+                  <a:srgbClr val="CBD5E1"/>
+                </a:solidFill>
+                <a:latin typeface="Calibri"/>
+              </a:rPr>
+              <a:t>Click en la URL para abrir la app</a:t>
+            </a:r>
+          </a:p>
+        </p:txBody>
+      </p:sp>
+      <p:sp>
+        <p:nvSpPr>
+          <p:cNvPr id="7" name="TextBox 6"/>
+          <p:cNvSpPr txBox="1"/>
+          <p:nvPr/>
+        </p:nvSpPr>
+        <p:spPr>
+          <a:xfrm>
+            <a:off x="1371600" y="3246120"/>
+            <a:ext cx="640080" cy="274320"/>
+          </a:xfrm>
+          <a:prstGeom prst="rect">
+            <a:avLst/>
+          </a:prstGeom>
+          <a:noFill/>
+        </p:spPr>
+        <p:txBody>
+          <a:bodyPr wrap="square" lIns="0" rIns="0" tIns="0" bIns="0">
+            <a:spAutoFit/>
+          </a:bodyPr>
+          <a:lstStyle/>
+          <a:p>
+            <a:pPr algn="l"/>
+            <a:r>
+              <a:rPr sz="1200" b="1" i="0">
+                <a:solidFill>
+                  <a:srgbClr val="10B981"/>
+                </a:solidFill>
+                <a:latin typeface="Calibri"/>
+              </a:rPr>
+              <a:t>01</a:t>
+            </a:r>
+          </a:p>
+        </p:txBody>
+      </p:sp>
+      <p:sp>
+        <p:nvSpPr>
+          <p:cNvPr id="8" name="TextBox 7"/>
+          <p:cNvSpPr txBox="1"/>
+          <p:nvPr/>
+        </p:nvSpPr>
+        <p:spPr>
+          <a:xfrm>
+            <a:off x="2194560" y="3200400"/>
+            <a:ext cx="3657600" cy="320040"/>
+          </a:xfrm>
+          <a:prstGeom prst="rect">
+            <a:avLst/>
+          </a:prstGeom>
+          <a:noFill/>
+        </p:spPr>
+        <p:txBody>
+          <a:bodyPr wrap="square" lIns="0" rIns="0" tIns="0" bIns="0">
+            <a:spAutoFit/>
+          </a:bodyPr>
+          <a:lstStyle/>
+          <a:p>
+            <a:pPr algn="l"/>
+            <a:r>
+              <a:rPr sz="1400" b="1" i="0">
+                <a:solidFill>
+                  <a:srgbClr val="FFFFFF"/>
+                </a:solidFill>
+                <a:latin typeface="Calibri"/>
+              </a:rPr>
+              <a:t>Executive Dashboard</a:t>
+            </a:r>
+          </a:p>
+        </p:txBody>
+      </p:sp>
+      <p:sp>
+        <p:nvSpPr>
           <p:cNvPr id="9" name="TextBox 8"/>
           <p:cNvSpPr txBox="1"/>
           <p:nvPr/>
         </p:nvSpPr>
         <p:spPr>
           <a:xfrm>
-            <a:off x="960120" y="2971800"/>
-            <a:ext cx="10515600" cy="457200"/>
-          </a:xfrm>
-          <a:prstGeom prst="rect">
-            <a:avLst/>
-          </a:prstGeom>
-          <a:noFill/>
-        </p:spPr>
-        <p:txBody>
-          <a:bodyPr wrap="square" lIns="0" rIns="0" tIns="0" bIns="0">
-            <a:spAutoFit/>
-          </a:bodyPr>
-          <a:lstStyle/>
-          <a:p>
-            <a:pPr algn="l"/>
-            <a:r>
-              <a:rPr sz="1500" b="1" i="0">
-                <a:solidFill>
-                  <a:srgbClr val="0F172A"/>
-                </a:solidFill>
-                <a:latin typeface="Calibri"/>
-              </a:rPr>
-              <a:t>Simulador estático</a:t>
+            <a:off x="5943600" y="3246120"/>
+            <a:ext cx="5486400" cy="274320"/>
+          </a:xfrm>
+          <a:prstGeom prst="rect">
+            <a:avLst/>
+          </a:prstGeom>
+          <a:noFill/>
+        </p:spPr>
+        <p:txBody>
+          <a:bodyPr wrap="square" lIns="0" rIns="0" tIns="0" bIns="0">
+            <a:spAutoFit/>
+          </a:bodyPr>
+          <a:lstStyle/>
+          <a:p>
+            <a:pPr algn="l"/>
+            <a:r>
+              <a:rPr sz="1100" b="0" i="0">
+                <a:solidFill>
+                  <a:srgbClr val="CBD5E1"/>
+                </a:solidFill>
+                <a:latin typeface="Calibri"/>
+              </a:rPr>
+              <a:t>KPIs · sensibilidad α</a:t>
             </a:r>
           </a:p>
         </p:txBody>
@@ -7978,74 +9330,65 @@
         </p:nvSpPr>
         <p:spPr>
           <a:xfrm>
-            <a:off x="960120" y="3383280"/>
-            <a:ext cx="10515600" cy="548640"/>
-          </a:xfrm>
-          <a:prstGeom prst="rect">
-            <a:avLst/>
-          </a:prstGeom>
-          <a:noFill/>
-        </p:spPr>
-        <p:txBody>
-          <a:bodyPr wrap="square" lIns="0" rIns="0" tIns="0" bIns="0">
-            <a:spAutoFit/>
-          </a:bodyPr>
-          <a:lstStyle/>
-          <a:p>
-            <a:pPr algn="l"/>
-            <a:r>
-              <a:rPr sz="1150" b="0" i="0">
-                <a:solidFill>
-                  <a:srgbClr val="1E293B"/>
-                </a:solidFill>
-                <a:latin typeface="Calibri"/>
-              </a:rPr>
-              <a:t>No modela elasticidad de precio, sustitución entre productos ni dinámicas inter-temporales de inventario.</a:t>
-            </a:r>
-          </a:p>
-        </p:txBody>
-      </p:sp>
-      <p:sp>
-        <p:nvSpPr>
-          <p:cNvPr id="11" name="Rectangle 10"/>
-          <p:cNvSpPr/>
-          <p:nvPr/>
-        </p:nvSpPr>
-        <p:spPr>
-          <a:xfrm>
-            <a:off x="731520" y="4023360"/>
-            <a:ext cx="54864" cy="914400"/>
-          </a:xfrm>
-          <a:prstGeom prst="rect">
-            <a:avLst/>
-          </a:prstGeom>
-          <a:solidFill>
-            <a:srgbClr val="F59E0B"/>
-          </a:solidFill>
-          <a:ln>
-            <a:noFill/>
-          </a:ln>
-          <a:effectLst/>
-        </p:spPr>
-        <p:style>
-          <a:lnRef idx="1">
-            <a:schemeClr val="accent1"/>
-          </a:lnRef>
-          <a:fillRef idx="3">
-            <a:schemeClr val="accent1"/>
-          </a:fillRef>
-          <a:effectRef idx="2">
-            <a:schemeClr val="accent1"/>
-          </a:effectRef>
-          <a:fontRef idx="minor">
-            <a:schemeClr val="lt1"/>
-          </a:fontRef>
-        </p:style>
-        <p:txBody>
-          <a:bodyPr rtlCol="0" anchor="ctr"/>
-          <a:lstStyle/>
-          <a:p>
-            <a:pPr algn="ctr"/>
+            <a:off x="1371600" y="3840480"/>
+            <a:ext cx="640080" cy="274320"/>
+          </a:xfrm>
+          <a:prstGeom prst="rect">
+            <a:avLst/>
+          </a:prstGeom>
+          <a:noFill/>
+        </p:spPr>
+        <p:txBody>
+          <a:bodyPr wrap="square" lIns="0" rIns="0" tIns="0" bIns="0">
+            <a:spAutoFit/>
+          </a:bodyPr>
+          <a:lstStyle/>
+          <a:p>
+            <a:pPr algn="l"/>
+            <a:r>
+              <a:rPr sz="1200" b="1" i="0">
+                <a:solidFill>
+                  <a:srgbClr val="10B981"/>
+                </a:solidFill>
+                <a:latin typeface="Calibri"/>
+              </a:rPr>
+              <a:t>02</a:t>
+            </a:r>
+          </a:p>
+        </p:txBody>
+      </p:sp>
+      <p:sp>
+        <p:nvSpPr>
+          <p:cNvPr id="11" name="TextBox 10"/>
+          <p:cNvSpPr txBox="1"/>
+          <p:nvPr/>
+        </p:nvSpPr>
+        <p:spPr>
+          <a:xfrm>
+            <a:off x="2194560" y="3794760"/>
+            <a:ext cx="3657600" cy="320040"/>
+          </a:xfrm>
+          <a:prstGeom prst="rect">
+            <a:avLst/>
+          </a:prstGeom>
+          <a:noFill/>
+        </p:spPr>
+        <p:txBody>
+          <a:bodyPr wrap="square" lIns="0" rIns="0" tIns="0" bIns="0">
+            <a:spAutoFit/>
+          </a:bodyPr>
+          <a:lstStyle/>
+          <a:p>
+            <a:pPr algn="l"/>
+            <a:r>
+              <a:rPr sz="1400" b="1" i="0">
+                <a:solidFill>
+                  <a:srgbClr val="FFFFFF"/>
+                </a:solidFill>
+                <a:latin typeface="Calibri"/>
+              </a:rPr>
+              <a:t>Decision Simulator</a:t>
+            </a:r>
           </a:p>
         </p:txBody>
       </p:sp>
@@ -8057,29 +9400,29 @@
         </p:nvSpPr>
         <p:spPr>
           <a:xfrm>
-            <a:off x="960120" y="4023360"/>
-            <a:ext cx="10515600" cy="457200"/>
-          </a:xfrm>
-          <a:prstGeom prst="rect">
-            <a:avLst/>
-          </a:prstGeom>
-          <a:noFill/>
-        </p:spPr>
-        <p:txBody>
-          <a:bodyPr wrap="square" lIns="0" rIns="0" tIns="0" bIns="0">
-            <a:spAutoFit/>
-          </a:bodyPr>
-          <a:lstStyle/>
-          <a:p>
-            <a:pPr algn="l"/>
-            <a:r>
-              <a:rPr sz="1500" b="1" i="0">
-                <a:solidFill>
-                  <a:srgbClr val="0F172A"/>
-                </a:solidFill>
-                <a:latin typeface="Calibri"/>
-              </a:rPr>
-              <a:t>Cap de demanda hardcoded</a:t>
+            <a:off x="5943600" y="3840480"/>
+            <a:ext cx="5486400" cy="274320"/>
+          </a:xfrm>
+          <a:prstGeom prst="rect">
+            <a:avLst/>
+          </a:prstGeom>
+          <a:noFill/>
+        </p:spPr>
+        <p:txBody>
+          <a:bodyPr wrap="square" lIns="0" rIns="0" tIns="0" bIns="0">
+            <a:spAutoFit/>
+          </a:bodyPr>
+          <a:lstStyle/>
+          <a:p>
+            <a:pPr algn="l"/>
+            <a:r>
+              <a:rPr sz="1100" b="0" i="0">
+                <a:solidFill>
+                  <a:srgbClr val="CBD5E1"/>
+                </a:solidFill>
+                <a:latin typeface="Calibri"/>
+              </a:rPr>
+              <a:t>Sliders interactivos · P&amp;L en vivo</a:t>
             </a:r>
           </a:p>
         </p:txBody>
@@ -8092,74 +9435,65 @@
         </p:nvSpPr>
         <p:spPr>
           <a:xfrm>
-            <a:off x="960120" y="4434840"/>
-            <a:ext cx="10515600" cy="548640"/>
-          </a:xfrm>
-          <a:prstGeom prst="rect">
-            <a:avLst/>
-          </a:prstGeom>
-          <a:noFill/>
-        </p:spPr>
-        <p:txBody>
-          <a:bodyPr wrap="square" lIns="0" rIns="0" tIns="0" bIns="0">
-            <a:spAutoFit/>
-          </a:bodyPr>
-          <a:lstStyle/>
-          <a:p>
-            <a:pPr algn="l"/>
-            <a:r>
-              <a:rPr sz="1150" b="0" i="0">
-                <a:solidFill>
-                  <a:srgbClr val="1E293B"/>
-                </a:solidFill>
-                <a:latin typeface="Calibri"/>
-              </a:rPr>
-              <a:t>El multiplicador 2,5× es un parámetro. Una calibración rigurosa requeriría análisis adicional.</a:t>
-            </a:r>
-          </a:p>
-        </p:txBody>
-      </p:sp>
-      <p:sp>
-        <p:nvSpPr>
-          <p:cNvPr id="14" name="Rectangle 13"/>
-          <p:cNvSpPr/>
-          <p:nvPr/>
-        </p:nvSpPr>
-        <p:spPr>
-          <a:xfrm>
-            <a:off x="731520" y="5074920"/>
-            <a:ext cx="54864" cy="914400"/>
-          </a:xfrm>
-          <a:prstGeom prst="rect">
-            <a:avLst/>
-          </a:prstGeom>
-          <a:solidFill>
-            <a:srgbClr val="F59E0B"/>
-          </a:solidFill>
-          <a:ln>
-            <a:noFill/>
-          </a:ln>
-          <a:effectLst/>
-        </p:spPr>
-        <p:style>
-          <a:lnRef idx="1">
-            <a:schemeClr val="accent1"/>
-          </a:lnRef>
-          <a:fillRef idx="3">
-            <a:schemeClr val="accent1"/>
-          </a:fillRef>
-          <a:effectRef idx="2">
-            <a:schemeClr val="accent1"/>
-          </a:effectRef>
-          <a:fontRef idx="minor">
-            <a:schemeClr val="lt1"/>
-          </a:fontRef>
-        </p:style>
-        <p:txBody>
-          <a:bodyPr rtlCol="0" anchor="ctr"/>
-          <a:lstStyle/>
-          <a:p>
-            <a:pPr algn="ctr"/>
+            <a:off x="1371600" y="4434840"/>
+            <a:ext cx="640080" cy="274320"/>
+          </a:xfrm>
+          <a:prstGeom prst="rect">
+            <a:avLst/>
+          </a:prstGeom>
+          <a:noFill/>
+        </p:spPr>
+        <p:txBody>
+          <a:bodyPr wrap="square" lIns="0" rIns="0" tIns="0" bIns="0">
+            <a:spAutoFit/>
+          </a:bodyPr>
+          <a:lstStyle/>
+          <a:p>
+            <a:pPr algn="l"/>
+            <a:r>
+              <a:rPr sz="1200" b="1" i="0">
+                <a:solidFill>
+                  <a:srgbClr val="10B981"/>
+                </a:solidFill>
+                <a:latin typeface="Calibri"/>
+              </a:rPr>
+              <a:t>03</a:t>
+            </a:r>
+          </a:p>
+        </p:txBody>
+      </p:sp>
+      <p:sp>
+        <p:nvSpPr>
+          <p:cNvPr id="14" name="TextBox 13"/>
+          <p:cNvSpPr txBox="1"/>
+          <p:nvPr/>
+        </p:nvSpPr>
+        <p:spPr>
+          <a:xfrm>
+            <a:off x="2194560" y="4389120"/>
+            <a:ext cx="3657600" cy="320040"/>
+          </a:xfrm>
+          <a:prstGeom prst="rect">
+            <a:avLst/>
+          </a:prstGeom>
+          <a:noFill/>
+        </p:spPr>
+        <p:txBody>
+          <a:bodyPr wrap="square" lIns="0" rIns="0" tIns="0" bIns="0">
+            <a:spAutoFit/>
+          </a:bodyPr>
+          <a:lstStyle/>
+          <a:p>
+            <a:pPr algn="l"/>
+            <a:r>
+              <a:rPr sz="1400" b="1" i="0">
+                <a:solidFill>
+                  <a:srgbClr val="FFFFFF"/>
+                </a:solidFill>
+                <a:latin typeface="Calibri"/>
+              </a:rPr>
+              <a:t>Style Intelligence</a:t>
+            </a:r>
           </a:p>
         </p:txBody>
       </p:sp>
@@ -8171,29 +9505,29 @@
         </p:nvSpPr>
         <p:spPr>
           <a:xfrm>
-            <a:off x="960120" y="5074920"/>
-            <a:ext cx="10515600" cy="457200"/>
-          </a:xfrm>
-          <a:prstGeom prst="rect">
-            <a:avLst/>
-          </a:prstGeom>
-          <a:noFill/>
-        </p:spPr>
-        <p:txBody>
-          <a:bodyPr wrap="square" lIns="0" rIns="0" tIns="0" bIns="0">
-            <a:spAutoFit/>
-          </a:bodyPr>
-          <a:lstStyle/>
-          <a:p>
-            <a:pPr algn="l"/>
-            <a:r>
-              <a:rPr sz="1500" b="1" i="0">
-                <a:solidFill>
-                  <a:srgbClr val="0F172A"/>
-                </a:solidFill>
-                <a:latin typeface="Calibri"/>
-              </a:rPr>
-              <a:t>Recomputación interpolada</a:t>
+            <a:off x="5943600" y="4434840"/>
+            <a:ext cx="5486400" cy="274320"/>
+          </a:xfrm>
+          <a:prstGeom prst="rect">
+            <a:avLst/>
+          </a:prstGeom>
+          <a:noFill/>
+        </p:spPr>
+        <p:txBody>
+          <a:bodyPr wrap="square" lIns="0" rIns="0" tIns="0" bIns="0">
+            <a:spAutoFit/>
+          </a:bodyPr>
+          <a:lstStyle/>
+          <a:p>
+            <a:pPr algn="l"/>
+            <a:r>
+              <a:rPr sz="1100" b="0" i="0">
+                <a:solidFill>
+                  <a:srgbClr val="CBD5E1"/>
+                </a:solidFill>
+                <a:latin typeface="Calibri"/>
+              </a:rPr>
+              <a:t>Heatmap garment × color</a:t>
             </a:r>
           </a:p>
         </p:txBody>
@@ -8206,29 +9540,239 @@
         </p:nvSpPr>
         <p:spPr>
           <a:xfrm>
-            <a:off x="960120" y="5486400"/>
-            <a:ext cx="10515600" cy="548640"/>
-          </a:xfrm>
-          <a:prstGeom prst="rect">
-            <a:avLst/>
-          </a:prstGeom>
-          <a:noFill/>
-        </p:spPr>
-        <p:txBody>
-          <a:bodyPr wrap="square" lIns="0" rIns="0" tIns="0" bIns="0">
-            <a:spAutoFit/>
-          </a:bodyPr>
-          <a:lstStyle/>
-          <a:p>
-            <a:pPr algn="l"/>
-            <a:r>
-              <a:rPr sz="1150" b="0" i="0">
-                <a:solidFill>
-                  <a:srgbClr val="1E293B"/>
-                </a:solidFill>
-                <a:latin typeface="Calibri"/>
-              </a:rPr>
-              <a:t>Los sliders del simulador interpolan sobre la curva precomputada. Una v2 desacoplaría el cálculo.</a:t>
+            <a:off x="1371600" y="5029200"/>
+            <a:ext cx="640080" cy="274320"/>
+          </a:xfrm>
+          <a:prstGeom prst="rect">
+            <a:avLst/>
+          </a:prstGeom>
+          <a:noFill/>
+        </p:spPr>
+        <p:txBody>
+          <a:bodyPr wrap="square" lIns="0" rIns="0" tIns="0" bIns="0">
+            <a:spAutoFit/>
+          </a:bodyPr>
+          <a:lstStyle/>
+          <a:p>
+            <a:pPr algn="l"/>
+            <a:r>
+              <a:rPr sz="1200" b="1" i="0">
+                <a:solidFill>
+                  <a:srgbClr val="10B981"/>
+                </a:solidFill>
+                <a:latin typeface="Calibri"/>
+              </a:rPr>
+              <a:t>04</a:t>
+            </a:r>
+          </a:p>
+        </p:txBody>
+      </p:sp>
+      <p:sp>
+        <p:nvSpPr>
+          <p:cNvPr id="17" name="TextBox 16"/>
+          <p:cNvSpPr txBox="1"/>
+          <p:nvPr/>
+        </p:nvSpPr>
+        <p:spPr>
+          <a:xfrm>
+            <a:off x="2194560" y="4983480"/>
+            <a:ext cx="3657600" cy="320040"/>
+          </a:xfrm>
+          <a:prstGeom prst="rect">
+            <a:avLst/>
+          </a:prstGeom>
+          <a:noFill/>
+        </p:spPr>
+        <p:txBody>
+          <a:bodyPr wrap="square" lIns="0" rIns="0" tIns="0" bIns="0">
+            <a:spAutoFit/>
+          </a:bodyPr>
+          <a:lstStyle/>
+          <a:p>
+            <a:pPr algn="l"/>
+            <a:r>
+              <a:rPr sz="1400" b="1" i="0">
+                <a:solidFill>
+                  <a:srgbClr val="FFFFFF"/>
+                </a:solidFill>
+                <a:latin typeface="Calibri"/>
+              </a:rPr>
+              <a:t>Returns Risk</a:t>
+            </a:r>
+          </a:p>
+        </p:txBody>
+      </p:sp>
+      <p:sp>
+        <p:nvSpPr>
+          <p:cNvPr id="18" name="TextBox 17"/>
+          <p:cNvSpPr txBox="1"/>
+          <p:nvPr/>
+        </p:nvSpPr>
+        <p:spPr>
+          <a:xfrm>
+            <a:off x="5943600" y="5029200"/>
+            <a:ext cx="5486400" cy="274320"/>
+          </a:xfrm>
+          <a:prstGeom prst="rect">
+            <a:avLst/>
+          </a:prstGeom>
+          <a:noFill/>
+        </p:spPr>
+        <p:txBody>
+          <a:bodyPr wrap="square" lIns="0" rIns="0" tIns="0" bIns="0">
+            <a:spAutoFit/>
+          </a:bodyPr>
+          <a:lstStyle/>
+          <a:p>
+            <a:pPr algn="l"/>
+            <a:r>
+              <a:rPr sz="1100" b="0" i="0">
+                <a:solidFill>
+                  <a:srgbClr val="CBD5E1"/>
+                </a:solidFill>
+                <a:latin typeface="Calibri"/>
+              </a:rPr>
+              <a:t>Calibración · top 50 productos</a:t>
+            </a:r>
+          </a:p>
+        </p:txBody>
+      </p:sp>
+      <p:sp>
+        <p:nvSpPr>
+          <p:cNvPr id="19" name="TextBox 18"/>
+          <p:cNvSpPr txBox="1"/>
+          <p:nvPr/>
+        </p:nvSpPr>
+        <p:spPr>
+          <a:xfrm>
+            <a:off x="1371600" y="5623559"/>
+            <a:ext cx="640080" cy="274320"/>
+          </a:xfrm>
+          <a:prstGeom prst="rect">
+            <a:avLst/>
+          </a:prstGeom>
+          <a:noFill/>
+        </p:spPr>
+        <p:txBody>
+          <a:bodyPr wrap="square" lIns="0" rIns="0" tIns="0" bIns="0">
+            <a:spAutoFit/>
+          </a:bodyPr>
+          <a:lstStyle/>
+          <a:p>
+            <a:pPr algn="l"/>
+            <a:r>
+              <a:rPr sz="1200" b="1" i="0">
+                <a:solidFill>
+                  <a:srgbClr val="10B981"/>
+                </a:solidFill>
+                <a:latin typeface="Calibri"/>
+              </a:rPr>
+              <a:t>05</a:t>
+            </a:r>
+          </a:p>
+        </p:txBody>
+      </p:sp>
+      <p:sp>
+        <p:nvSpPr>
+          <p:cNvPr id="20" name="TextBox 19"/>
+          <p:cNvSpPr txBox="1"/>
+          <p:nvPr/>
+        </p:nvSpPr>
+        <p:spPr>
+          <a:xfrm>
+            <a:off x="2194560" y="5577840"/>
+            <a:ext cx="3657600" cy="320040"/>
+          </a:xfrm>
+          <a:prstGeom prst="rect">
+            <a:avLst/>
+          </a:prstGeom>
+          <a:noFill/>
+        </p:spPr>
+        <p:txBody>
+          <a:bodyPr wrap="square" lIns="0" rIns="0" tIns="0" bIns="0">
+            <a:spAutoFit/>
+          </a:bodyPr>
+          <a:lstStyle/>
+          <a:p>
+            <a:pPr algn="l"/>
+            <a:r>
+              <a:rPr sz="1400" b="1" i="0">
+                <a:solidFill>
+                  <a:srgbClr val="FFFFFF"/>
+                </a:solidFill>
+                <a:latin typeface="Calibri"/>
+              </a:rPr>
+              <a:t>Demand Explorer</a:t>
+            </a:r>
+          </a:p>
+        </p:txBody>
+      </p:sp>
+      <p:sp>
+        <p:nvSpPr>
+          <p:cNvPr id="21" name="TextBox 20"/>
+          <p:cNvSpPr txBox="1"/>
+          <p:nvPr/>
+        </p:nvSpPr>
+        <p:spPr>
+          <a:xfrm>
+            <a:off x="5943600" y="5623559"/>
+            <a:ext cx="5486400" cy="274320"/>
+          </a:xfrm>
+          <a:prstGeom prst="rect">
+            <a:avLst/>
+          </a:prstGeom>
+          <a:noFill/>
+        </p:spPr>
+        <p:txBody>
+          <a:bodyPr wrap="square" lIns="0" rIns="0" tIns="0" bIns="0">
+            <a:spAutoFit/>
+          </a:bodyPr>
+          <a:lstStyle/>
+          <a:p>
+            <a:pPr algn="l"/>
+            <a:r>
+              <a:rPr sz="1100" b="0" i="0">
+                <a:solidFill>
+                  <a:srgbClr val="CBD5E1"/>
+                </a:solidFill>
+                <a:latin typeface="Calibri"/>
+              </a:rPr>
+              <a:t>Forecast vs real por SKU</a:t>
+            </a:r>
+          </a:p>
+        </p:txBody>
+      </p:sp>
+      <p:sp>
+        <p:nvSpPr>
+          <p:cNvPr id="22" name="TextBox 21"/>
+          <p:cNvSpPr txBox="1"/>
+          <p:nvPr/>
+        </p:nvSpPr>
+        <p:spPr>
+          <a:xfrm>
+            <a:off x="10972800" y="6446520"/>
+            <a:ext cx="914400" cy="274320"/>
+          </a:xfrm>
+          <a:prstGeom prst="rect">
+            <a:avLst/>
+          </a:prstGeom>
+          <a:noFill/>
+        </p:spPr>
+        <p:txBody>
+          <a:bodyPr wrap="square" lIns="0" rIns="0" tIns="0" bIns="0">
+            <a:spAutoFit/>
+          </a:bodyPr>
+          <a:lstStyle/>
+          <a:p>
+            <a:pPr algn="r"/>
+            <a:r>
+              <a:rPr sz="900" b="0" i="1">
+                <a:solidFill>
+                  <a:srgbClr val="CBD5E1"/>
+                </a:solidFill>
+                <a:latin typeface="Calibri"/>
+              </a:rPr>
+              <a:t>07 / 08</a:t>
             </a:r>
           </a:p>
         </p:txBody>
@@ -8253,154 +9797,58 @@
       <p:grpSpPr/>
       <p:sp>
         <p:nvSpPr>
-          <p:cNvPr id="2" name="TextBox 1"/>
-          <p:cNvSpPr txBox="1"/>
-          <p:nvPr/>
-        </p:nvSpPr>
-        <p:spPr>
-          <a:xfrm>
-            <a:off x="731520" y="457200"/>
-            <a:ext cx="10972800" cy="274320"/>
-          </a:xfrm>
-          <a:prstGeom prst="rect">
-            <a:avLst/>
-          </a:prstGeom>
-          <a:noFill/>
-        </p:spPr>
-        <p:txBody>
-          <a:bodyPr wrap="square" lIns="0" rIns="0" tIns="0" bIns="0">
-            <a:spAutoFit/>
-          </a:bodyPr>
-          <a:lstStyle/>
-          <a:p>
-            <a:pPr algn="l"/>
-            <a:r>
-              <a:rPr sz="1000" b="1" i="0">
-                <a:solidFill>
-                  <a:srgbClr val="10B981"/>
-                </a:solidFill>
-                <a:latin typeface="Calibri"/>
-              </a:rPr>
-              <a:t>SECCIÓN 6 · PRÓXIMOS PASOS</a:t>
-            </a:r>
-          </a:p>
-        </p:txBody>
-      </p:sp>
-      <p:sp>
-        <p:nvSpPr>
-          <p:cNvPr id="3" name="TextBox 2"/>
-          <p:cNvSpPr txBox="1"/>
-          <p:nvPr/>
-        </p:nvSpPr>
-        <p:spPr>
-          <a:xfrm>
-            <a:off x="731520" y="777240"/>
-            <a:ext cx="10972800" cy="731520"/>
-          </a:xfrm>
-          <a:prstGeom prst="rect">
-            <a:avLst/>
-          </a:prstGeom>
-          <a:noFill/>
-        </p:spPr>
-        <p:txBody>
-          <a:bodyPr wrap="square" lIns="0" rIns="0" tIns="0" bIns="0">
-            <a:spAutoFit/>
-          </a:bodyPr>
-          <a:lstStyle/>
-          <a:p>
-            <a:pPr algn="l"/>
-            <a:r>
-              <a:rPr sz="2800" b="1" i="0">
-                <a:solidFill>
-                  <a:srgbClr val="0F172A"/>
-                </a:solidFill>
-                <a:latin typeface="Calibri"/>
-              </a:rPr>
-              <a:t>Roadmap v2 y conclusión</a:t>
-            </a:r>
-          </a:p>
-        </p:txBody>
-      </p:sp>
-      <p:cxnSp>
-        <p:nvCxnSpPr>
-          <p:cNvPr id="4" name="Connector 3"/>
-          <p:cNvCxnSpPr/>
-          <p:nvPr/>
-        </p:nvCxnSpPr>
-        <p:spPr>
-          <a:xfrm>
-            <a:off x="731520" y="1554480"/>
-            <a:ext cx="10698480" cy="0"/>
-          </a:xfrm>
-          <a:prstGeom prst="line">
-            <a:avLst/>
-          </a:prstGeom>
-          <a:ln w="12700">
-            <a:solidFill>
-              <a:srgbClr val="E2E8F0"/>
-            </a:solidFill>
+          <p:cNvPr id="2" name="Rectangle 1"/>
+          <p:cNvSpPr/>
+          <p:nvPr/>
+        </p:nvSpPr>
+        <p:spPr>
+          <a:xfrm>
+            <a:off x="0" y="0"/>
+            <a:ext cx="12191695" cy="6858000"/>
+          </a:xfrm>
+          <a:prstGeom prst="rect">
+            <a:avLst/>
+          </a:prstGeom>
+          <a:solidFill>
+            <a:srgbClr val="FFFFFF"/>
+          </a:solidFill>
+          <a:ln>
+            <a:noFill/>
           </a:ln>
+          <a:effectLst/>
         </p:spPr>
         <p:style>
-          <a:lnRef idx="2">
+          <a:lnRef idx="1">
             <a:schemeClr val="accent1"/>
           </a:lnRef>
-          <a:fillRef idx="0">
+          <a:fillRef idx="3">
             <a:schemeClr val="accent1"/>
           </a:fillRef>
-          <a:effectRef idx="1">
+          <a:effectRef idx="2">
             <a:schemeClr val="accent1"/>
           </a:effectRef>
           <a:fontRef idx="minor">
-            <a:schemeClr val="tx1"/>
+            <a:schemeClr val="lt1"/>
           </a:fontRef>
         </p:style>
-      </p:cxnSp>
-      <p:sp>
-        <p:nvSpPr>
-          <p:cNvPr id="5" name="TextBox 4"/>
-          <p:cNvSpPr txBox="1"/>
-          <p:nvPr/>
-        </p:nvSpPr>
-        <p:spPr>
-          <a:xfrm>
-            <a:off x="731520" y="1828800"/>
-            <a:ext cx="4572000" cy="457200"/>
-          </a:xfrm>
-          <a:prstGeom prst="rect">
-            <a:avLst/>
-          </a:prstGeom>
-          <a:noFill/>
-        </p:spPr>
-        <p:txBody>
-          <a:bodyPr wrap="square" lIns="0" rIns="0" tIns="0" bIns="0">
-            <a:spAutoFit/>
-          </a:bodyPr>
-          <a:lstStyle/>
-          <a:p>
-            <a:pPr algn="l"/>
-            <a:r>
-              <a:rPr sz="1800" b="1" i="0">
-                <a:solidFill>
-                  <a:srgbClr val="0F172A"/>
-                </a:solidFill>
-                <a:latin typeface="Calibri"/>
-              </a:rPr>
-              <a:t>v2 — Lo que mejorar</a:t>
-            </a:r>
-          </a:p>
-        </p:txBody>
-      </p:sp>
-      <p:sp>
-        <p:nvSpPr>
-          <p:cNvPr id="6" name="Rectangle 5"/>
+        <p:txBody>
+          <a:bodyPr rtlCol="0" anchor="ctr"/>
+          <a:lstStyle/>
+          <a:p>
+            <a:pPr algn="ctr"/>
+          </a:p>
+        </p:txBody>
+      </p:sp>
+      <p:sp>
+        <p:nvSpPr>
+          <p:cNvPr id="3" name="Rectangle 2"/>
           <p:cNvSpPr/>
           <p:nvPr/>
         </p:nvSpPr>
         <p:spPr>
           <a:xfrm>
-            <a:off x="731520" y="2514600"/>
-            <a:ext cx="137160" cy="137160"/>
+            <a:off x="0" y="0"/>
+            <a:ext cx="12191695" cy="365760"/>
           </a:xfrm>
           <a:prstGeom prst="rect">
             <a:avLst/>
@@ -8437,457 +9885,456 @@
       </p:sp>
       <p:sp>
         <p:nvSpPr>
+          <p:cNvPr id="4" name="TextBox 3"/>
+          <p:cNvSpPr txBox="1"/>
+          <p:nvPr/>
+        </p:nvSpPr>
+        <p:spPr>
+          <a:xfrm>
+            <a:off x="457200" y="868680"/>
+            <a:ext cx="10972800" cy="365760"/>
+          </a:xfrm>
+          <a:prstGeom prst="rect">
+            <a:avLst/>
+          </a:prstGeom>
+          <a:noFill/>
+        </p:spPr>
+        <p:txBody>
+          <a:bodyPr wrap="square" lIns="0" rIns="0" tIns="0" bIns="0">
+            <a:spAutoFit/>
+          </a:bodyPr>
+          <a:lstStyle/>
+          <a:p>
+            <a:pPr algn="ctr"/>
+            <a:r>
+              <a:rPr sz="1100" b="1" i="0">
+                <a:solidFill>
+                  <a:srgbClr val="10B981"/>
+                </a:solidFill>
+                <a:latin typeface="Calibri"/>
+              </a:rPr>
+              <a:t>FASHION AI ENGINE</a:t>
+            </a:r>
+          </a:p>
+        </p:txBody>
+      </p:sp>
+      <p:sp>
+        <p:nvSpPr>
+          <p:cNvPr id="5" name="TextBox 4"/>
+          <p:cNvSpPr txBox="1"/>
+          <p:nvPr/>
+        </p:nvSpPr>
+        <p:spPr>
+          <a:xfrm>
+            <a:off x="457200" y="1463040"/>
+            <a:ext cx="11247120" cy="914400"/>
+          </a:xfrm>
+          <a:prstGeom prst="rect">
+            <a:avLst/>
+          </a:prstGeom>
+          <a:noFill/>
+        </p:spPr>
+        <p:txBody>
+          <a:bodyPr wrap="square" lIns="0" rIns="0" tIns="0" bIns="0">
+            <a:spAutoFit/>
+          </a:bodyPr>
+          <a:lstStyle/>
+          <a:p>
+            <a:pPr algn="ctr"/>
+            <a:r>
+              <a:rPr sz="4400" b="1" i="1">
+                <a:solidFill>
+                  <a:srgbClr val="0F172A"/>
+                </a:solidFill>
+                <a:latin typeface="Calibri"/>
+              </a:rPr>
+              <a:t>El motor no produce menos.</a:t>
+            </a:r>
+          </a:p>
+        </p:txBody>
+      </p:sp>
+      <p:sp>
+        <p:nvSpPr>
+          <p:cNvPr id="6" name="TextBox 5"/>
+          <p:cNvSpPr txBox="1"/>
+          <p:nvPr/>
+        </p:nvSpPr>
+        <p:spPr>
+          <a:xfrm>
+            <a:off x="457200" y="2286000"/>
+            <a:ext cx="11247120" cy="914400"/>
+          </a:xfrm>
+          <a:prstGeom prst="rect">
+            <a:avLst/>
+          </a:prstGeom>
+          <a:noFill/>
+        </p:spPr>
+        <p:txBody>
+          <a:bodyPr wrap="square" lIns="0" rIns="0" tIns="0" bIns="0">
+            <a:spAutoFit/>
+          </a:bodyPr>
+          <a:lstStyle/>
+          <a:p>
+            <a:pPr algn="ctr"/>
+            <a:r>
+              <a:rPr sz="4400" b="1" i="1">
+                <a:solidFill>
+                  <a:srgbClr val="059669"/>
+                </a:solidFill>
+                <a:latin typeface="Calibri"/>
+              </a:rPr>
+              <a:t>Produce mejor.</a:t>
+            </a:r>
+          </a:p>
+        </p:txBody>
+      </p:sp>
+      <p:sp>
+        <p:nvSpPr>
           <p:cNvPr id="7" name="TextBox 6"/>
           <p:cNvSpPr txBox="1"/>
           <p:nvPr/>
         </p:nvSpPr>
         <p:spPr>
           <a:xfrm>
-            <a:off x="1051560" y="2377440"/>
-            <a:ext cx="5029200" cy="365760"/>
-          </a:xfrm>
-          <a:prstGeom prst="rect">
-            <a:avLst/>
-          </a:prstGeom>
-          <a:noFill/>
-        </p:spPr>
-        <p:txBody>
-          <a:bodyPr wrap="square" lIns="0" rIns="0" tIns="0" bIns="0">
-            <a:spAutoFit/>
-          </a:bodyPr>
-          <a:lstStyle/>
-          <a:p>
-            <a:pPr algn="l"/>
-            <a:r>
-              <a:rPr sz="1300" b="0" i="0">
-                <a:solidFill>
-                  <a:srgbClr val="1E293B"/>
-                </a:solidFill>
-                <a:latin typeface="Calibri"/>
-              </a:rPr>
-              <a:t>Datos reales de devoluciones (ASOS GraphReturns)</a:t>
-            </a:r>
-          </a:p>
-        </p:txBody>
-      </p:sp>
-      <p:sp>
-        <p:nvSpPr>
-          <p:cNvPr id="8" name="Rectangle 7"/>
-          <p:cNvSpPr/>
-          <p:nvPr/>
-        </p:nvSpPr>
-        <p:spPr>
-          <a:xfrm>
-            <a:off x="731520" y="2971800"/>
-            <a:ext cx="137160" cy="137160"/>
-          </a:xfrm>
-          <a:prstGeom prst="rect">
-            <a:avLst/>
-          </a:prstGeom>
-          <a:solidFill>
-            <a:srgbClr val="10B981"/>
-          </a:solidFill>
-          <a:ln>
-            <a:noFill/>
+            <a:off x="457200" y="3657600"/>
+            <a:ext cx="3749039" cy="731520"/>
+          </a:xfrm>
+          <a:prstGeom prst="rect">
+            <a:avLst/>
+          </a:prstGeom>
+          <a:noFill/>
+        </p:spPr>
+        <p:txBody>
+          <a:bodyPr wrap="square" lIns="0" rIns="0" tIns="0" bIns="0">
+            <a:spAutoFit/>
+          </a:bodyPr>
+          <a:lstStyle/>
+          <a:p>
+            <a:pPr algn="ctr"/>
+            <a:r>
+              <a:rPr sz="3600" b="1" i="0">
+                <a:solidFill>
+                  <a:srgbClr val="059669"/>
+                </a:solidFill>
+                <a:latin typeface="Calibri"/>
+              </a:rPr>
+              <a:t>+175,5K €</a:t>
+            </a:r>
+          </a:p>
+        </p:txBody>
+      </p:sp>
+      <p:sp>
+        <p:nvSpPr>
+          <p:cNvPr id="8" name="TextBox 7"/>
+          <p:cNvSpPr txBox="1"/>
+          <p:nvPr/>
+        </p:nvSpPr>
+        <p:spPr>
+          <a:xfrm>
+            <a:off x="457200" y="4434840"/>
+            <a:ext cx="3749039" cy="365760"/>
+          </a:xfrm>
+          <a:prstGeom prst="rect">
+            <a:avLst/>
+          </a:prstGeom>
+          <a:noFill/>
+        </p:spPr>
+        <p:txBody>
+          <a:bodyPr wrap="square" lIns="0" rIns="0" tIns="0" bIns="0">
+            <a:spAutoFit/>
+          </a:bodyPr>
+          <a:lstStyle/>
+          <a:p>
+            <a:pPr algn="ctr"/>
+            <a:r>
+              <a:rPr sz="1200" b="0" i="1">
+                <a:solidFill>
+                  <a:srgbClr val="64748B"/>
+                </a:solidFill>
+                <a:latin typeface="Calibri"/>
+              </a:rPr>
+              <a:t>margen extra</a:t>
+            </a:r>
+          </a:p>
+        </p:txBody>
+      </p:sp>
+      <p:sp>
+        <p:nvSpPr>
+          <p:cNvPr id="9" name="TextBox 8"/>
+          <p:cNvSpPr txBox="1"/>
+          <p:nvPr/>
+        </p:nvSpPr>
+        <p:spPr>
+          <a:xfrm>
+            <a:off x="4389120" y="3657600"/>
+            <a:ext cx="3749039" cy="731520"/>
+          </a:xfrm>
+          <a:prstGeom prst="rect">
+            <a:avLst/>
+          </a:prstGeom>
+          <a:noFill/>
+        </p:spPr>
+        <p:txBody>
+          <a:bodyPr wrap="square" lIns="0" rIns="0" tIns="0" bIns="0">
+            <a:spAutoFit/>
+          </a:bodyPr>
+          <a:lstStyle/>
+          <a:p>
+            <a:pPr algn="ctr"/>
+            <a:r>
+              <a:rPr sz="3600" b="1" i="0">
+                <a:solidFill>
+                  <a:srgbClr val="059669"/>
+                </a:solidFill>
+                <a:latin typeface="Calibri"/>
+              </a:rPr>
+              <a:t>5,6K uds</a:t>
+            </a:r>
+          </a:p>
+        </p:txBody>
+      </p:sp>
+      <p:sp>
+        <p:nvSpPr>
+          <p:cNvPr id="10" name="TextBox 9"/>
+          <p:cNvSpPr txBox="1"/>
+          <p:nvPr/>
+        </p:nvSpPr>
+        <p:spPr>
+          <a:xfrm>
+            <a:off x="4389120" y="4434840"/>
+            <a:ext cx="3749039" cy="365760"/>
+          </a:xfrm>
+          <a:prstGeom prst="rect">
+            <a:avLst/>
+          </a:prstGeom>
+          <a:noFill/>
+        </p:spPr>
+        <p:txBody>
+          <a:bodyPr wrap="square" lIns="0" rIns="0" tIns="0" bIns="0">
+            <a:spAutoFit/>
+          </a:bodyPr>
+          <a:lstStyle/>
+          <a:p>
+            <a:pPr algn="ctr"/>
+            <a:r>
+              <a:rPr sz="1200" b="0" i="1">
+                <a:solidFill>
+                  <a:srgbClr val="64748B"/>
+                </a:solidFill>
+                <a:latin typeface="Calibri"/>
+              </a:rPr>
+              <a:t>stock muerto evitado</a:t>
+            </a:r>
+          </a:p>
+        </p:txBody>
+      </p:sp>
+      <p:sp>
+        <p:nvSpPr>
+          <p:cNvPr id="11" name="TextBox 10"/>
+          <p:cNvSpPr txBox="1"/>
+          <p:nvPr/>
+        </p:nvSpPr>
+        <p:spPr>
+          <a:xfrm>
+            <a:off x="8321040" y="3657600"/>
+            <a:ext cx="3749039" cy="731520"/>
+          </a:xfrm>
+          <a:prstGeom prst="rect">
+            <a:avLst/>
+          </a:prstGeom>
+          <a:noFill/>
+        </p:spPr>
+        <p:txBody>
+          <a:bodyPr wrap="square" lIns="0" rIns="0" tIns="0" bIns="0">
+            <a:spAutoFit/>
+          </a:bodyPr>
+          <a:lstStyle/>
+          <a:p>
+            <a:pPr algn="ctr"/>
+            <a:r>
+              <a:rPr sz="3600" b="1" i="0">
+                <a:solidFill>
+                  <a:srgbClr val="059669"/>
+                </a:solidFill>
+                <a:latin typeface="Calibri"/>
+              </a:rPr>
+              <a:t>0</a:t>
+            </a:r>
+          </a:p>
+        </p:txBody>
+      </p:sp>
+      <p:sp>
+        <p:nvSpPr>
+          <p:cNvPr id="12" name="TextBox 11"/>
+          <p:cNvSpPr txBox="1"/>
+          <p:nvPr/>
+        </p:nvSpPr>
+        <p:spPr>
+          <a:xfrm>
+            <a:off x="8321040" y="4434840"/>
+            <a:ext cx="3749039" cy="365760"/>
+          </a:xfrm>
+          <a:prstGeom prst="rect">
+            <a:avLst/>
+          </a:prstGeom>
+          <a:noFill/>
+        </p:spPr>
+        <p:txBody>
+          <a:bodyPr wrap="square" lIns="0" rIns="0" tIns="0" bIns="0">
+            <a:spAutoFit/>
+          </a:bodyPr>
+          <a:lstStyle/>
+          <a:p>
+            <a:pPr algn="ctr"/>
+            <a:r>
+              <a:rPr sz="1200" b="0" i="1">
+                <a:solidFill>
+                  <a:srgbClr val="64748B"/>
+                </a:solidFill>
+                <a:latin typeface="Calibri"/>
+              </a:rPr>
+              <a:t>unidades adicionales</a:t>
+            </a:r>
+          </a:p>
+        </p:txBody>
+      </p:sp>
+      <p:cxnSp>
+        <p:nvCxnSpPr>
+          <p:cNvPr id="13" name="Connector 12"/>
+          <p:cNvCxnSpPr/>
+          <p:nvPr/>
+        </p:nvCxnSpPr>
+        <p:spPr>
+          <a:xfrm>
+            <a:off x="3657600" y="5349240"/>
+            <a:ext cx="4846320" cy="0"/>
+          </a:xfrm>
+          <a:prstGeom prst="line">
+            <a:avLst/>
+          </a:prstGeom>
+          <a:ln w="19050">
+            <a:solidFill>
+              <a:srgbClr val="10B981"/>
+            </a:solidFill>
           </a:ln>
-          <a:effectLst/>
         </p:spPr>
         <p:style>
-          <a:lnRef idx="1">
+          <a:lnRef idx="2">
             <a:schemeClr val="accent1"/>
           </a:lnRef>
-          <a:fillRef idx="3">
+          <a:fillRef idx="0">
             <a:schemeClr val="accent1"/>
           </a:fillRef>
-          <a:effectRef idx="2">
+          <a:effectRef idx="1">
             <a:schemeClr val="accent1"/>
           </a:effectRef>
           <a:fontRef idx="minor">
-            <a:schemeClr val="lt1"/>
+            <a:schemeClr val="tx1"/>
           </a:fontRef>
         </p:style>
-        <p:txBody>
-          <a:bodyPr rtlCol="0" anchor="ctr"/>
+      </p:cxnSp>
+      <p:sp>
+        <p:nvSpPr>
+          <p:cNvPr id="14" name="TextBox 13"/>
+          <p:cNvSpPr txBox="1"/>
+          <p:nvPr/>
+        </p:nvSpPr>
+        <p:spPr>
+          <a:xfrm>
+            <a:off x="457200" y="5532120"/>
+            <a:ext cx="11247120" cy="365760"/>
+          </a:xfrm>
+          <a:prstGeom prst="rect">
+            <a:avLst/>
+          </a:prstGeom>
+          <a:noFill/>
+        </p:spPr>
+        <p:txBody>
+          <a:bodyPr wrap="square" lIns="0" rIns="0" tIns="0" bIns="0">
+            <a:spAutoFit/>
+          </a:bodyPr>
           <a:lstStyle/>
           <a:p>
             <a:pPr algn="ctr"/>
-          </a:p>
-        </p:txBody>
-      </p:sp>
-      <p:sp>
-        <p:nvSpPr>
-          <p:cNvPr id="9" name="TextBox 8"/>
-          <p:cNvSpPr txBox="1"/>
-          <p:nvPr/>
-        </p:nvSpPr>
-        <p:spPr>
-          <a:xfrm>
-            <a:off x="1051560" y="2834640"/>
-            <a:ext cx="5029200" cy="365760"/>
-          </a:xfrm>
-          <a:prstGeom prst="rect">
-            <a:avLst/>
-          </a:prstGeom>
-          <a:noFill/>
-        </p:spPr>
-        <p:txBody>
-          <a:bodyPr wrap="square" lIns="0" rIns="0" tIns="0" bIns="0">
-            <a:spAutoFit/>
-          </a:bodyPr>
-          <a:lstStyle/>
-          <a:p>
-            <a:pPr algn="l"/>
-            <a:r>
-              <a:rPr sz="1300" b="0" i="0">
+            <a:r>
+              <a:rPr sz="1400" b="0" i="1">
                 <a:solidFill>
                   <a:srgbClr val="1E293B"/>
                 </a:solidFill>
                 <a:latin typeface="Calibri"/>
               </a:rPr>
-              <a:t>Elasticidad de precio y dinámicas de stock</a:t>
-            </a:r>
-          </a:p>
-        </p:txBody>
-      </p:sp>
-      <p:sp>
-        <p:nvSpPr>
-          <p:cNvPr id="10" name="Rectangle 9"/>
-          <p:cNvSpPr/>
-          <p:nvPr/>
-        </p:nvSpPr>
-        <p:spPr>
-          <a:xfrm>
-            <a:off x="731520" y="3429000"/>
-            <a:ext cx="137160" cy="137160"/>
-          </a:xfrm>
-          <a:prstGeom prst="rect">
-            <a:avLst/>
-          </a:prstGeom>
-          <a:solidFill>
-            <a:srgbClr val="10B981"/>
-          </a:solidFill>
-          <a:ln>
-            <a:noFill/>
-          </a:ln>
-          <a:effectLst/>
-        </p:spPr>
-        <p:style>
-          <a:lnRef idx="1">
-            <a:schemeClr val="accent1"/>
-          </a:lnRef>
-          <a:fillRef idx="3">
-            <a:schemeClr val="accent1"/>
-          </a:fillRef>
-          <a:effectRef idx="2">
-            <a:schemeClr val="accent1"/>
-          </a:effectRef>
-          <a:fontRef idx="minor">
-            <a:schemeClr val="lt1"/>
-          </a:fontRef>
-        </p:style>
-        <p:txBody>
-          <a:bodyPr rtlCol="0" anchor="ctr"/>
+              <a:t>En un contexto donde la ley prohíbe destruir excedentes,</a:t>
+            </a:r>
+          </a:p>
+        </p:txBody>
+      </p:sp>
+      <p:sp>
+        <p:nvSpPr>
+          <p:cNvPr id="15" name="TextBox 14"/>
+          <p:cNvSpPr txBox="1"/>
+          <p:nvPr/>
+        </p:nvSpPr>
+        <p:spPr>
+          <a:xfrm>
+            <a:off x="457200" y="5897880"/>
+            <a:ext cx="11247120" cy="365760"/>
+          </a:xfrm>
+          <a:prstGeom prst="rect">
+            <a:avLst/>
+          </a:prstGeom>
+          <a:noFill/>
+        </p:spPr>
+        <p:txBody>
+          <a:bodyPr wrap="square" lIns="0" rIns="0" tIns="0" bIns="0">
+            <a:spAutoFit/>
+          </a:bodyPr>
           <a:lstStyle/>
           <a:p>
             <a:pPr algn="ctr"/>
-          </a:p>
-        </p:txBody>
-      </p:sp>
-      <p:sp>
-        <p:nvSpPr>
-          <p:cNvPr id="11" name="TextBox 10"/>
-          <p:cNvSpPr txBox="1"/>
-          <p:nvPr/>
-        </p:nvSpPr>
-        <p:spPr>
-          <a:xfrm>
-            <a:off x="1051560" y="3291840"/>
-            <a:ext cx="5029200" cy="365760"/>
-          </a:xfrm>
-          <a:prstGeom prst="rect">
-            <a:avLst/>
-          </a:prstGeom>
-          <a:noFill/>
-        </p:spPr>
-        <p:txBody>
-          <a:bodyPr wrap="square" lIns="0" rIns="0" tIns="0" bIns="0">
-            <a:spAutoFit/>
-          </a:bodyPr>
-          <a:lstStyle/>
-          <a:p>
-            <a:pPr algn="l"/>
-            <a:r>
-              <a:rPr sz="1300" b="0" i="0">
+            <a:r>
+              <a:rPr sz="1400" b="0" i="1">
                 <a:solidFill>
                   <a:srgbClr val="1E293B"/>
                 </a:solidFill>
                 <a:latin typeface="Calibri"/>
               </a:rPr>
-              <a:t>Recomputación física del simulador (servicio asíncrono)</a:t>
-            </a:r>
-          </a:p>
-        </p:txBody>
-      </p:sp>
-      <p:sp>
-        <p:nvSpPr>
-          <p:cNvPr id="12" name="Rectangle 11"/>
-          <p:cNvSpPr/>
-          <p:nvPr/>
-        </p:nvSpPr>
-        <p:spPr>
-          <a:xfrm>
-            <a:off x="731520" y="3886200"/>
-            <a:ext cx="137160" cy="137160"/>
-          </a:xfrm>
-          <a:prstGeom prst="rect">
-            <a:avLst/>
-          </a:prstGeom>
-          <a:solidFill>
-            <a:srgbClr val="10B981"/>
-          </a:solidFill>
-          <a:ln>
-            <a:noFill/>
-          </a:ln>
-          <a:effectLst/>
-        </p:spPr>
-        <p:style>
-          <a:lnRef idx="1">
-            <a:schemeClr val="accent1"/>
-          </a:lnRef>
-          <a:fillRef idx="3">
-            <a:schemeClr val="accent1"/>
-          </a:fillRef>
-          <a:effectRef idx="2">
-            <a:schemeClr val="accent1"/>
-          </a:effectRef>
-          <a:fontRef idx="minor">
-            <a:schemeClr val="lt1"/>
-          </a:fontRef>
-        </p:style>
-        <p:txBody>
-          <a:bodyPr rtlCol="0" anchor="ctr"/>
+              <a:t>producir mejor deja de ser optimización: es estrategia.</a:t>
+            </a:r>
+          </a:p>
+        </p:txBody>
+      </p:sp>
+      <p:sp>
+        <p:nvSpPr>
+          <p:cNvPr id="16" name="TextBox 15"/>
+          <p:cNvSpPr txBox="1"/>
+          <p:nvPr/>
+        </p:nvSpPr>
+        <p:spPr>
+          <a:xfrm>
+            <a:off x="457200" y="6492240"/>
+            <a:ext cx="11247120" cy="274320"/>
+          </a:xfrm>
+          <a:prstGeom prst="rect">
+            <a:avLst/>
+          </a:prstGeom>
+          <a:noFill/>
+        </p:spPr>
+        <p:txBody>
+          <a:bodyPr wrap="square" lIns="0" rIns="0" tIns="0" bIns="0">
+            <a:spAutoFit/>
+          </a:bodyPr>
           <a:lstStyle/>
           <a:p>
             <a:pPr algn="ctr"/>
-          </a:p>
-        </p:txBody>
-      </p:sp>
-      <p:sp>
-        <p:nvSpPr>
-          <p:cNvPr id="13" name="TextBox 12"/>
-          <p:cNvSpPr txBox="1"/>
-          <p:nvPr/>
-        </p:nvSpPr>
-        <p:spPr>
-          <a:xfrm>
-            <a:off x="1051560" y="3749039"/>
-            <a:ext cx="5029200" cy="365760"/>
-          </a:xfrm>
-          <a:prstGeom prst="rect">
-            <a:avLst/>
-          </a:prstGeom>
-          <a:noFill/>
-        </p:spPr>
-        <p:txBody>
-          <a:bodyPr wrap="square" lIns="0" rIns="0" tIns="0" bIns="0">
-            <a:spAutoFit/>
-          </a:bodyPr>
-          <a:lstStyle/>
-          <a:p>
-            <a:pPr algn="l"/>
-            <a:r>
-              <a:rPr sz="1300" b="0" i="0">
-                <a:solidFill>
-                  <a:srgbClr val="1E293B"/>
-                </a:solidFill>
-                <a:latin typeface="Calibri"/>
-              </a:rPr>
-              <a:t>Bayesian optimization de α por categoría</a:t>
-            </a:r>
-          </a:p>
-        </p:txBody>
-      </p:sp>
-      <p:sp>
-        <p:nvSpPr>
-          <p:cNvPr id="14" name="Rectangle 13"/>
-          <p:cNvSpPr/>
-          <p:nvPr/>
-        </p:nvSpPr>
-        <p:spPr>
-          <a:xfrm>
-            <a:off x="6858000" y="1828800"/>
-            <a:ext cx="4572000" cy="4114800"/>
-          </a:xfrm>
-          <a:prstGeom prst="rect">
-            <a:avLst/>
-          </a:prstGeom>
-          <a:solidFill>
-            <a:srgbClr val="0F172A"/>
-          </a:solidFill>
-          <a:ln>
-            <a:noFill/>
-          </a:ln>
-          <a:effectLst/>
-        </p:spPr>
-        <p:style>
-          <a:lnRef idx="1">
-            <a:schemeClr val="accent1"/>
-          </a:lnRef>
-          <a:fillRef idx="3">
-            <a:schemeClr val="accent1"/>
-          </a:fillRef>
-          <a:effectRef idx="2">
-            <a:schemeClr val="accent1"/>
-          </a:effectRef>
-          <a:fontRef idx="minor">
-            <a:schemeClr val="lt1"/>
-          </a:fontRef>
-        </p:style>
-        <p:txBody>
-          <a:bodyPr rtlCol="0" anchor="ctr"/>
-          <a:lstStyle/>
-          <a:p>
-            <a:pPr algn="ctr"/>
-          </a:p>
-        </p:txBody>
-      </p:sp>
-      <p:sp>
-        <p:nvSpPr>
-          <p:cNvPr id="15" name="TextBox 14"/>
-          <p:cNvSpPr txBox="1"/>
-          <p:nvPr/>
-        </p:nvSpPr>
-        <p:spPr>
-          <a:xfrm>
-            <a:off x="7132320" y="2103120"/>
-            <a:ext cx="4114800" cy="365760"/>
-          </a:xfrm>
-          <a:prstGeom prst="rect">
-            <a:avLst/>
-          </a:prstGeom>
-          <a:noFill/>
-        </p:spPr>
-        <p:txBody>
-          <a:bodyPr wrap="square" lIns="0" rIns="0" tIns="0" bIns="0">
-            <a:spAutoFit/>
-          </a:bodyPr>
-          <a:lstStyle/>
-          <a:p>
-            <a:pPr algn="l"/>
-            <a:r>
-              <a:rPr sz="1100" b="1" i="0">
-                <a:solidFill>
-                  <a:srgbClr val="10B981"/>
-                </a:solidFill>
-                <a:latin typeface="Calibri"/>
-              </a:rPr>
-              <a:t>TAKEAWAY</a:t>
-            </a:r>
-          </a:p>
-        </p:txBody>
-      </p:sp>
-      <p:sp>
-        <p:nvSpPr>
-          <p:cNvPr id="16" name="TextBox 15"/>
-          <p:cNvSpPr txBox="1"/>
-          <p:nvPr/>
-        </p:nvSpPr>
-        <p:spPr>
-          <a:xfrm>
-            <a:off x="7132320" y="2560320"/>
-            <a:ext cx="4114800" cy="1371600"/>
-          </a:xfrm>
-          <a:prstGeom prst="rect">
-            <a:avLst/>
-          </a:prstGeom>
-          <a:noFill/>
-        </p:spPr>
-        <p:txBody>
-          <a:bodyPr wrap="square" lIns="0" rIns="0" tIns="0" bIns="0">
-            <a:spAutoFit/>
-          </a:bodyPr>
-          <a:lstStyle/>
-          <a:p>
-            <a:pPr algn="l"/>
-            <a:r>
-              <a:rPr sz="2400" b="1" i="0">
-                <a:solidFill>
-                  <a:srgbClr val="FFFFFF"/>
-                </a:solidFill>
-                <a:latin typeface="Calibri"/>
-              </a:rPr>
-              <a:t>El motor no produce menos.
-Produce mejor.</a:t>
-            </a:r>
-          </a:p>
-        </p:txBody>
-      </p:sp>
-      <p:sp>
-        <p:nvSpPr>
-          <p:cNvPr id="17" name="TextBox 16"/>
-          <p:cNvSpPr txBox="1"/>
-          <p:nvPr/>
-        </p:nvSpPr>
-        <p:spPr>
-          <a:xfrm>
-            <a:off x="7132320" y="4206240"/>
-            <a:ext cx="4114800" cy="1371600"/>
-          </a:xfrm>
-          <a:prstGeom prst="rect">
-            <a:avLst/>
-          </a:prstGeom>
-          <a:noFill/>
-        </p:spPr>
-        <p:txBody>
-          <a:bodyPr wrap="square" lIns="0" rIns="0" tIns="0" bIns="0">
-            <a:spAutoFit/>
-          </a:bodyPr>
-          <a:lstStyle/>
-          <a:p>
-            <a:pPr algn="l"/>
-            <a:r>
-              <a:rPr sz="1200" b="0" i="0">
-                <a:solidFill>
-                  <a:srgbClr val="CBD5E1"/>
-                </a:solidFill>
-                <a:latin typeface="Calibri"/>
-              </a:rPr>
-              <a:t>175.535 € de margen adicional al mismo presupuesto, evitando 5,6K unidades de stock muerto.</a:t>
-            </a:r>
-          </a:p>
-        </p:txBody>
-      </p:sp>
-      <p:sp>
-        <p:nvSpPr>
-          <p:cNvPr id="18" name="TextBox 17"/>
-          <p:cNvSpPr txBox="1"/>
-          <p:nvPr/>
-        </p:nvSpPr>
-        <p:spPr>
-          <a:xfrm>
-            <a:off x="7132320" y="5486400"/>
-            <a:ext cx="4114800" cy="365760"/>
-          </a:xfrm>
-          <a:prstGeom prst="rect">
-            <a:avLst/>
-          </a:prstGeom>
-          <a:noFill/>
-        </p:spPr>
-        <p:txBody>
-          <a:bodyPr wrap="square" lIns="0" rIns="0" tIns="0" bIns="0">
-            <a:spAutoFit/>
-          </a:bodyPr>
-          <a:lstStyle/>
-          <a:p>
-            <a:pPr algn="l"/>
-            <a:r>
-              <a:rPr sz="1200" b="0" i="1">
-                <a:solidFill>
-                  <a:srgbClr val="10B981"/>
-                </a:solidFill>
-                <a:latin typeface="Calibri"/>
-              </a:rPr>
-              <a:t>Decisiones basadas en datos, no en intuición.</a:t>
+            <a:r>
+              <a:rPr sz="1000" b="0" i="1">
+                <a:solidFill>
+                  <a:srgbClr val="64748B"/>
+                </a:solidFill>
+                <a:latin typeface="Calibri"/>
+                <a:hlinkClick r:id="rId2"/>
+              </a:rPr>
+              <a:t>Esther Barranco Motos · fashion-ai-engine-app.streamlit.app</a:t>
             </a:r>
           </a:p>
         </p:txBody>
